--- a/presentation/Volvo_Battery_Passport.pptx
+++ b/presentation/Volvo_Battery_Passport.pptx
@@ -4,6 +4,9 @@
   <p:sldMasterIdLst>
     <p:sldMasterId id="2147483648" r:id="rId1"/>
   </p:sldMasterIdLst>
+  <p:notesMasterIdLst>
+    <p:notesMasterId r:id="rId16"/>
+  </p:notesMasterIdLst>
   <p:sldIdLst>
     <p:sldId id="256" r:id="rId2"/>
     <p:sldId id="257" r:id="rId3"/>
@@ -20,9 +23,6 @@
     <p:sldId id="268" r:id="rId14"/>
     <p:sldId id="269" r:id="rId15"/>
   </p:sldIdLst>
-  <p:notesMasterIdLst>
-    <p:notesMasterId r:id="rId16"/>
-  </p:notesMasterIdLst>
   <p:sldSz cx="12192000" cy="6858000"/>
   <p:notesSz cx="6858000" cy="12192000"/>
   <p:defaultTextStyle>
@@ -120,7 +120,7 @@
   <p:extLst>
     <p:ext uri="{521415D9-36F7-43E2-AB2F-B90AF26B5E84}">
       <p14:sectionLst xmlns:p14="http://schemas.microsoft.com/office/powerpoint/2010/main">
-        <p14:section name="Introduction" id="{87f391f3-e64a-10d6-8b55-7f6a17fe85a2}">
+        <p14:section name="Introduction" id="{87F391F3-E64A-10D6-8B55-7F6A17FE85A2}">
           <p14:sldIdLst>
             <p14:sldId id="256"/>
             <p14:sldId id="257"/>
@@ -128,7 +128,7 @@
             <p14:sldId id="259"/>
           </p14:sldIdLst>
         </p14:section>
-        <p14:section name="System design" id="{2f27ee9a-8e86-654e-e3f1-3c5888344219}">
+        <p14:section name="System design" id="{2F27EE9A-8E86-654E-E3F1-3C5888344219}">
           <p14:sldIdLst>
             <p14:sldId id="260"/>
             <p14:sldId id="261"/>
@@ -137,14 +137,14 @@
             <p14:sldId id="264"/>
           </p14:sldIdLst>
         </p14:section>
-        <p14:section name="Implementation" id="{0f746339-f257-31bb-e705-6cc8620bf90d}">
+        <p14:section name="Implementation" id="{0F746339-F257-31BB-E705-6CC8620BF90D}">
           <p14:sldIdLst>
             <p14:sldId id="265"/>
             <p14:sldId id="266"/>
             <p14:sldId id="267"/>
           </p14:sldIdLst>
         </p14:section>
-        <p14:section name="Evaluation" id="{c056b984-dfac-bee0-7bcb-cbd6e9b192a4}">
+        <p14:section name="Evaluation" id="{C056B984-DFAC-BEE0-7BCB-CBD6E9B192A4}">
           <p14:sldIdLst>
             <p14:sldId id="268"/>
             <p14:sldId id="269"/>
@@ -181,234 +181,10 @@
           <a:chExt cx="0" cy="0"/>
         </a:xfrm>
       </p:grpSpPr>
-      <p:sp>
-        <p:nvSpPr>
-          <p:cNvPr id="2" name="Header Placeholder 1"/>
-          <p:cNvSpPr>
-            <a:spLocks noGrp="1"/>
-          </p:cNvSpPr>
-          <p:nvPr>
-            <p:ph type="hdr" sz="quarter"/>
-          </p:nvPr>
-        </p:nvSpPr>
-        <p:spPr>
-          <a:xfrm>
-            <a:off x="0" y="0"/>
-            <a:ext cx="2971800" cy="458788"/>
-          </a:xfrm>
-          <a:prstGeom prst="rect">
-            <a:avLst/>
-          </a:prstGeom>
-        </p:spPr>
-        <p:txBody>
-          <a:bodyPr vert="horz" lIns="91440" tIns="45720" rIns="91440" bIns="45720" rtlCol="0"/>
-          <a:lstStyle>
-            <a:lvl1pPr algn="l">
-              <a:defRPr sz="1200"/>
-            </a:lvl1pPr>
-          </a:lstStyle>
-          <a:p>
-            <a:endParaRPr lang="en-US"/>
-          </a:p>
-        </p:txBody>
-      </p:sp>
-      <p:sp>
-        <p:nvSpPr>
-          <p:cNvPr id="3" name="Date Placeholder 2"/>
-          <p:cNvSpPr>
-            <a:spLocks noGrp="1"/>
-          </p:cNvSpPr>
-          <p:nvPr>
-            <p:ph type="dt" idx="1"/>
-          </p:nvPr>
-        </p:nvSpPr>
-        <p:spPr>
-          <a:xfrm>
-            <a:off x="3884613" y="0"/>
-            <a:ext cx="2971800" cy="458788"/>
-          </a:xfrm>
-          <a:prstGeom prst="rect">
-            <a:avLst/>
-          </a:prstGeom>
-        </p:spPr>
-        <p:txBody>
-          <a:bodyPr vert="horz" lIns="91440" tIns="45720" rIns="91440" bIns="45720" rtlCol="0"/>
-          <a:lstStyle>
-            <a:lvl1pPr algn="r">
-              <a:defRPr sz="1200"/>
-            </a:lvl1pPr>
-          </a:lstStyle>
-          <a:p>
-            <a:fld id="{5282F153-3F37-0F45-9E97-73ACFA13230C}" type="datetimeFigureOut">
-              <a:rPr lang="en-US"/>
-              <a:t>7/23/19</a:t>
-            </a:fld>
-            <a:endParaRPr lang="en-US"/>
-          </a:p>
-        </p:txBody>
-      </p:sp>
-      <p:sp>
-        <p:nvSpPr>
-          <p:cNvPr id="4" name="Slide Image Placeholder 3"/>
-          <p:cNvSpPr>
-            <a:spLocks noGrp="1" noRot="1" noChangeAspect="1"/>
-          </p:cNvSpPr>
-          <p:nvPr>
-            <p:ph type="sldImg" idx="2"/>
-          </p:nvPr>
-        </p:nvSpPr>
-        <p:spPr>
-          <a:xfrm>
-            <a:off x="685800" y="1143000"/>
-            <a:ext cx="5486400" cy="3086100"/>
-          </a:xfrm>
-          <a:prstGeom prst="rect">
-            <a:avLst/>
-          </a:prstGeom>
-          <a:noFill/>
-          <a:ln w="12700">
-            <a:solidFill>
-              <a:prstClr val="black"/>
-            </a:solidFill>
-          </a:ln>
-        </p:spPr>
-        <p:txBody>
-          <a:bodyPr vert="horz" lIns="91440" tIns="45720" rIns="91440" bIns="45720" rtlCol="0" anchor="ctr"/>
-          <a:lstStyle/>
-          <a:p>
-            <a:endParaRPr lang="en-US"/>
-          </a:p>
-        </p:txBody>
-      </p:sp>
-      <p:sp>
-        <p:nvSpPr>
-          <p:cNvPr id="5" name="Notes Placeholder 4"/>
-          <p:cNvSpPr>
-            <a:spLocks noGrp="1"/>
-          </p:cNvSpPr>
-          <p:nvPr>
-            <p:ph type="body" sz="quarter" idx="3"/>
-          </p:nvPr>
-        </p:nvSpPr>
-        <p:spPr>
-          <a:xfrm>
-            <a:off x="685800" y="4400550"/>
-            <a:ext cx="5486400" cy="3600450"/>
-          </a:xfrm>
-          <a:prstGeom prst="rect">
-            <a:avLst/>
-          </a:prstGeom>
-        </p:spPr>
-        <p:txBody>
-          <a:bodyPr vert="horz" lIns="91440" tIns="45720" rIns="91440" bIns="45720" rtlCol="0"/>
-          <a:lstStyle/>
-          <a:p>
-            <a:pPr lvl="0"/>
-            <a:r>
-              <a:rPr lang="en-US"/>
-              <a:t>Click to edit Master text styles</a:t>
-            </a:r>
-          </a:p>
-          <a:p>
-            <a:pPr lvl="1"/>
-            <a:r>
-              <a:rPr lang="en-US"/>
-              <a:t>Second level</a:t>
-            </a:r>
-          </a:p>
-          <a:p>
-            <a:pPr lvl="2"/>
-            <a:r>
-              <a:rPr lang="en-US"/>
-              <a:t>Third level</a:t>
-            </a:r>
-          </a:p>
-          <a:p>
-            <a:pPr lvl="3"/>
-            <a:r>
-              <a:rPr lang="en-US"/>
-              <a:t>Fourth level</a:t>
-            </a:r>
-          </a:p>
-          <a:p>
-            <a:pPr lvl="4"/>
-            <a:r>
-              <a:rPr lang="en-US"/>
-              <a:t>Fifth level</a:t>
-            </a:r>
-          </a:p>
-        </p:txBody>
-      </p:sp>
-      <p:sp>
-        <p:nvSpPr>
-          <p:cNvPr id="6" name="Footer Placeholder 5"/>
-          <p:cNvSpPr>
-            <a:spLocks noGrp="1"/>
-          </p:cNvSpPr>
-          <p:nvPr>
-            <p:ph type="ftr" sz="quarter" idx="4"/>
-          </p:nvPr>
-        </p:nvSpPr>
-        <p:spPr>
-          <a:xfrm>
-            <a:off x="0" y="8685213"/>
-            <a:ext cx="2971800" cy="458787"/>
-          </a:xfrm>
-          <a:prstGeom prst="rect">
-            <a:avLst/>
-          </a:prstGeom>
-        </p:spPr>
-        <p:txBody>
-          <a:bodyPr vert="horz" lIns="91440" tIns="45720" rIns="91440" bIns="45720" rtlCol="0" anchor="b"/>
-          <a:lstStyle>
-            <a:lvl1pPr algn="l">
-              <a:defRPr sz="1200"/>
-            </a:lvl1pPr>
-          </a:lstStyle>
-          <a:p>
-            <a:endParaRPr lang="en-US"/>
-          </a:p>
-        </p:txBody>
-      </p:sp>
-      <p:sp>
-        <p:nvSpPr>
-          <p:cNvPr id="7" name="Slide Number Placeholder 6"/>
-          <p:cNvSpPr>
-            <a:spLocks noGrp="1"/>
-          </p:cNvSpPr>
-          <p:nvPr>
-            <p:ph type="sldNum" sz="quarter" idx="5"/>
-          </p:nvPr>
-        </p:nvSpPr>
-        <p:spPr>
-          <a:xfrm>
-            <a:off x="3884613" y="8685213"/>
-            <a:ext cx="2971800" cy="458787"/>
-          </a:xfrm>
-          <a:prstGeom prst="rect">
-            <a:avLst/>
-          </a:prstGeom>
-        </p:spPr>
-        <p:txBody>
-          <a:bodyPr vert="horz" lIns="91440" tIns="45720" rIns="91440" bIns="45720" rtlCol="0" anchor="b"/>
-          <a:lstStyle>
-            <a:lvl1pPr algn="r">
-              <a:defRPr sz="1200"/>
-            </a:lvl1pPr>
-          </a:lstStyle>
-          <a:p>
-            <a:fld id="{CE5E9CC1-C706-0F49-92D6-E571CC5EEA8F}" type="slidenum">
-              <a:rPr lang="en-US"/>
-              <a:t>‹#›</a:t>
-            </a:fld>
-            <a:endParaRPr lang="en-US"/>
-          </a:p>
-        </p:txBody>
-      </p:sp>
     </p:spTree>
     <p:extLst>
       <p:ext uri="{BB962C8B-B14F-4D97-AF65-F5344CB8AC3E}">
-        <p14:creationId xmlns:p14="http://schemas.microsoft.com/office/powerpoint/2010/main" val="1024086991"/>
+        <p14:creationId xmlns:p14="http://schemas.microsoft.com/office/powerpoint/2010/main" val="2957626318"/>
       </p:ext>
     </p:extLst>
   </p:cSld>
@@ -559,7 +335,6 @@
 The numbers on the slide summarise the build: one Solidity smart contract, five roles enforced on-chain, six lifecycle stages, and ten automated smart-contract tests that all pass.
 Important framing for the viva: the idea is inspired by the Volvo Cars and Circulor battery-traceability work, but this is my own educational implementation. It is not a Volvo or Circulor product and is not connected to their systems. Everything runs on a local Hardhat blockchain, chain ID 31337, on my laptop, and all battery data is fictional demo data.</a:t>
             </a:r>
-            <a:endParaRPr lang="en-US" dirty="0"/>
           </a:p>
         </p:txBody>
       </p:sp>
@@ -653,7 +428,6 @@
 Steps five to seven: MetaMask asks the user to approve and signs, the app waits for the transaction receipt and checks its status is success, then re-reads the passport from the blockchain. The UI does not fake success in local state.
 On the right are three operations people often confuse. Signing happens in the wallet: it proves who sent the transaction, but nothing is on-chain yet. Confirmation is when the node includes the transaction in a block; on Hardhat each transaction is mined immediately, and the receipt shows whether it succeeded. Reading uses eth_call: it is free, instant, needs no signature and creates no block, and it is how the public passport is loaded.</a:t>
             </a:r>
-            <a:endParaRPr lang="en-US" dirty="0"/>
           </a:p>
         </p:txBody>
       </p:sp>
@@ -745,7 +519,6 @@
 At the bottom is the difference between the public and full passport. The public view is open to anyone. The full view is limited to Admin and Regulator and adds the supplier’s address, the registration time and the refining details. Again, this is a function-level restriction, not encryption.
 Limitation: because everything runs on localhost, the QR link only works on the same computer while the app and the Hardhat node are running.</a:t>
             </a:r>
-            <a:endParaRPr lang="en-US" dirty="0"/>
           </a:p>
         </p:txBody>
       </p:sp>
@@ -837,7 +610,6 @@
 Third, the dashboard correctly showed the batch information, the lifecycle state, the material origin, the recycled content and the QR code.
 To be clear: these are functional results from a local Hardhat network, not a production deployment and not performance benchmarks. The batch data is fictional.</a:t>
             </a:r>
-            <a:endParaRPr lang="en-US" dirty="0"/>
           </a:p>
         </p:txBody>
       </p:sp>
@@ -928,7 +700,6 @@
 Security considerations: write functions are protected properly, because they check msg.sender, which is proven by the signature. But the full-passport restriction is a view function, and in a read call the ‘from’ address can be set by anyone, so it is not a privacy control. There is a single Admin key; if it is lost, or the Admin revokes their own role, nobody can manage roles any more. And the Hardhat test private keys are public, so they must never be used with real funds.
 Future enhancements, clearly not implemented yet: a permissioned network such as Hyperledger Fabric or a private EVM chain; keeping confidential data off-chain and storing only hashes on-chain; supplier audits, certificates and IoT data to improve data quality; multi-signature Admin control with role expiry; and extra passport data such as battery health, repair history and an event-history view.</a:t>
             </a:r>
-            <a:endParaRPr lang="en-US" dirty="0"/>
           </a:p>
         </p:txBody>
       </p:sp>
@@ -1020,7 +791,6 @@
 The references on the right are the EU Battery Regulation that motivates battery passports and the official documentation of the tools I used.
 Thank you. I am happy to take questions.</a:t>
             </a:r>
-            <a:endParaRPr lang="en-US" dirty="0"/>
           </a:p>
         </p:txBody>
       </p:sp>
@@ -1112,7 +882,6 @@
 Problem three: regulation. The EU Battery Regulation 2023/1542 requires a digital battery passport for EV batteries from February 2027, so manufacturers need a reliable way to collect this lifecycle data.
 That gives the motivation for the project: a shared, tamper-evident record where only authorised participants can write, and where anyone can read the public information.</a:t>
             </a:r>
-            <a:endParaRPr lang="en-US" dirty="0"/>
           </a:p>
         </p:txBody>
       </p:sp>
@@ -1202,7 +971,6 @@
 On the right is the scope. In scope, and implemented: a single Solidity contract, a local Hardhat blockchain with chain ID 31337, a React and Vite dashboard, five roles, six lifecycle stages and fictional demo data.
 Out of scope: I did not deploy to a public blockchain and there is no integration with Volvo or Circulor. The system also does not check whether submitted data is true, does not encrypt data, and does not use IoT sensors. Stating this clearly avoids over-claiming what a prototype can do.</a:t>
             </a:r>
-            <a:endParaRPr lang="en-US" dirty="0"/>
           </a:p>
         </p:txBody>
       </p:sp>
@@ -1292,7 +1060,6 @@
 One, a shared ledger: all participants read the same contract state, so there is no need to reconcile separate databases. Two, append-only history: data is added through transactions, and my contract has no function to edit or delete a stage once it is recorded. Three, every transaction is digitally signed with the sender’s private key, so each record is linked to an account address. Four, rules in code: the smart contract decides who may write and in which order, and any invalid call is rejected, which we call a revert.
 The bottom half is the honest part. Blockchain gives an audit trail, a common source of truth and automatic rule enforcement. But it does not prove that the data someone typed in is true; if a supplier enters a false mine location, the blockchain stores the false value permanently. It also does not provide privacy, and an address is not a real-world identity. These limits come back on the limitations slide.</a:t>
             </a:r>
-            <a:endParaRPr lang="en-US" dirty="0"/>
           </a:p>
         </p:txBody>
       </p:sp>
@@ -1386,7 +1153,6 @@
 The bottom strip shows the developer steps before a demo: compile the contract to get the ABI, deploy it to get the address, then run export-frontend.ts, which writes the ABI, address and chain ID into frontend/src/contract.ts for the dashboard to import.
 Note on ordering: in the code, the React app calls viem, and viem hands the transaction to MetaMask for signing, so the diagram shows viem before MetaMask.</a:t>
             </a:r>
-            <a:endParaRPr lang="en-US" dirty="0"/>
           </a:p>
         </p:txBody>
       </p:sp>
@@ -1478,7 +1244,6 @@
 On the frontend, React 19 with TypeScript builds the dashboard and Vite serves it at localhost:5173. viem is the library that talks to the blockchain: it turns function calls into encoded transactions using the ABI, reads data over RPC, sends writes through MetaMask and waits for receipts. MetaMask stores the private key and signs. qrcode.react draws the QR code in the browser.
 Everything is free and local. The ETH in the Hardhat accounts is test ETH with no real value.</a:t>
             </a:r>
-            <a:endParaRPr lang="en-US" dirty="0"/>
           </a:p>
         </p:txBody>
       </p:sp>
@@ -1570,7 +1335,6 @@
 For reading: getPublicPassport can be called by anyone and returns 11 public fields. getFullPassport and getAllBatchIds are limited to Admin and Regulator. getRole lets the dashboard check the connected account’s role.
 Finally, the contract emits four events: RoleGranted, RoleRevoked, BatteryRegistered and StageAdvanced. These events form the on-chain audit trail of who did what and when.</a:t>
             </a:r>
-            <a:endParaRPr lang="en-US" dirty="0"/>
           </a:p>
         </p:txBody>
       </p:sp>
@@ -1662,7 +1426,6 @@
 How is it enforced? Each write function has a modifier, such as onlySupplier, that checks msg.sender, the address that signed the transaction. If the role is wrong, the transaction reverts with a message like ‘Access denied: Supplier role required’.
 One important point: access control is not confidentiality. These checks decide who may call a function, but they do not encrypt the data. Anyone running a node can read the contract’s storage directly.</a:t>
             </a:r>
-            <a:endParaRPr lang="en-US" dirty="0"/>
           </a:p>
         </p:txBody>
       </p:sp>
@@ -1753,7 +1516,6 @@
 The right side shows the checks the contract performs on every lifecycle write, in order. First, the role, using a modifier on msg.sender. Second, that the batch exists. Third, that it is at exactly the expected stage, so you cannot skip a stage or go backwards. Fourth, simple input validation, such as non-empty text, recycled content between 0 and 100, and a carbon footprint greater than zero. Only then is the data stored and a StageAdvanced event emitted.
 If any check fails, the whole transaction reverts and nothing is stored. The slide shows one real error message from the contract. Because each stage function can only run once per batch, recorded stage data cannot be overwritten.</a:t>
             </a:r>
-            <a:endParaRPr lang="en-US" dirty="0"/>
           </a:p>
         </p:txBody>
       </p:sp>
@@ -1831,6 +1593,7 @@
         <a:solidFill>
           <a:srgbClr val="1F2328"/>
         </a:solidFill>
+        <a:effectLst/>
       </p:bgPr>
     </p:bg>
     <p:spTree>
@@ -1866,13 +1629,22 @@
           </a:solidFill>
           <a:ln/>
         </p:spPr>
+        <p:txBody>
+          <a:bodyPr/>
+          <a:lstStyle/>
+          <a:p>
+            <a:endParaRPr lang="en-IN"/>
+          </a:p>
+        </p:txBody>
       </p:sp>
       <p:sp>
         <p:nvSpPr>
           <p:cNvPr id="3" name="Text 1"/>
-          <p:cNvSpPr/>
+          <p:cNvSpPr>
+            <a:spLocks noGrp="1"/>
+          </p:cNvSpPr>
           <p:nvPr>
-            <p:ph idx="101" type="title" hasCustomPrompt="1"/>
+            <p:ph type="title" idx="101" hasCustomPrompt="1"/>
           </p:nvPr>
         </p:nvSpPr>
         <p:spPr>
@@ -1889,7 +1661,7 @@
         <p:txBody>
           <a:bodyPr wrap="square" rtlCol="0"/>
           <a:lstStyle>
-            <a:lvl1pPr algn="l" indent="0" marL="0">
+            <a:lvl1pPr marL="0" indent="0" algn="l">
               <a:buNone/>
               <a:defRPr lang="en-US" sz="4400" b="1" dirty="0">
                 <a:solidFill>
@@ -1899,7 +1671,7 @@
             </a:lvl1pPr>
           </a:lstStyle>
           <a:p>
-            <a:pPr algn="l" indent="0" marL="0">
+            <a:pPr marL="0" indent="0" algn="l">
               <a:buNone/>
             </a:pPr>
             <a:endParaRPr lang="en-US" sz="4400" dirty="0"/>
@@ -1909,9 +1681,11 @@
       <p:sp>
         <p:nvSpPr>
           <p:cNvPr id="4" name="Text 1"/>
-          <p:cNvSpPr/>
+          <p:cNvSpPr>
+            <a:spLocks noGrp="1"/>
+          </p:cNvSpPr>
           <p:nvPr>
-            <p:ph idx="102" type="body" hasCustomPrompt="1"/>
+            <p:ph type="body" idx="102" hasCustomPrompt="1"/>
           </p:nvPr>
         </p:nvSpPr>
         <p:spPr>
@@ -1928,7 +1702,7 @@
         <p:txBody>
           <a:bodyPr wrap="square" rtlCol="0"/>
           <a:lstStyle>
-            <a:lvl1pPr indent="0" marL="0">
+            <a:lvl1pPr marL="0" indent="0">
               <a:buNone/>
               <a:defRPr lang="en-US" sz="2400" i="1" dirty="0">
                 <a:solidFill>
@@ -1938,7 +1712,7 @@
             </a:lvl1pPr>
           </a:lstStyle>
           <a:p>
-            <a:pPr indent="0" marL="0">
+            <a:pPr marL="0" indent="0">
               <a:buNone/>
             </a:pPr>
             <a:endParaRPr lang="en-US" sz="2400" dirty="0"/>
@@ -1961,6 +1735,7 @@
         <a:solidFill>
           <a:srgbClr val="FFFFFF"/>
         </a:solidFill>
+        <a:effectLst/>
       </p:bgPr>
     </p:bg>
     <p:spTree>
@@ -1980,9 +1755,11 @@
       <p:sp>
         <p:nvSpPr>
           <p:cNvPr id="2" name="Text 0"/>
-          <p:cNvSpPr/>
+          <p:cNvSpPr>
+            <a:spLocks noGrp="1"/>
+          </p:cNvSpPr>
           <p:nvPr>
-            <p:ph idx="100" type="title" hasCustomPrompt="1"/>
+            <p:ph type="title" idx="100" hasCustomPrompt="1"/>
           </p:nvPr>
         </p:nvSpPr>
         <p:spPr>
@@ -1999,7 +1776,7 @@
         <p:txBody>
           <a:bodyPr wrap="square" rtlCol="0"/>
           <a:lstStyle>
-            <a:lvl1pPr algn="l" indent="0" marL="0">
+            <a:lvl1pPr marL="0" indent="0" algn="l">
               <a:buNone/>
               <a:defRPr lang="en-US" sz="3400" b="1" dirty="0">
                 <a:solidFill>
@@ -2009,7 +1786,7 @@
             </a:lvl1pPr>
           </a:lstStyle>
           <a:p>
-            <a:pPr algn="l" indent="0" marL="0">
+            <a:pPr marL="0" indent="0" algn="l">
               <a:buNone/>
             </a:pPr>
             <a:endParaRPr lang="en-US" sz="3400" dirty="0"/>
@@ -2037,7 +1814,7 @@
           <a:bodyPr wrap="square" lIns="0" tIns="0" rIns="0" bIns="0" rtlCol="0" anchor="ctr"/>
           <a:lstStyle/>
           <a:p>
-            <a:pPr indent="0" marL="0">
+            <a:pPr marL="0" indent="0">
               <a:buNone/>
             </a:pPr>
             <a:r>
@@ -2072,7 +1849,7 @@
           </a:prstGeom>
           <a:extLst>
             <a:ext uri="{C572A759-6A51-4108-AA02-DFA0A04FC94B}">
-              <ma14:wrappingTextBoxFlag xmlns:ma14="http://schemas.microsoft.com/office/mac/drawingml/2011/main" val="0"/>
+              <ma14:wrappingTextBoxFlag xmlns:ma14="http://schemas.microsoft.com/office/mac/drawingml/2011/main" xmlns="" val="0"/>
             </a:ext>
           </a:extLst>
         </p:spPr>
@@ -2090,8 +1867,8 @@
           <a:p>
             <a:pPr algn="r"/>
             <a:fld id="{F7021451-1387-4CA6-816F-3879F97B5CBC}" type="slidenum">
-              <a:rPr b="0" lang="en-US"/>
-              <a:t>1003</a:t>
+              <a:rPr lang="en-US" b="0"/>
+              <a:t>‹#›</a:t>
             </a:fld>
             <a:endParaRPr lang="en-US"/>
           </a:p>
@@ -2113,6 +1890,7 @@
         <a:solidFill>
           <a:srgbClr val="1F2328"/>
         </a:solidFill>
+        <a:effectLst/>
       </p:bgPr>
     </p:bg>
     <p:spTree>
@@ -2152,9 +1930,11 @@
       <p:sp>
         <p:nvSpPr>
           <p:cNvPr id="3" name="Text 1"/>
-          <p:cNvSpPr/>
+          <p:cNvSpPr>
+            <a:spLocks noGrp="1"/>
+          </p:cNvSpPr>
           <p:nvPr>
-            <p:ph idx="101" type="title" hasCustomPrompt="1"/>
+            <p:ph type="title" idx="101" hasCustomPrompt="1"/>
           </p:nvPr>
         </p:nvSpPr>
         <p:spPr>
@@ -2171,7 +1951,7 @@
         <p:txBody>
           <a:bodyPr wrap="square" rtlCol="0"/>
           <a:lstStyle>
-            <a:lvl1pPr algn="l" indent="0" marL="0">
+            <a:lvl1pPr marL="0" indent="0" algn="l">
               <a:buNone/>
               <a:defRPr lang="en-US" sz="3400" b="1" dirty="0">
                 <a:solidFill>
@@ -2181,7 +1961,7 @@
             </a:lvl1pPr>
           </a:lstStyle>
           <a:p>
-            <a:pPr algn="l" indent="0" marL="0">
+            <a:pPr marL="0" indent="0" algn="l">
               <a:buNone/>
             </a:pPr>
             <a:endParaRPr lang="en-US" sz="3400" dirty="0"/>
@@ -2209,7 +1989,7 @@
           <a:bodyPr wrap="square" lIns="0" tIns="0" rIns="0" bIns="0" rtlCol="0" anchor="ctr"/>
           <a:lstStyle/>
           <a:p>
-            <a:pPr indent="0" marL="0">
+            <a:pPr marL="0" indent="0">
               <a:buNone/>
             </a:pPr>
             <a:r>
@@ -2244,7 +2024,7 @@
           </a:prstGeom>
           <a:extLst>
             <a:ext uri="{C572A759-6A51-4108-AA02-DFA0A04FC94B}">
-              <ma14:wrappingTextBoxFlag xmlns:ma14="http://schemas.microsoft.com/office/mac/drawingml/2011/main" val="0"/>
+              <ma14:wrappingTextBoxFlag xmlns:ma14="http://schemas.microsoft.com/office/mac/drawingml/2011/main" xmlns="" val="0"/>
             </a:ext>
           </a:extLst>
         </p:spPr>
@@ -2262,8 +2042,8 @@
           <a:p>
             <a:pPr algn="r"/>
             <a:fld id="{F7021451-1387-4CA6-816F-3879F97B5CBC}" type="slidenum">
-              <a:rPr b="0" lang="en-US"/>
-              <a:t>1004</a:t>
+              <a:rPr lang="en-US" b="0"/>
+              <a:t>‹#›</a:t>
             </a:fld>
             <a:endParaRPr lang="en-US"/>
           </a:p>
@@ -2280,6 +2060,11 @@
 <file path=ppt/slideMasters/slideMaster1.xml><?xml version="1.0" encoding="utf-8"?>
 <p:sldMaster xmlns:a="http://schemas.openxmlformats.org/drawingml/2006/main" xmlns:r="http://schemas.openxmlformats.org/officeDocument/2006/relationships" xmlns:p="http://schemas.openxmlformats.org/presentationml/2006/main">
   <p:cSld>
+    <p:bg>
+      <p:bgRef idx="1001">
+        <a:schemeClr val="bg1"/>
+      </p:bgRef>
+    </p:bg>
     <p:spTree>
       <p:nvGrpSpPr>
         <p:cNvPr id="1" name=""/>
@@ -2314,7 +2099,7 @@
           </a:prstGeom>
           <a:extLst>
             <a:ext uri="{C572A759-6A51-4108-AA02-DFA0A04FC94B}">
-              <ma14:wrappingTextBoxFlag xmlns:ma14="http://schemas.microsoft.com/office/mac/drawingml/2011/main" val="0"/>
+              <ma14:wrappingTextBoxFlag xmlns:ma14="http://schemas.microsoft.com/office/mac/drawingml/2011/main" xmlns="" val="0"/>
             </a:ext>
           </a:extLst>
         </p:spPr>
@@ -2332,8 +2117,8 @@
           <a:p>
             <a:pPr algn="r"/>
             <a:fld id="{F7021451-1387-4CA6-816F-3879F97B5CBC}" type="slidenum">
-              <a:rPr b="0" lang="en-US"/>
-              <a:t>null</a:t>
+              <a:rPr lang="en-US" b="0"/>
+              <a:t>‹#›</a:t>
             </a:fld>
             <a:endParaRPr lang="en-US"/>
           </a:p>
@@ -2640,7 +2425,7 @@
           <a:bodyPr wrap="square" lIns="0" tIns="0" rIns="0" bIns="0" rtlCol="0" anchor="t"/>
           <a:lstStyle/>
           <a:p>
-            <a:pPr algn="l" indent="0" marL="0">
+            <a:pPr marL="0" indent="0" algn="l">
               <a:buNone/>
             </a:pPr>
             <a:r>
@@ -2658,9 +2443,11 @@
       <p:sp>
         <p:nvSpPr>
           <p:cNvPr id="3" name="Text 1"/>
-          <p:cNvSpPr/>
+          <p:cNvSpPr>
+            <a:spLocks noGrp="1"/>
+          </p:cNvSpPr>
           <p:nvPr>
-            <p:ph idx="101" type="title" hasCustomPrompt="1"/>
+            <p:ph type="title" idx="101" hasCustomPrompt="1"/>
           </p:nvPr>
         </p:nvSpPr>
         <p:spPr>
@@ -2678,7 +2465,7 @@
           <a:bodyPr wrap="square" lIns="0" tIns="0" rIns="0" bIns="0" rtlCol="0" anchor="b"/>
           <a:lstStyle/>
           <a:p>
-            <a:pPr algn="l" indent="0" marL="0">
+            <a:pPr marL="0" indent="0" algn="l">
               <a:buNone/>
             </a:pPr>
             <a:r>
@@ -2696,9 +2483,11 @@
       <p:sp>
         <p:nvSpPr>
           <p:cNvPr id="4" name="Text 1"/>
-          <p:cNvSpPr/>
+          <p:cNvSpPr>
+            <a:spLocks noGrp="1"/>
+          </p:cNvSpPr>
           <p:nvPr>
-            <p:ph idx="102" type="body" hasCustomPrompt="1"/>
+            <p:ph type="body" idx="102" hasCustomPrompt="1"/>
           </p:nvPr>
         </p:nvSpPr>
         <p:spPr>
@@ -2716,7 +2505,7 @@
           <a:bodyPr wrap="square" lIns="0" tIns="0" rIns="0" bIns="0" rtlCol="0" anchor="t"/>
           <a:lstStyle/>
           <a:p>
-            <a:pPr indent="0" marL="0">
+            <a:pPr marL="0" indent="0">
               <a:buNone/>
             </a:pPr>
             <a:r>
@@ -2752,7 +2541,7 @@
           <a:bodyPr wrap="square" lIns="0" tIns="0" rIns="0" bIns="0" rtlCol="0" anchor="t"/>
           <a:lstStyle/>
           <a:p>
-            <a:pPr algn="l" indent="0" marL="0">
+            <a:pPr marL="0" indent="0" algn="l">
               <a:buNone/>
             </a:pPr>
             <a:r>
@@ -2788,6 +2577,13 @@
           </a:solidFill>
           <a:ln/>
         </p:spPr>
+        <p:txBody>
+          <a:bodyPr/>
+          <a:lstStyle/>
+          <a:p>
+            <a:endParaRPr lang="en-IN"/>
+          </a:p>
+        </p:txBody>
       </p:sp>
       <p:sp>
         <p:nvSpPr>
@@ -2810,7 +2606,7 @@
           <a:bodyPr wrap="square" lIns="0" tIns="0" rIns="0" bIns="0" rtlCol="0" anchor="ctr"/>
           <a:lstStyle/>
           <a:p>
-            <a:pPr algn="l" indent="0" marL="0">
+            <a:pPr marL="0" indent="0" algn="l">
               <a:buNone/>
             </a:pPr>
             <a:r>
@@ -2846,7 +2642,7 @@
           <a:bodyPr wrap="square" lIns="0" tIns="0" rIns="0" bIns="0" rtlCol="0" anchor="t"/>
           <a:lstStyle/>
           <a:p>
-            <a:pPr algn="l" indent="0" marL="0">
+            <a:pPr marL="0" indent="0" algn="l">
               <a:buNone/>
             </a:pPr>
             <a:r>
@@ -2860,7 +2656,7 @@
             <a:endParaRPr lang="en-US" sz="1400" dirty="0"/>
           </a:p>
           <a:p>
-            <a:pPr algn="l" indent="0" marL="0">
+            <a:pPr marL="0" indent="0" algn="l">
               <a:buNone/>
             </a:pPr>
             <a:r>
@@ -2896,6 +2692,13 @@
           </a:solidFill>
           <a:ln/>
         </p:spPr>
+        <p:txBody>
+          <a:bodyPr/>
+          <a:lstStyle/>
+          <a:p>
+            <a:endParaRPr lang="en-IN"/>
+          </a:p>
+        </p:txBody>
       </p:sp>
       <p:sp>
         <p:nvSpPr>
@@ -2918,7 +2721,7 @@
           <a:bodyPr wrap="square" lIns="0" tIns="0" rIns="0" bIns="0" rtlCol="0" anchor="ctr"/>
           <a:lstStyle/>
           <a:p>
-            <a:pPr algn="l" indent="0" marL="0">
+            <a:pPr marL="0" indent="0" algn="l">
               <a:buNone/>
             </a:pPr>
             <a:r>
@@ -2954,7 +2757,7 @@
           <a:bodyPr wrap="square" lIns="0" tIns="0" rIns="0" bIns="0" rtlCol="0" anchor="t"/>
           <a:lstStyle/>
           <a:p>
-            <a:pPr algn="l" indent="0" marL="0">
+            <a:pPr marL="0" indent="0" algn="l">
               <a:buNone/>
             </a:pPr>
             <a:r>
@@ -2990,6 +2793,13 @@
           </a:solidFill>
           <a:ln/>
         </p:spPr>
+        <p:txBody>
+          <a:bodyPr/>
+          <a:lstStyle/>
+          <a:p>
+            <a:endParaRPr lang="en-IN"/>
+          </a:p>
+        </p:txBody>
       </p:sp>
       <p:sp>
         <p:nvSpPr>
@@ -3012,7 +2822,7 @@
           <a:bodyPr wrap="square" lIns="0" tIns="0" rIns="0" bIns="0" rtlCol="0" anchor="ctr"/>
           <a:lstStyle/>
           <a:p>
-            <a:pPr algn="l" indent="0" marL="0">
+            <a:pPr marL="0" indent="0" algn="l">
               <a:buNone/>
             </a:pPr>
             <a:r>
@@ -3048,7 +2858,7 @@
           <a:bodyPr wrap="square" lIns="0" tIns="0" rIns="0" bIns="0" rtlCol="0" anchor="t"/>
           <a:lstStyle/>
           <a:p>
-            <a:pPr algn="l" indent="0" marL="0">
+            <a:pPr marL="0" indent="0" algn="l">
               <a:buNone/>
             </a:pPr>
             <a:r>
@@ -3084,6 +2894,13 @@
           </a:solidFill>
           <a:ln/>
         </p:spPr>
+        <p:txBody>
+          <a:bodyPr/>
+          <a:lstStyle/>
+          <a:p>
+            <a:endParaRPr lang="en-IN"/>
+          </a:p>
+        </p:txBody>
       </p:sp>
       <p:sp>
         <p:nvSpPr>
@@ -3106,7 +2923,7 @@
           <a:bodyPr wrap="square" lIns="0" tIns="0" rIns="0" bIns="0" rtlCol="0" anchor="ctr"/>
           <a:lstStyle/>
           <a:p>
-            <a:pPr algn="l" indent="0" marL="0">
+            <a:pPr marL="0" indent="0" algn="l">
               <a:buNone/>
             </a:pPr>
             <a:r>
@@ -3142,7 +2959,7 @@
           <a:bodyPr wrap="square" lIns="0" tIns="0" rIns="0" bIns="0" rtlCol="0" anchor="t"/>
           <a:lstStyle/>
           <a:p>
-            <a:pPr algn="l" indent="0" marL="0">
+            <a:pPr marL="0" indent="0" algn="l">
               <a:buNone/>
             </a:pPr>
             <a:r>
@@ -3178,7 +2995,7 @@
           <a:bodyPr wrap="square" lIns="0" tIns="0" rIns="0" bIns="0" rtlCol="0" anchor="t"/>
           <a:lstStyle/>
           <a:p>
-            <a:pPr algn="l" indent="0" marL="0">
+            <a:pPr marL="0" indent="0" algn="l">
               <a:buNone/>
             </a:pPr>
             <a:r>
@@ -3221,9 +3038,11 @@
       <p:sp>
         <p:nvSpPr>
           <p:cNvPr id="2" name="Text 0"/>
-          <p:cNvSpPr/>
+          <p:cNvSpPr>
+            <a:spLocks noGrp="1"/>
+          </p:cNvSpPr>
           <p:nvPr>
-            <p:ph idx="100" type="title" hasCustomPrompt="1"/>
+            <p:ph type="title" idx="100" hasCustomPrompt="1"/>
           </p:nvPr>
         </p:nvSpPr>
         <p:spPr>
@@ -3241,7 +3060,7 @@
           <a:bodyPr wrap="square" lIns="0" tIns="0" rIns="0" bIns="0" rtlCol="0" anchor="ctr"/>
           <a:lstStyle/>
           <a:p>
-            <a:pPr algn="l" indent="0" marL="0">
+            <a:pPr marL="0" indent="0" algn="l">
               <a:buNone/>
             </a:pPr>
             <a:r>
@@ -3279,7 +3098,7 @@
           <a:bodyPr wrap="square" lIns="0" tIns="0" rIns="0" bIns="0" rtlCol="0" anchor="ctr"/>
           <a:lstStyle/>
           <a:p>
-            <a:pPr algn="ctr" indent="0" marL="0">
+            <a:pPr marL="0" indent="0" algn="ctr">
               <a:buNone/>
             </a:pPr>
             <a:r>
@@ -3315,7 +3134,7 @@
           <a:bodyPr wrap="square" lIns="0" tIns="0" rIns="0" bIns="0" rtlCol="0" anchor="ctr"/>
           <a:lstStyle/>
           <a:p>
-            <a:pPr indent="0" marL="0">
+            <a:pPr marL="0" indent="0">
               <a:buNone/>
             </a:pPr>
             <a:r>
@@ -3326,9 +3145,6 @@
               </a:rPr>
               <a:t>Connect</a:t>
             </a:r>
-            <a:pPr indent="0" marL="0">
-              <a:buNone/>
-            </a:pPr>
             <a:r>
               <a:rPr lang="en-US" sz="1400" dirty="0">
                 <a:solidFill>
@@ -3364,6 +3180,13 @@
             <a:tailEnd type="triangle"/>
           </a:ln>
         </p:spPr>
+        <p:txBody>
+          <a:bodyPr/>
+          <a:lstStyle/>
+          <a:p>
+            <a:endParaRPr lang="en-IN"/>
+          </a:p>
+        </p:txBody>
       </p:sp>
       <p:sp>
         <p:nvSpPr>
@@ -3388,7 +3211,7 @@
           <a:bodyPr wrap="square" lIns="0" tIns="0" rIns="0" bIns="0" rtlCol="0" anchor="ctr"/>
           <a:lstStyle/>
           <a:p>
-            <a:pPr algn="ctr" indent="0" marL="0">
+            <a:pPr marL="0" indent="0" algn="ctr">
               <a:buNone/>
             </a:pPr>
             <a:r>
@@ -3424,7 +3247,7 @@
           <a:bodyPr wrap="square" lIns="0" tIns="0" rIns="0" bIns="0" rtlCol="0" anchor="ctr"/>
           <a:lstStyle/>
           <a:p>
-            <a:pPr indent="0" marL="0">
+            <a:pPr marL="0" indent="0">
               <a:buNone/>
             </a:pPr>
             <a:r>
@@ -3435,9 +3258,6 @@
               </a:rPr>
               <a:t>Read role</a:t>
             </a:r>
-            <a:pPr indent="0" marL="0">
-              <a:buNone/>
-            </a:pPr>
             <a:r>
               <a:rPr lang="en-US" sz="1400" dirty="0">
                 <a:solidFill>
@@ -3473,6 +3293,13 @@
             <a:tailEnd type="triangle"/>
           </a:ln>
         </p:spPr>
+        <p:txBody>
+          <a:bodyPr/>
+          <a:lstStyle/>
+          <a:p>
+            <a:endParaRPr lang="en-IN"/>
+          </a:p>
+        </p:txBody>
       </p:sp>
       <p:sp>
         <p:nvSpPr>
@@ -3497,7 +3324,7 @@
           <a:bodyPr wrap="square" lIns="0" tIns="0" rIns="0" bIns="0" rtlCol="0" anchor="ctr"/>
           <a:lstStyle/>
           <a:p>
-            <a:pPr algn="ctr" indent="0" marL="0">
+            <a:pPr marL="0" indent="0" algn="ctr">
               <a:buNone/>
             </a:pPr>
             <a:r>
@@ -3533,7 +3360,7 @@
           <a:bodyPr wrap="square" lIns="0" tIns="0" rIns="0" bIns="0" rtlCol="0" anchor="ctr"/>
           <a:lstStyle/>
           <a:p>
-            <a:pPr indent="0" marL="0">
+            <a:pPr marL="0" indent="0">
               <a:buNone/>
             </a:pPr>
             <a:r>
@@ -3544,9 +3371,6 @@
               </a:rPr>
               <a:t>Show forms</a:t>
             </a:r>
-            <a:pPr indent="0" marL="0">
-              <a:buNone/>
-            </a:pPr>
             <a:r>
               <a:rPr lang="en-US" sz="1400" dirty="0">
                 <a:solidFill>
@@ -3582,6 +3406,13 @@
             <a:tailEnd type="triangle"/>
           </a:ln>
         </p:spPr>
+        <p:txBody>
+          <a:bodyPr/>
+          <a:lstStyle/>
+          <a:p>
+            <a:endParaRPr lang="en-IN"/>
+          </a:p>
+        </p:txBody>
       </p:sp>
       <p:sp>
         <p:nvSpPr>
@@ -3606,7 +3437,7 @@
           <a:bodyPr wrap="square" lIns="0" tIns="0" rIns="0" bIns="0" rtlCol="0" anchor="ctr"/>
           <a:lstStyle/>
           <a:p>
-            <a:pPr algn="ctr" indent="0" marL="0">
+            <a:pPr marL="0" indent="0" algn="ctr">
               <a:buNone/>
             </a:pPr>
             <a:r>
@@ -3642,7 +3473,7 @@
           <a:bodyPr wrap="square" lIns="0" tIns="0" rIns="0" bIns="0" rtlCol="0" anchor="ctr"/>
           <a:lstStyle/>
           <a:p>
-            <a:pPr indent="0" marL="0">
+            <a:pPr marL="0" indent="0">
               <a:buNone/>
             </a:pPr>
             <a:r>
@@ -3653,9 +3484,6 @@
               </a:rPr>
               <a:t>Simulate</a:t>
             </a:r>
-            <a:pPr indent="0" marL="0">
-              <a:buNone/>
-            </a:pPr>
             <a:r>
               <a:rPr lang="en-US" sz="1400" dirty="0">
                 <a:solidFill>
@@ -3691,6 +3519,13 @@
             <a:tailEnd type="triangle"/>
           </a:ln>
         </p:spPr>
+        <p:txBody>
+          <a:bodyPr/>
+          <a:lstStyle/>
+          <a:p>
+            <a:endParaRPr lang="en-IN"/>
+          </a:p>
+        </p:txBody>
       </p:sp>
       <p:sp>
         <p:nvSpPr>
@@ -3715,7 +3550,7 @@
           <a:bodyPr wrap="square" lIns="0" tIns="0" rIns="0" bIns="0" rtlCol="0" anchor="ctr"/>
           <a:lstStyle/>
           <a:p>
-            <a:pPr algn="ctr" indent="0" marL="0">
+            <a:pPr marL="0" indent="0" algn="ctr">
               <a:buNone/>
             </a:pPr>
             <a:r>
@@ -3751,7 +3586,7 @@
           <a:bodyPr wrap="square" lIns="0" tIns="0" rIns="0" bIns="0" rtlCol="0" anchor="ctr"/>
           <a:lstStyle/>
           <a:p>
-            <a:pPr indent="0" marL="0">
+            <a:pPr marL="0" indent="0">
               <a:buNone/>
             </a:pPr>
             <a:r>
@@ -3762,9 +3597,6 @@
               </a:rPr>
               <a:t>Sign</a:t>
             </a:r>
-            <a:pPr indent="0" marL="0">
-              <a:buNone/>
-            </a:pPr>
             <a:r>
               <a:rPr lang="en-US" sz="1400" dirty="0">
                 <a:solidFill>
@@ -3800,6 +3632,13 @@
             <a:tailEnd type="triangle"/>
           </a:ln>
         </p:spPr>
+        <p:txBody>
+          <a:bodyPr/>
+          <a:lstStyle/>
+          <a:p>
+            <a:endParaRPr lang="en-IN"/>
+          </a:p>
+        </p:txBody>
       </p:sp>
       <p:sp>
         <p:nvSpPr>
@@ -3824,7 +3663,7 @@
           <a:bodyPr wrap="square" lIns="0" tIns="0" rIns="0" bIns="0" rtlCol="0" anchor="ctr"/>
           <a:lstStyle/>
           <a:p>
-            <a:pPr algn="ctr" indent="0" marL="0">
+            <a:pPr marL="0" indent="0" algn="ctr">
               <a:buNone/>
             </a:pPr>
             <a:r>
@@ -3860,7 +3699,7 @@
           <a:bodyPr wrap="square" lIns="0" tIns="0" rIns="0" bIns="0" rtlCol="0" anchor="ctr"/>
           <a:lstStyle/>
           <a:p>
-            <a:pPr indent="0" marL="0">
+            <a:pPr marL="0" indent="0">
               <a:buNone/>
             </a:pPr>
             <a:r>
@@ -3871,9 +3710,6 @@
               </a:rPr>
               <a:t>Confirm</a:t>
             </a:r>
-            <a:pPr indent="0" marL="0">
-              <a:buNone/>
-            </a:pPr>
             <a:r>
               <a:rPr lang="en-US" sz="1400" dirty="0">
                 <a:solidFill>
@@ -3909,6 +3745,13 @@
             <a:tailEnd type="triangle"/>
           </a:ln>
         </p:spPr>
+        <p:txBody>
+          <a:bodyPr/>
+          <a:lstStyle/>
+          <a:p>
+            <a:endParaRPr lang="en-IN"/>
+          </a:p>
+        </p:txBody>
       </p:sp>
       <p:sp>
         <p:nvSpPr>
@@ -3933,7 +3776,7 @@
           <a:bodyPr wrap="square" lIns="0" tIns="0" rIns="0" bIns="0" rtlCol="0" anchor="ctr"/>
           <a:lstStyle/>
           <a:p>
-            <a:pPr algn="ctr" indent="0" marL="0">
+            <a:pPr marL="0" indent="0" algn="ctr">
               <a:buNone/>
             </a:pPr>
             <a:r>
@@ -3969,7 +3812,7 @@
           <a:bodyPr wrap="square" lIns="0" tIns="0" rIns="0" bIns="0" rtlCol="0" anchor="ctr"/>
           <a:lstStyle/>
           <a:p>
-            <a:pPr indent="0" marL="0">
+            <a:pPr marL="0" indent="0">
               <a:buNone/>
             </a:pPr>
             <a:r>
@@ -3980,9 +3823,6 @@
               </a:rPr>
               <a:t>Refresh</a:t>
             </a:r>
-            <a:pPr indent="0" marL="0">
-              <a:buNone/>
-            </a:pPr>
             <a:r>
               <a:rPr lang="en-US" sz="1400" dirty="0">
                 <a:solidFill>
@@ -4016,7 +3856,7 @@
           <a:bodyPr wrap="square" lIns="0" tIns="0" rIns="0" bIns="0" rtlCol="0" anchor="t"/>
           <a:lstStyle/>
           <a:p>
-            <a:pPr algn="l" indent="0" marL="0">
+            <a:pPr marL="0" indent="0" algn="l">
               <a:buNone/>
             </a:pPr>
             <a:r>
@@ -4052,6 +3892,13 @@
           </a:solidFill>
           <a:ln/>
         </p:spPr>
+        <p:txBody>
+          <a:bodyPr/>
+          <a:lstStyle/>
+          <a:p>
+            <a:endParaRPr lang="en-IN"/>
+          </a:p>
+        </p:txBody>
       </p:sp>
       <p:sp>
         <p:nvSpPr>
@@ -4074,7 +3921,7 @@
           <a:bodyPr wrap="square" lIns="0" tIns="0" rIns="0" bIns="0" rtlCol="0" anchor="t"/>
           <a:lstStyle/>
           <a:p>
-            <a:pPr algn="l" indent="0" marL="0">
+            <a:pPr marL="0" indent="0" algn="l">
               <a:buNone/>
             </a:pPr>
             <a:r>
@@ -4110,7 +3957,7 @@
           <a:bodyPr wrap="square" lIns="0" tIns="0" rIns="0" bIns="0" rtlCol="0" anchor="t"/>
           <a:lstStyle/>
           <a:p>
-            <a:pPr algn="l" indent="0" marL="0">
+            <a:pPr marL="0" indent="0" algn="l">
               <a:buNone/>
             </a:pPr>
             <a:r>
@@ -4146,6 +3993,13 @@
           </a:solidFill>
           <a:ln/>
         </p:spPr>
+        <p:txBody>
+          <a:bodyPr/>
+          <a:lstStyle/>
+          <a:p>
+            <a:endParaRPr lang="en-IN"/>
+          </a:p>
+        </p:txBody>
       </p:sp>
       <p:sp>
         <p:nvSpPr>
@@ -4168,7 +4022,7 @@
           <a:bodyPr wrap="square" lIns="0" tIns="0" rIns="0" bIns="0" rtlCol="0" anchor="t"/>
           <a:lstStyle/>
           <a:p>
-            <a:pPr algn="l" indent="0" marL="0">
+            <a:pPr marL="0" indent="0" algn="l">
               <a:buNone/>
             </a:pPr>
             <a:r>
@@ -4204,7 +4058,7 @@
           <a:bodyPr wrap="square" lIns="0" tIns="0" rIns="0" bIns="0" rtlCol="0" anchor="t"/>
           <a:lstStyle/>
           <a:p>
-            <a:pPr algn="l" indent="0" marL="0">
+            <a:pPr marL="0" indent="0" algn="l">
               <a:buNone/>
             </a:pPr>
             <a:r>
@@ -4240,6 +4094,13 @@
           </a:solidFill>
           <a:ln/>
         </p:spPr>
+        <p:txBody>
+          <a:bodyPr/>
+          <a:lstStyle/>
+          <a:p>
+            <a:endParaRPr lang="en-IN"/>
+          </a:p>
+        </p:txBody>
       </p:sp>
       <p:sp>
         <p:nvSpPr>
@@ -4262,7 +4123,7 @@
           <a:bodyPr wrap="square" lIns="0" tIns="0" rIns="0" bIns="0" rtlCol="0" anchor="t"/>
           <a:lstStyle/>
           <a:p>
-            <a:pPr algn="l" indent="0" marL="0">
+            <a:pPr marL="0" indent="0" algn="l">
               <a:buNone/>
             </a:pPr>
             <a:r>
@@ -4298,7 +4159,7 @@
           <a:bodyPr wrap="square" lIns="0" tIns="0" rIns="0" bIns="0" rtlCol="0" anchor="t"/>
           <a:lstStyle/>
           <a:p>
-            <a:pPr algn="l" indent="0" marL="0">
+            <a:pPr marL="0" indent="0" algn="l">
               <a:buNone/>
             </a:pPr>
             <a:r>
@@ -4315,7 +4176,7 @@
       </p:sp>
       <p:sp>
         <p:nvSpPr>
-          <p:cNvPr id="25" name="Slide Number Placeholder 0"/>
+          <p:cNvPr id="33" name="Slide Number Placeholder 0"/>
           <p:cNvSpPr>
             <a:spLocks noGrp="1"/>
           </p:cNvSpPr>
@@ -4333,7 +4194,7 @@
           </a:prstGeom>
           <a:extLst>
             <a:ext uri="{C572A759-6A51-4108-AA02-DFA0A04FC94B}">
-              <ma14:wrappingTextBoxFlag xmlns:ma14="http://schemas.microsoft.com/office/mac/drawingml/2011/main" val="0"/>
+              <ma14:wrappingTextBoxFlag xmlns:ma14="http://schemas.microsoft.com/office/mac/drawingml/2011/main" xmlns="" val="0"/>
             </a:ext>
           </a:extLst>
         </p:spPr>
@@ -4351,7 +4212,7 @@
           <a:p>
             <a:pPr algn="r"/>
             <a:fld id="{F7021451-1387-4CA6-816F-3879F97B5CBC}" type="slidenum">
-              <a:rPr b="0" lang="en-US"/>
+              <a:rPr lang="en-US" b="0"/>
               <a:t>10</a:t>
             </a:fld>
             <a:endParaRPr lang="en-US"/>
@@ -4386,9 +4247,11 @@
       <p:sp>
         <p:nvSpPr>
           <p:cNvPr id="2" name="Text 0"/>
-          <p:cNvSpPr/>
+          <p:cNvSpPr>
+            <a:spLocks noGrp="1"/>
+          </p:cNvSpPr>
           <p:nvPr>
-            <p:ph idx="100" type="title" hasCustomPrompt="1"/>
+            <p:ph type="title" idx="100" hasCustomPrompt="1"/>
           </p:nvPr>
         </p:nvSpPr>
         <p:spPr>
@@ -4406,7 +4269,7 @@
           <a:bodyPr wrap="square" lIns="0" tIns="0" rIns="0" bIns="0" rtlCol="0" anchor="ctr"/>
           <a:lstStyle/>
           <a:p>
-            <a:pPr algn="l" indent="0" marL="0">
+            <a:pPr marL="0" indent="0" algn="l">
               <a:buNone/>
             </a:pPr>
             <a:r>
@@ -4447,6 +4310,13 @@
             <a:prstDash val="dash"/>
           </a:ln>
         </p:spPr>
+        <p:txBody>
+          <a:bodyPr/>
+          <a:lstStyle/>
+          <a:p>
+            <a:endParaRPr lang="en-IN"/>
+          </a:p>
+        </p:txBody>
       </p:sp>
       <p:sp>
         <p:nvSpPr>
@@ -4469,7 +4339,7 @@
           <a:bodyPr wrap="square" lIns="0" tIns="0" rIns="0" bIns="0" rtlCol="0" anchor="ctr"/>
           <a:lstStyle/>
           <a:p>
-            <a:pPr algn="ctr" indent="0" marL="0">
+            <a:pPr marL="0" indent="0" algn="ctr">
               <a:buNone/>
             </a:pPr>
             <a:r>
@@ -4483,7 +4353,7 @@
             <a:endParaRPr lang="en-US" sz="1400" dirty="0"/>
           </a:p>
           <a:p>
-            <a:pPr algn="ctr" indent="0" marL="0">
+            <a:pPr marL="0" indent="0" algn="ctr">
               <a:buNone/>
             </a:pPr>
             <a:r>
@@ -4497,7 +4367,7 @@
             <a:endParaRPr lang="en-US" sz="1400" dirty="0"/>
           </a:p>
           <a:p>
-            <a:pPr algn="ctr" indent="0" marL="0">
+            <a:pPr marL="0" indent="0" algn="ctr">
               <a:buNone/>
             </a:pPr>
             <a:r>
@@ -4533,7 +4403,7 @@
           <a:bodyPr wrap="square" lIns="0" tIns="0" rIns="0" bIns="0" rtlCol="0" anchor="t"/>
           <a:lstStyle/>
           <a:p>
-            <a:pPr algn="l" indent="0" marL="0">
+            <a:pPr marL="0" indent="0" algn="l">
               <a:buNone/>
             </a:pPr>
             <a:r>
@@ -4571,7 +4441,7 @@
           <a:bodyPr wrap="square" lIns="0" tIns="0" rIns="0" bIns="0" rtlCol="0" anchor="ctr"/>
           <a:lstStyle/>
           <a:p>
-            <a:pPr algn="ctr" indent="0" marL="0">
+            <a:pPr marL="0" indent="0" algn="ctr">
               <a:buNone/>
             </a:pPr>
             <a:r>
@@ -4607,7 +4477,7 @@
           <a:bodyPr wrap="square" lIns="0" tIns="0" rIns="0" bIns="0" rtlCol="0" anchor="ctr"/>
           <a:lstStyle/>
           <a:p>
-            <a:pPr indent="0" marL="0">
+            <a:pPr marL="0" indent="0">
               <a:buNone/>
             </a:pPr>
             <a:r>
@@ -4618,9 +4488,6 @@
               </a:rPr>
               <a:t>The dashboard renders a QR code for </a:t>
             </a:r>
-            <a:pPr indent="0" marL="0">
-              <a:buNone/>
-            </a:pPr>
             <a:r>
               <a:rPr lang="en-US" sz="1200" dirty="0">
                 <a:solidFill>
@@ -4659,7 +4526,7 @@
           <a:bodyPr wrap="square" lIns="0" tIns="0" rIns="0" bIns="0" rtlCol="0" anchor="ctr"/>
           <a:lstStyle/>
           <a:p>
-            <a:pPr algn="ctr" indent="0" marL="0">
+            <a:pPr marL="0" indent="0" algn="ctr">
               <a:buNone/>
             </a:pPr>
             <a:r>
@@ -4695,7 +4562,7 @@
           <a:bodyPr wrap="square" lIns="0" tIns="0" rIns="0" bIns="0" rtlCol="0" anchor="ctr"/>
           <a:lstStyle/>
           <a:p>
-            <a:pPr indent="0" marL="0">
+            <a:pPr marL="0" indent="0">
               <a:buNone/>
             </a:pPr>
             <a:r>
@@ -4706,9 +4573,6 @@
               </a:rPr>
               <a:t>Opening the link loads the app, which reads the </a:t>
             </a:r>
-            <a:pPr indent="0" marL="0">
-              <a:buNone/>
-            </a:pPr>
             <a:r>
               <a:rPr lang="en-US" sz="1200" dirty="0">
                 <a:solidFill>
@@ -4720,9 +4584,6 @@
               </a:rPr>
               <a:t>?passport=</a:t>
             </a:r>
-            <a:pPr indent="0" marL="0">
-              <a:buNone/>
-            </a:pPr>
             <a:r>
               <a:rPr lang="en-US" sz="1400" dirty="0">
                 <a:solidFill>
@@ -4758,7 +4619,7 @@
           <a:bodyPr wrap="square" lIns="0" tIns="0" rIns="0" bIns="0" rtlCol="0" anchor="ctr"/>
           <a:lstStyle/>
           <a:p>
-            <a:pPr algn="ctr" indent="0" marL="0">
+            <a:pPr marL="0" indent="0" algn="ctr">
               <a:buNone/>
             </a:pPr>
             <a:r>
@@ -4794,7 +4655,7 @@
           <a:bodyPr wrap="square" lIns="0" tIns="0" rIns="0" bIns="0" rtlCol="0" anchor="ctr"/>
           <a:lstStyle/>
           <a:p>
-            <a:pPr indent="0" marL="0">
+            <a:pPr marL="0" indent="0">
               <a:buNone/>
             </a:pPr>
             <a:r>
@@ -4805,9 +4666,6 @@
               </a:rPr>
               <a:t>It calls </a:t>
             </a:r>
-            <a:pPr indent="0" marL="0">
-              <a:buNone/>
-            </a:pPr>
             <a:r>
               <a:rPr lang="en-US" sz="1200" dirty="0">
                 <a:solidFill>
@@ -4819,9 +4677,6 @@
               </a:rPr>
               <a:t>getPublicPassport</a:t>
             </a:r>
-            <a:pPr indent="0" marL="0">
-              <a:buNone/>
-            </a:pPr>
             <a:r>
               <a:rPr lang="en-US" sz="1400" dirty="0">
                 <a:solidFill>
@@ -4857,7 +4712,7 @@
           <a:bodyPr wrap="square" lIns="0" tIns="0" rIns="0" bIns="0" rtlCol="0" anchor="ctr"/>
           <a:lstStyle/>
           <a:p>
-            <a:pPr algn="ctr" indent="0" marL="0">
+            <a:pPr marL="0" indent="0" algn="ctr">
               <a:buNone/>
             </a:pPr>
             <a:r>
@@ -4893,7 +4748,7 @@
           <a:bodyPr wrap="square" lIns="0" tIns="0" rIns="0" bIns="0" rtlCol="0" anchor="ctr"/>
           <a:lstStyle/>
           <a:p>
-            <a:pPr indent="0" marL="0">
+            <a:pPr marL="0" indent="0">
               <a:buNone/>
             </a:pPr>
             <a:r>
@@ -4931,6 +4786,13 @@
           </a:solidFill>
           <a:ln/>
         </p:spPr>
+        <p:txBody>
+          <a:bodyPr/>
+          <a:lstStyle/>
+          <a:p>
+            <a:endParaRPr lang="en-IN"/>
+          </a:p>
+        </p:txBody>
       </p:sp>
       <p:sp>
         <p:nvSpPr>
@@ -4953,7 +4815,7 @@
           <a:bodyPr wrap="square" lIns="0" tIns="0" rIns="0" bIns="0" rtlCol="0" anchor="t"/>
           <a:lstStyle/>
           <a:p>
-            <a:pPr algn="l" indent="0" marL="0">
+            <a:pPr marL="0" indent="0" algn="l">
               <a:buNone/>
             </a:pPr>
             <a:r>
@@ -4989,7 +4851,7 @@
           <a:bodyPr wrap="square" lIns="0" tIns="0" rIns="0" bIns="0" rtlCol="0" anchor="t"/>
           <a:lstStyle/>
           <a:p>
-            <a:pPr algn="l" indent="0" marL="0">
+            <a:pPr marL="0" indent="0" algn="l">
               <a:buNone/>
             </a:pPr>
             <a:r>
@@ -5027,6 +4889,13 @@
           </a:solidFill>
           <a:ln/>
         </p:spPr>
+        <p:txBody>
+          <a:bodyPr/>
+          <a:lstStyle/>
+          <a:p>
+            <a:endParaRPr lang="en-IN"/>
+          </a:p>
+        </p:txBody>
       </p:sp>
       <p:sp>
         <p:nvSpPr>
@@ -5049,7 +4918,7 @@
           <a:bodyPr wrap="square" lIns="0" tIns="0" rIns="0" bIns="0" rtlCol="0" anchor="t"/>
           <a:lstStyle/>
           <a:p>
-            <a:pPr algn="l" indent="0" marL="0">
+            <a:pPr marL="0" indent="0" algn="l">
               <a:buNone/>
             </a:pPr>
             <a:r>
@@ -5085,7 +4954,7 @@
           <a:bodyPr wrap="square" lIns="0" tIns="0" rIns="0" bIns="0" rtlCol="0" anchor="t"/>
           <a:lstStyle/>
           <a:p>
-            <a:pPr algn="l" indent="0" marL="0">
+            <a:pPr marL="0" indent="0" algn="l">
               <a:buNone/>
             </a:pPr>
             <a:r>
@@ -5121,7 +4990,7 @@
           <a:bodyPr wrap="square" lIns="0" tIns="0" rIns="0" bIns="0" rtlCol="0" anchor="t"/>
           <a:lstStyle/>
           <a:p>
-            <a:pPr algn="l" indent="0" marL="0">
+            <a:pPr marL="0" indent="0" algn="l">
               <a:buNone/>
             </a:pPr>
             <a:r>
@@ -5156,7 +5025,7 @@
           </a:prstGeom>
           <a:extLst>
             <a:ext uri="{C572A759-6A51-4108-AA02-DFA0A04FC94B}">
-              <ma14:wrappingTextBoxFlag xmlns:ma14="http://schemas.microsoft.com/office/mac/drawingml/2011/main" val="0"/>
+              <ma14:wrappingTextBoxFlag xmlns:ma14="http://schemas.microsoft.com/office/mac/drawingml/2011/main" xmlns="" val="0"/>
             </a:ext>
           </a:extLst>
         </p:spPr>
@@ -5174,13 +5043,43 @@
           <a:p>
             <a:pPr algn="r"/>
             <a:fld id="{F7021451-1387-4CA6-816F-3879F97B5CBC}" type="slidenum">
-              <a:rPr b="0" lang="en-US"/>
+              <a:rPr lang="en-US" b="0"/>
               <a:t>11</a:t>
             </a:fld>
             <a:endParaRPr lang="en-US"/>
           </a:p>
         </p:txBody>
       </p:sp>
+      <p:pic>
+        <p:nvPicPr>
+          <p:cNvPr id="22" name="Picture 21">
+            <a:extLst>
+              <a:ext uri="{FF2B5EF4-FFF2-40B4-BE49-F238E27FC236}">
+                <a16:creationId xmlns:a16="http://schemas.microsoft.com/office/drawing/2014/main" id="{5C90E92B-156B-82DF-E913-ACF7A1C54FC3}"/>
+              </a:ext>
+            </a:extLst>
+          </p:cNvPr>
+          <p:cNvPicPr>
+            <a:picLocks noChangeAspect="1"/>
+          </p:cNvPicPr>
+          <p:nvPr/>
+        </p:nvPicPr>
+        <p:blipFill>
+          <a:blip r:embed="rId3"/>
+          <a:stretch>
+            <a:fillRect/>
+          </a:stretch>
+        </p:blipFill>
+        <p:spPr>
+          <a:xfrm>
+            <a:off x="484130" y="1325880"/>
+            <a:ext cx="5889740" cy="5089671"/>
+          </a:xfrm>
+          <a:prstGeom prst="rect">
+            <a:avLst/>
+          </a:prstGeom>
+        </p:spPr>
+      </p:pic>
     </p:spTree>
   </p:cSld>
   <p:clrMapOvr>
@@ -5209,9 +5108,11 @@
       <p:sp>
         <p:nvSpPr>
           <p:cNvPr id="2" name="Text 0"/>
-          <p:cNvSpPr/>
+          <p:cNvSpPr>
+            <a:spLocks noGrp="1"/>
+          </p:cNvSpPr>
           <p:nvPr>
-            <p:ph idx="100" type="title" hasCustomPrompt="1"/>
+            <p:ph type="title" idx="100" hasCustomPrompt="1"/>
           </p:nvPr>
         </p:nvSpPr>
         <p:spPr>
@@ -5229,7 +5130,7 @@
           <a:bodyPr wrap="square" lIns="0" tIns="0" rIns="0" bIns="0" rtlCol="0" anchor="ctr"/>
           <a:lstStyle/>
           <a:p>
-            <a:pPr algn="l" indent="0" marL="0">
+            <a:pPr marL="0" indent="0" algn="l">
               <a:buNone/>
             </a:pPr>
             <a:r>
@@ -5265,6 +5166,13 @@
           </a:solidFill>
           <a:ln/>
         </p:spPr>
+        <p:txBody>
+          <a:bodyPr/>
+          <a:lstStyle/>
+          <a:p>
+            <a:endParaRPr lang="en-IN"/>
+          </a:p>
+        </p:txBody>
       </p:sp>
       <p:sp>
         <p:nvSpPr>
@@ -5287,7 +5195,7 @@
           <a:bodyPr wrap="square" lIns="0" tIns="0" rIns="0" bIns="0" rtlCol="0" anchor="ctr"/>
           <a:lstStyle/>
           <a:p>
-            <a:pPr algn="l" indent="0" marL="0">
+            <a:pPr marL="0" indent="0" algn="l">
               <a:buNone/>
             </a:pPr>
             <a:r>
@@ -5323,7 +5231,7 @@
           <a:bodyPr wrap="square" lIns="0" tIns="0" rIns="0" bIns="0" rtlCol="0" anchor="t"/>
           <a:lstStyle/>
           <a:p>
-            <a:pPr algn="l" indent="0" marL="0">
+            <a:pPr marL="0" indent="0" algn="l">
               <a:buNone/>
             </a:pPr>
             <a:r>
@@ -5337,7 +5245,7 @@
             <a:endParaRPr lang="en-US" sz="1400" dirty="0"/>
           </a:p>
           <a:p>
-            <a:pPr algn="l" indent="0" marL="0">
+            <a:pPr marL="0" indent="0" algn="l">
               <a:buNone/>
             </a:pPr>
             <a:r>
@@ -5373,6 +5281,13 @@
           </a:solidFill>
           <a:ln/>
         </p:spPr>
+        <p:txBody>
+          <a:bodyPr/>
+          <a:lstStyle/>
+          <a:p>
+            <a:endParaRPr lang="en-IN"/>
+          </a:p>
+        </p:txBody>
       </p:sp>
       <p:sp>
         <p:nvSpPr>
@@ -5395,7 +5310,7 @@
           <a:bodyPr wrap="square" lIns="0" tIns="0" rIns="0" bIns="0" rtlCol="0" anchor="ctr"/>
           <a:lstStyle/>
           <a:p>
-            <a:pPr algn="l" indent="0" marL="0">
+            <a:pPr marL="0" indent="0" algn="l">
               <a:buNone/>
             </a:pPr>
             <a:r>
@@ -5431,7 +5346,7 @@
           <a:bodyPr wrap="square" lIns="0" tIns="0" rIns="0" bIns="0" rtlCol="0" anchor="t"/>
           <a:lstStyle/>
           <a:p>
-            <a:pPr algn="l" indent="0" marL="0">
+            <a:pPr marL="0" indent="0" algn="l">
               <a:buNone/>
             </a:pPr>
             <a:r>
@@ -5445,7 +5360,7 @@
             <a:endParaRPr lang="en-US" sz="1400" dirty="0"/>
           </a:p>
           <a:p>
-            <a:pPr algn="l" indent="0" marL="0">
+            <a:pPr marL="0" indent="0" algn="l">
               <a:buNone/>
             </a:pPr>
             <a:r>
@@ -5481,6 +5396,13 @@
           </a:solidFill>
           <a:ln/>
         </p:spPr>
+        <p:txBody>
+          <a:bodyPr/>
+          <a:lstStyle/>
+          <a:p>
+            <a:endParaRPr lang="en-IN"/>
+          </a:p>
+        </p:txBody>
       </p:sp>
       <p:sp>
         <p:nvSpPr>
@@ -5503,7 +5425,7 @@
           <a:bodyPr wrap="square" lIns="0" tIns="0" rIns="0" bIns="0" rtlCol="0" anchor="ctr"/>
           <a:lstStyle/>
           <a:p>
-            <a:pPr algn="l" indent="0" marL="0">
+            <a:pPr marL="0" indent="0" algn="l">
               <a:buNone/>
             </a:pPr>
             <a:r>
@@ -5539,7 +5461,7 @@
           <a:bodyPr wrap="square" lIns="0" tIns="0" rIns="0" bIns="0" rtlCol="0" anchor="t"/>
           <a:lstStyle/>
           <a:p>
-            <a:pPr algn="l" indent="0" marL="0">
+            <a:pPr marL="0" indent="0" algn="l">
               <a:buNone/>
             </a:pPr>
             <a:r>
@@ -5553,7 +5475,7 @@
             <a:endParaRPr lang="en-US" sz="1400" dirty="0"/>
           </a:p>
           <a:p>
-            <a:pPr algn="l" indent="0" marL="0">
+            <a:pPr marL="0" indent="0" algn="l">
               <a:buNone/>
             </a:pPr>
             <a:r>
@@ -5589,7 +5511,7 @@
           <a:bodyPr wrap="square" lIns="0" tIns="0" rIns="0" bIns="0" rtlCol="0" anchor="t"/>
           <a:lstStyle/>
           <a:p>
-            <a:pPr algn="l" indent="0" marL="0">
+            <a:pPr marL="0" indent="0" algn="l">
               <a:buNone/>
             </a:pPr>
             <a:r>
@@ -5625,13 +5547,13 @@
           <a:bodyPr wrap="square" lIns="0" tIns="0" rIns="0" bIns="0" rtlCol="0" anchor="t"/>
           <a:lstStyle/>
           <a:p>
-            <a:pPr algn="l" marL="342900" indent="-342900">
+            <a:pPr marL="342900" indent="-342900" algn="l">
               <a:spcAft>
                 <a:spcPts val="100"/>
               </a:spcAft>
               <a:buSzPct val="100000"/>
               <a:buFont typeface="+mj-lt"/>
-              <a:buAutoNum type="arabicPeriod" startAt="1"/>
+              <a:buAutoNum type="arabicPeriod"/>
             </a:pPr>
             <a:r>
               <a:rPr lang="en-US" sz="1400" dirty="0">
@@ -5644,13 +5566,13 @@
             <a:endParaRPr lang="en-US" sz="1400" dirty="0"/>
           </a:p>
           <a:p>
-            <a:pPr algn="l" marL="342900" indent="-342900">
+            <a:pPr marL="342900" indent="-342900" algn="l">
               <a:spcAft>
                 <a:spcPts val="100"/>
               </a:spcAft>
               <a:buSzPct val="100000"/>
               <a:buFont typeface="+mj-lt"/>
-              <a:buAutoNum type="arabicPeriod" startAt="1"/>
+              <a:buAutoNum type="arabicPeriod"/>
             </a:pPr>
             <a:r>
               <a:rPr lang="en-US" sz="1400" dirty="0">
@@ -5663,13 +5585,13 @@
             <a:endParaRPr lang="en-US" sz="1400" dirty="0"/>
           </a:p>
           <a:p>
-            <a:pPr algn="l" marL="342900" indent="-342900">
+            <a:pPr marL="342900" indent="-342900" algn="l">
               <a:spcAft>
                 <a:spcPts val="100"/>
               </a:spcAft>
               <a:buSzPct val="100000"/>
               <a:buFont typeface="+mj-lt"/>
-              <a:buAutoNum type="arabicPeriod" startAt="1"/>
+              <a:buAutoNum type="arabicPeriod"/>
             </a:pPr>
             <a:r>
               <a:rPr lang="en-US" sz="1400" dirty="0">
@@ -5682,13 +5604,13 @@
             <a:endParaRPr lang="en-US" sz="1400" dirty="0"/>
           </a:p>
           <a:p>
-            <a:pPr algn="l" marL="342900" indent="-342900">
+            <a:pPr marL="342900" indent="-342900" algn="l">
               <a:spcAft>
                 <a:spcPts val="100"/>
               </a:spcAft>
               <a:buSzPct val="100000"/>
               <a:buFont typeface="+mj-lt"/>
-              <a:buAutoNum type="arabicPeriod" startAt="1"/>
+              <a:buAutoNum type="arabicPeriod"/>
             </a:pPr>
             <a:r>
               <a:rPr lang="en-US" sz="1400" dirty="0">
@@ -5701,13 +5623,13 @@
             <a:endParaRPr lang="en-US" sz="1400" dirty="0"/>
           </a:p>
           <a:p>
-            <a:pPr algn="l" marL="342900" indent="-342900">
+            <a:pPr marL="342900" indent="-342900" algn="l">
               <a:spcAft>
                 <a:spcPts val="100"/>
               </a:spcAft>
               <a:buSzPct val="100000"/>
               <a:buFont typeface="+mj-lt"/>
-              <a:buAutoNum type="arabicPeriod" startAt="1"/>
+              <a:buAutoNum type="arabicPeriod"/>
             </a:pPr>
             <a:r>
               <a:rPr lang="en-US" sz="1400" dirty="0">
@@ -5720,13 +5642,13 @@
             <a:endParaRPr lang="en-US" sz="1400" dirty="0"/>
           </a:p>
           <a:p>
-            <a:pPr algn="l" marL="342900" indent="-342900">
+            <a:pPr marL="342900" indent="-342900" algn="l">
               <a:spcAft>
                 <a:spcPts val="100"/>
               </a:spcAft>
               <a:buSzPct val="100000"/>
               <a:buFont typeface="+mj-lt"/>
-              <a:buAutoNum type="arabicPeriod" startAt="1"/>
+              <a:buAutoNum type="arabicPeriod"/>
             </a:pPr>
             <a:r>
               <a:rPr lang="en-US" sz="1400" dirty="0">
@@ -5739,13 +5661,13 @@
             <a:endParaRPr lang="en-US" sz="1400" dirty="0"/>
           </a:p>
           <a:p>
-            <a:pPr algn="l" marL="342900" indent="-342900">
+            <a:pPr marL="342900" indent="-342900" algn="l">
               <a:spcAft>
                 <a:spcPts val="100"/>
               </a:spcAft>
               <a:buSzPct val="100000"/>
               <a:buFont typeface="+mj-lt"/>
-              <a:buAutoNum type="arabicPeriod" startAt="1"/>
+              <a:buAutoNum type="arabicPeriod"/>
             </a:pPr>
             <a:r>
               <a:rPr lang="en-US" sz="1400" dirty="0">
@@ -5758,13 +5680,13 @@
             <a:endParaRPr lang="en-US" sz="1400" dirty="0"/>
           </a:p>
           <a:p>
-            <a:pPr algn="l" marL="342900" indent="-342900">
+            <a:pPr marL="342900" indent="-342900" algn="l">
               <a:spcAft>
                 <a:spcPts val="100"/>
               </a:spcAft>
               <a:buSzPct val="100000"/>
               <a:buFont typeface="+mj-lt"/>
-              <a:buAutoNum type="arabicPeriod" startAt="1"/>
+              <a:buAutoNum type="arabicPeriod"/>
             </a:pPr>
             <a:r>
               <a:rPr lang="en-US" sz="1400" dirty="0">
@@ -5777,13 +5699,13 @@
             <a:endParaRPr lang="en-US" sz="1400" dirty="0"/>
           </a:p>
           <a:p>
-            <a:pPr algn="l" marL="342900" indent="-342900">
+            <a:pPr marL="342900" indent="-342900" algn="l">
               <a:spcAft>
                 <a:spcPts val="100"/>
               </a:spcAft>
               <a:buSzPct val="100000"/>
               <a:buFont typeface="+mj-lt"/>
-              <a:buAutoNum type="arabicPeriod" startAt="1"/>
+              <a:buAutoNum type="arabicPeriod"/>
             </a:pPr>
             <a:r>
               <a:rPr lang="en-US" sz="1400" dirty="0">
@@ -5796,13 +5718,13 @@
             <a:endParaRPr lang="en-US" sz="1400" dirty="0"/>
           </a:p>
           <a:p>
-            <a:pPr algn="l" marL="342900" indent="-342900">
+            <a:pPr marL="342900" indent="-342900" algn="l">
               <a:spcAft>
                 <a:spcPts val="100"/>
               </a:spcAft>
               <a:buSzPct val="100000"/>
               <a:buFont typeface="+mj-lt"/>
-              <a:buAutoNum type="arabicPeriod" startAt="1"/>
+              <a:buAutoNum type="arabicPeriod"/>
             </a:pPr>
             <a:r>
               <a:rPr lang="en-US" sz="1400" dirty="0">
@@ -5837,7 +5759,7 @@
           <a:bodyPr wrap="square" lIns="0" tIns="0" rIns="0" bIns="0" rtlCol="0" anchor="t"/>
           <a:lstStyle/>
           <a:p>
-            <a:pPr algn="l" indent="0" marL="0">
+            <a:pPr marL="0" indent="0" algn="l">
               <a:buNone/>
             </a:pPr>
             <a:r>
@@ -5854,30 +5776,48 @@
       </p:sp>
       <p:graphicFrame>
         <p:nvGraphicFramePr>
-          <p:cNvPr id="13" name="demo-table"/>
+          <p:cNvPr id="15" name="demo-table"/>
           <p:cNvGraphicFramePr>
             <a:graphicFrameLocks noGrp="1"/>
           </p:cNvGraphicFramePr>
           <p:nvPr>
             <p:extLst>
               <p:ext uri="{D42A27DB-BD31-4B8C-83A1-F6EECF244321}">
-                <p14:modId xmlns:p14="http://schemas.microsoft.com/office/powerpoint/2010/main" val="1579011935"/>
+                <p14:modId xmlns:p14="http://schemas.microsoft.com/office/powerpoint/2010/main" val="1731896777"/>
               </p:ext>
             </p:extLst>
           </p:nvPr>
         </p:nvGraphicFramePr>
         <p:xfrm>
           <a:off x="6355080" y="3218688"/>
-          <a:ext cx="5285232" cy="914400"/>
+          <a:ext cx="5285232" cy="1264920"/>
         </p:xfrm>
         <a:graphic>
           <a:graphicData uri="http://schemas.openxmlformats.org/drawingml/2006/table">
             <a:tbl>
               <a:tblPr/>
               <a:tblGrid>
-                <a:gridCol w="1783080"/>
-                <a:gridCol w="1216152"/>
-                <a:gridCol w="2286000"/>
+                <a:gridCol w="1783080">
+                  <a:extLst>
+                    <a:ext uri="{9D8B030D-6E8A-4147-A177-3AD203B41FA5}">
+                      <a16:colId xmlns:a16="http://schemas.microsoft.com/office/drawing/2014/main" val="20000"/>
+                    </a:ext>
+                  </a:extLst>
+                </a:gridCol>
+                <a:gridCol w="1216152">
+                  <a:extLst>
+                    <a:ext uri="{9D8B030D-6E8A-4147-A177-3AD203B41FA5}">
+                      <a16:colId xmlns:a16="http://schemas.microsoft.com/office/drawing/2014/main" val="20001"/>
+                    </a:ext>
+                  </a:extLst>
+                </a:gridCol>
+                <a:gridCol w="2286000">
+                  <a:extLst>
+                    <a:ext uri="{9D8B030D-6E8A-4147-A177-3AD203B41FA5}">
+                      <a16:colId xmlns:a16="http://schemas.microsoft.com/office/drawing/2014/main" val="20002"/>
+                    </a:ext>
+                  </a:extLst>
+                </a:gridCol>
               </a:tblGrid>
               <a:tr h="0">
                 <a:tc>
@@ -5885,7 +5825,7 @@
                     <a:bodyPr/>
                     <a:lstStyle/>
                     <a:p>
-                      <a:pPr indent="0" marL="0">
+                      <a:pPr marL="0" indent="0">
                         <a:buNone/>
                       </a:pPr>
                       <a:r>
@@ -5899,7 +5839,7 @@
                       <a:endParaRPr lang="en-US" sz="1300" dirty="0"/>
                     </a:p>
                   </a:txBody>
-                  <a:tcPr marL="73152" marR="73152" marT="45720" marB="45720" anchor="ctr">
+                  <a:tcPr marL="73152" marR="73152" anchor="ctr">
                     <a:lnL w="9525" cap="flat" cmpd="sng" algn="ctr">
                       <a:solidFill>
                         <a:srgbClr val="C9CFD6"/>
@@ -5946,7 +5886,7 @@
                     <a:bodyPr/>
                     <a:lstStyle/>
                     <a:p>
-                      <a:pPr indent="0" marL="0">
+                      <a:pPr marL="0" indent="0">
                         <a:buNone/>
                       </a:pPr>
                       <a:r>
@@ -5960,7 +5900,7 @@
                       <a:endParaRPr lang="en-US" sz="1300" dirty="0"/>
                     </a:p>
                   </a:txBody>
-                  <a:tcPr marL="73152" marR="73152" marT="45720" marB="45720" anchor="ctr">
+                  <a:tcPr marL="73152" marR="73152" anchor="ctr">
                     <a:lnL w="9525" cap="flat" cmpd="sng" algn="ctr">
                       <a:solidFill>
                         <a:srgbClr val="C9CFD6"/>
@@ -6007,7 +5947,7 @@
                     <a:bodyPr/>
                     <a:lstStyle/>
                     <a:p>
-                      <a:pPr indent="0" marL="0">
+                      <a:pPr marL="0" indent="0">
                         <a:buNone/>
                       </a:pPr>
                       <a:r>
@@ -6021,7 +5961,7 @@
                       <a:endParaRPr lang="en-US" sz="1300" dirty="0"/>
                     </a:p>
                   </a:txBody>
-                  <a:tcPr marL="73152" marR="73152" marT="45720" marB="45720" anchor="ctr">
+                  <a:tcPr marL="73152" marR="73152" anchor="ctr">
                     <a:lnL w="9525" cap="flat" cmpd="sng" algn="ctr">
                       <a:solidFill>
                         <a:srgbClr val="C9CFD6"/>
@@ -6063,6 +6003,11 @@
                     </a:solidFill>
                   </a:tcPr>
                 </a:tc>
+                <a:extLst>
+                  <a:ext uri="{0D108BD9-81ED-4DB2-BD59-A6C34878D82A}">
+                    <a16:rowId xmlns:a16="http://schemas.microsoft.com/office/drawing/2014/main" val="10000"/>
+                  </a:ext>
+                </a:extLst>
               </a:tr>
               <a:tr h="0">
                 <a:tc>
@@ -6070,7 +6015,7 @@
                     <a:bodyPr/>
                     <a:lstStyle/>
                     <a:p>
-                      <a:pPr indent="0" marL="0">
+                      <a:pPr marL="0" indent="0">
                         <a:buNone/>
                       </a:pPr>
                       <a:r>
@@ -6091,7 +6036,7 @@
                       </a:endParaRPr>
                     </a:p>
                   </a:txBody>
-                  <a:tcPr marL="73152" marR="73152" marT="45720" marB="45720" anchor="ctr">
+                  <a:tcPr marL="73152" marR="73152" anchor="ctr">
                     <a:lnL w="9525" cap="flat" cmpd="sng" algn="ctr">
                       <a:solidFill>
                         <a:srgbClr val="C9CFD6"/>
@@ -6135,7 +6080,7 @@
                     <a:bodyPr/>
                     <a:lstStyle/>
                     <a:p>
-                      <a:pPr indent="0" marL="0">
+                      <a:pPr marL="0" indent="0">
                         <a:buNone/>
                       </a:pPr>
                       <a:r>
@@ -6149,7 +6094,7 @@
                       <a:endParaRPr lang="en-US" sz="1300" dirty="0"/>
                     </a:p>
                   </a:txBody>
-                  <a:tcPr marL="73152" marR="73152" marT="45720" marB="45720" anchor="ctr">
+                  <a:tcPr marL="73152" marR="73152" anchor="ctr">
                     <a:lnL w="9525" cap="flat" cmpd="sng" algn="ctr">
                       <a:solidFill>
                         <a:srgbClr val="C9CFD6"/>
@@ -6193,7 +6138,7 @@
                     <a:bodyPr/>
                     <a:lstStyle/>
                     <a:p>
-                      <a:pPr indent="0" marL="0">
+                      <a:pPr marL="0" indent="0">
                         <a:buNone/>
                       </a:pPr>
                       <a:r>
@@ -6207,7 +6152,7 @@
                       <a:endParaRPr lang="en-US" sz="1300" dirty="0"/>
                     </a:p>
                   </a:txBody>
-                  <a:tcPr marL="73152" marR="73152" marT="45720" marB="45720" anchor="ctr">
+                  <a:tcPr marL="73152" marR="73152" anchor="ctr">
                     <a:lnL w="9525" cap="flat" cmpd="sng" algn="ctr">
                       <a:solidFill>
                         <a:srgbClr val="C9CFD6"/>
@@ -6246,6 +6191,11 @@
                     </a:lnB>
                   </a:tcPr>
                 </a:tc>
+                <a:extLst>
+                  <a:ext uri="{0D108BD9-81ED-4DB2-BD59-A6C34878D82A}">
+                    <a16:rowId xmlns:a16="http://schemas.microsoft.com/office/drawing/2014/main" val="10001"/>
+                  </a:ext>
+                </a:extLst>
               </a:tr>
               <a:tr h="0">
                 <a:tc>
@@ -6253,7 +6203,7 @@
                     <a:bodyPr/>
                     <a:lstStyle/>
                     <a:p>
-                      <a:pPr indent="0" marL="0">
+                      <a:pPr marL="0" indent="0">
                         <a:buNone/>
                       </a:pPr>
                       <a:r>
@@ -6274,7 +6224,7 @@
                       </a:endParaRPr>
                     </a:p>
                   </a:txBody>
-                  <a:tcPr marL="73152" marR="73152" marT="45720" marB="45720" anchor="ctr">
+                  <a:tcPr marL="73152" marR="73152" anchor="ctr">
                     <a:lnL w="9525" cap="flat" cmpd="sng" algn="ctr">
                       <a:solidFill>
                         <a:srgbClr val="C9CFD6"/>
@@ -6318,7 +6268,7 @@
                     <a:bodyPr/>
                     <a:lstStyle/>
                     <a:p>
-                      <a:pPr indent="0" marL="0">
+                      <a:pPr marL="0" indent="0">
                         <a:buNone/>
                       </a:pPr>
                       <a:r>
@@ -6332,7 +6282,7 @@
                       <a:endParaRPr lang="en-US" sz="1300" dirty="0"/>
                     </a:p>
                   </a:txBody>
-                  <a:tcPr marL="73152" marR="73152" marT="45720" marB="45720" anchor="ctr">
+                  <a:tcPr marL="73152" marR="73152" anchor="ctr">
                     <a:lnL w="9525" cap="flat" cmpd="sng" algn="ctr">
                       <a:solidFill>
                         <a:srgbClr val="C9CFD6"/>
@@ -6376,7 +6326,7 @@
                     <a:bodyPr/>
                     <a:lstStyle/>
                     <a:p>
-                      <a:pPr indent="0" marL="0">
+                      <a:pPr marL="0" indent="0">
                         <a:buNone/>
                       </a:pPr>
                       <a:r>
@@ -6390,7 +6340,7 @@
                       <a:endParaRPr lang="en-US" sz="1300" dirty="0"/>
                     </a:p>
                   </a:txBody>
-                  <a:tcPr marL="73152" marR="73152" marT="45720" marB="45720" anchor="ctr">
+                  <a:tcPr marL="73152" marR="73152" anchor="ctr">
                     <a:lnL w="9525" cap="flat" cmpd="sng" algn="ctr">
                       <a:solidFill>
                         <a:srgbClr val="C9CFD6"/>
@@ -6429,6 +6379,11 @@
                     </a:lnB>
                   </a:tcPr>
                 </a:tc>
+                <a:extLst>
+                  <a:ext uri="{0D108BD9-81ED-4DB2-BD59-A6C34878D82A}">
+                    <a16:rowId xmlns:a16="http://schemas.microsoft.com/office/drawing/2014/main" val="10002"/>
+                  </a:ext>
+                </a:extLst>
               </a:tr>
             </a:tbl>
           </a:graphicData>
@@ -6457,6 +6412,13 @@
           </a:solidFill>
           <a:ln/>
         </p:spPr>
+        <p:txBody>
+          <a:bodyPr/>
+          <a:lstStyle/>
+          <a:p>
+            <a:endParaRPr lang="en-IN"/>
+          </a:p>
+        </p:txBody>
       </p:sp>
       <p:sp>
         <p:nvSpPr>
@@ -6479,7 +6441,7 @@
           <a:bodyPr wrap="square" lIns="0" tIns="0" rIns="0" bIns="0" rtlCol="0" anchor="ctr"/>
           <a:lstStyle/>
           <a:p>
-            <a:pPr algn="l" indent="0" marL="0">
+            <a:pPr marL="0" indent="0" algn="l">
               <a:buNone/>
             </a:pPr>
             <a:r>
@@ -6493,7 +6455,7 @@
             <a:endParaRPr lang="en-US" sz="1400" dirty="0"/>
           </a:p>
           <a:p>
-            <a:pPr algn="l" indent="0" marL="0">
+            <a:pPr marL="0" indent="0" algn="l">
               <a:buNone/>
             </a:pPr>
             <a:r>
@@ -6529,7 +6491,7 @@
           <a:bodyPr wrap="square" lIns="0" tIns="0" rIns="0" bIns="0" rtlCol="0" anchor="t"/>
           <a:lstStyle/>
           <a:p>
-            <a:pPr algn="l" indent="0" marL="0">
+            <a:pPr marL="0" indent="0" algn="l">
               <a:buNone/>
             </a:pPr>
             <a:r>
@@ -6564,7 +6526,7 @@
           </a:prstGeom>
           <a:extLst>
             <a:ext uri="{C572A759-6A51-4108-AA02-DFA0A04FC94B}">
-              <ma14:wrappingTextBoxFlag xmlns:ma14="http://schemas.microsoft.com/office/mac/drawingml/2011/main" val="0"/>
+              <ma14:wrappingTextBoxFlag xmlns:ma14="http://schemas.microsoft.com/office/mac/drawingml/2011/main" xmlns="" val="0"/>
             </a:ext>
           </a:extLst>
         </p:spPr>
@@ -6582,7 +6544,7 @@
           <a:p>
             <a:pPr algn="r"/>
             <a:fld id="{F7021451-1387-4CA6-816F-3879F97B5CBC}" type="slidenum">
-              <a:rPr b="0" lang="en-US"/>
+              <a:rPr lang="en-US" b="0"/>
               <a:t>12</a:t>
             </a:fld>
             <a:endParaRPr lang="en-US"/>
@@ -6617,9 +6579,11 @@
       <p:sp>
         <p:nvSpPr>
           <p:cNvPr id="2" name="Text 0"/>
-          <p:cNvSpPr/>
+          <p:cNvSpPr>
+            <a:spLocks noGrp="1"/>
+          </p:cNvSpPr>
           <p:nvPr>
-            <p:ph idx="100" type="title" hasCustomPrompt="1"/>
+            <p:ph type="title" idx="100" hasCustomPrompt="1"/>
           </p:nvPr>
         </p:nvSpPr>
         <p:spPr>
@@ -6637,7 +6601,7 @@
           <a:bodyPr wrap="square" lIns="0" tIns="0" rIns="0" bIns="0" rtlCol="0" anchor="ctr"/>
           <a:lstStyle/>
           <a:p>
-            <a:pPr algn="l" indent="0" marL="0">
+            <a:pPr marL="0" indent="0" algn="l">
               <a:buNone/>
             </a:pPr>
             <a:r>
@@ -6675,6 +6639,13 @@
           </a:solidFill>
           <a:ln/>
         </p:spPr>
+        <p:txBody>
+          <a:bodyPr/>
+          <a:lstStyle/>
+          <a:p>
+            <a:endParaRPr lang="en-IN"/>
+          </a:p>
+        </p:txBody>
       </p:sp>
       <p:sp>
         <p:nvSpPr>
@@ -6699,7 +6670,7 @@
           <a:bodyPr wrap="square" lIns="0" tIns="0" rIns="0" bIns="0" rtlCol="0" anchor="ctr"/>
           <a:lstStyle/>
           <a:p>
-            <a:pPr algn="ctr" indent="0" marL="0">
+            <a:pPr marL="0" indent="0" algn="ctr">
               <a:buNone/>
             </a:pPr>
             <a:r>
@@ -6735,7 +6706,7 @@
           <a:bodyPr wrap="square" lIns="0" tIns="0" rIns="0" bIns="0" rtlCol="0" anchor="ctr"/>
           <a:lstStyle/>
           <a:p>
-            <a:pPr algn="l" indent="0" marL="0">
+            <a:pPr marL="0" indent="0" algn="l">
               <a:buNone/>
             </a:pPr>
             <a:r>
@@ -6771,7 +6742,7 @@
           <a:bodyPr wrap="square" lIns="0" tIns="0" rIns="0" bIns="0" rtlCol="0" anchor="t"/>
           <a:lstStyle/>
           <a:p>
-            <a:pPr algn="l" marL="342900" indent="-342900">
+            <a:pPr marL="342900" indent="-342900" algn="l">
               <a:spcAft>
                 <a:spcPts val="800"/>
               </a:spcAft>
@@ -6789,7 +6760,7 @@
             <a:endParaRPr lang="en-US" sz="1400" dirty="0"/>
           </a:p>
           <a:p>
-            <a:pPr algn="l" marL="342900" indent="-342900">
+            <a:pPr marL="342900" indent="-342900" algn="l">
               <a:spcAft>
                 <a:spcPts val="800"/>
               </a:spcAft>
@@ -6807,7 +6778,7 @@
             <a:endParaRPr lang="en-US" sz="1400" dirty="0"/>
           </a:p>
           <a:p>
-            <a:pPr algn="l" marL="342900" indent="-342900">
+            <a:pPr marL="342900" indent="-342900" algn="l">
               <a:spcAft>
                 <a:spcPts val="800"/>
               </a:spcAft>
@@ -6825,7 +6796,7 @@
             <a:endParaRPr lang="en-US" sz="1400" dirty="0"/>
           </a:p>
           <a:p>
-            <a:pPr algn="l" marL="342900" indent="-342900">
+            <a:pPr marL="342900" indent="-342900" algn="l">
               <a:spcAft>
                 <a:spcPts val="800"/>
               </a:spcAft>
@@ -6843,7 +6814,7 @@
             <a:endParaRPr lang="en-US" sz="1400" dirty="0"/>
           </a:p>
           <a:p>
-            <a:pPr algn="l" marL="342900" indent="-342900">
+            <a:pPr marL="342900" indent="-342900" algn="l">
               <a:spcAft>
                 <a:spcPts val="800"/>
               </a:spcAft>
@@ -6885,6 +6856,13 @@
           </a:solidFill>
           <a:ln/>
         </p:spPr>
+        <p:txBody>
+          <a:bodyPr/>
+          <a:lstStyle/>
+          <a:p>
+            <a:endParaRPr lang="en-IN"/>
+          </a:p>
+        </p:txBody>
       </p:sp>
       <p:sp>
         <p:nvSpPr>
@@ -6909,7 +6887,7 @@
           <a:bodyPr wrap="square" lIns="0" tIns="0" rIns="0" bIns="0" rtlCol="0" anchor="ctr"/>
           <a:lstStyle/>
           <a:p>
-            <a:pPr algn="ctr" indent="0" marL="0">
+            <a:pPr marL="0" indent="0" algn="ctr">
               <a:buNone/>
             </a:pPr>
             <a:r>
@@ -6945,7 +6923,7 @@
           <a:bodyPr wrap="square" lIns="0" tIns="0" rIns="0" bIns="0" rtlCol="0" anchor="ctr"/>
           <a:lstStyle/>
           <a:p>
-            <a:pPr algn="l" indent="0" marL="0">
+            <a:pPr marL="0" indent="0" algn="l">
               <a:buNone/>
             </a:pPr>
             <a:r>
@@ -6981,7 +6959,7 @@
           <a:bodyPr wrap="square" lIns="0" tIns="0" rIns="0" bIns="0" rtlCol="0" anchor="t"/>
           <a:lstStyle/>
           <a:p>
-            <a:pPr algn="l" marL="342900" indent="-342900">
+            <a:pPr marL="342900" indent="-342900" algn="l">
               <a:spcAft>
                 <a:spcPts val="800"/>
               </a:spcAft>
@@ -6999,7 +6977,7 @@
             <a:endParaRPr lang="en-US" sz="1400" dirty="0"/>
           </a:p>
           <a:p>
-            <a:pPr algn="l" marL="342900" indent="-342900">
+            <a:pPr marL="342900" indent="-342900" algn="l">
               <a:spcAft>
                 <a:spcPts val="800"/>
               </a:spcAft>
@@ -7017,7 +6995,7 @@
             <a:endParaRPr lang="en-US" sz="1400" dirty="0"/>
           </a:p>
           <a:p>
-            <a:pPr algn="l" marL="342900" indent="-342900">
+            <a:pPr marL="342900" indent="-342900" algn="l">
               <a:spcAft>
                 <a:spcPts val="800"/>
               </a:spcAft>
@@ -7035,7 +7013,7 @@
             <a:endParaRPr lang="en-US" sz="1400" dirty="0"/>
           </a:p>
           <a:p>
-            <a:pPr algn="l" marL="342900" indent="-342900">
+            <a:pPr marL="342900" indent="-342900" algn="l">
               <a:spcAft>
                 <a:spcPts val="800"/>
               </a:spcAft>
@@ -7077,6 +7055,13 @@
           </a:solidFill>
           <a:ln/>
         </p:spPr>
+        <p:txBody>
+          <a:bodyPr/>
+          <a:lstStyle/>
+          <a:p>
+            <a:endParaRPr lang="en-IN"/>
+          </a:p>
+        </p:txBody>
       </p:sp>
       <p:sp>
         <p:nvSpPr>
@@ -7101,7 +7086,7 @@
           <a:bodyPr wrap="square" lIns="0" tIns="0" rIns="0" bIns="0" rtlCol="0" anchor="ctr"/>
           <a:lstStyle/>
           <a:p>
-            <a:pPr algn="ctr" indent="0" marL="0">
+            <a:pPr marL="0" indent="0" algn="ctr">
               <a:buNone/>
             </a:pPr>
             <a:r>
@@ -7137,7 +7122,7 @@
           <a:bodyPr wrap="square" lIns="0" tIns="0" rIns="0" bIns="0" rtlCol="0" anchor="ctr"/>
           <a:lstStyle/>
           <a:p>
-            <a:pPr algn="l" indent="0" marL="0">
+            <a:pPr marL="0" indent="0" algn="l">
               <a:buNone/>
             </a:pPr>
             <a:r>
@@ -7173,7 +7158,7 @@
           <a:bodyPr wrap="square" lIns="0" tIns="0" rIns="0" bIns="0" rtlCol="0" anchor="t"/>
           <a:lstStyle/>
           <a:p>
-            <a:pPr algn="l" marL="342900" indent="-342900">
+            <a:pPr marL="342900" indent="-342900" algn="l">
               <a:spcAft>
                 <a:spcPts val="800"/>
               </a:spcAft>
@@ -7191,7 +7176,7 @@
             <a:endParaRPr lang="en-US" sz="1400" dirty="0"/>
           </a:p>
           <a:p>
-            <a:pPr algn="l" marL="342900" indent="-342900">
+            <a:pPr marL="342900" indent="-342900" algn="l">
               <a:spcAft>
                 <a:spcPts val="800"/>
               </a:spcAft>
@@ -7209,7 +7194,7 @@
             <a:endParaRPr lang="en-US" sz="1400" dirty="0"/>
           </a:p>
           <a:p>
-            <a:pPr algn="l" marL="342900" indent="-342900">
+            <a:pPr marL="342900" indent="-342900" algn="l">
               <a:spcAft>
                 <a:spcPts val="800"/>
               </a:spcAft>
@@ -7227,7 +7212,7 @@
             <a:endParaRPr lang="en-US" sz="1400" dirty="0"/>
           </a:p>
           <a:p>
-            <a:pPr algn="l" marL="342900" indent="-342900">
+            <a:pPr marL="342900" indent="-342900" algn="l">
               <a:spcAft>
                 <a:spcPts val="800"/>
               </a:spcAft>
@@ -7245,7 +7230,7 @@
             <a:endParaRPr lang="en-US" sz="1400" dirty="0"/>
           </a:p>
           <a:p>
-            <a:pPr algn="l" marL="342900" indent="-342900">
+            <a:pPr marL="342900" indent="-342900" algn="l">
               <a:spcAft>
                 <a:spcPts val="800"/>
               </a:spcAft>
@@ -7287,6 +7272,13 @@
           </a:solidFill>
           <a:ln/>
         </p:spPr>
+        <p:txBody>
+          <a:bodyPr/>
+          <a:lstStyle/>
+          <a:p>
+            <a:endParaRPr lang="en-IN"/>
+          </a:p>
+        </p:txBody>
       </p:sp>
       <p:sp>
         <p:nvSpPr>
@@ -7309,7 +7301,7 @@
           <a:bodyPr wrap="square" lIns="0" tIns="0" rIns="0" bIns="0" rtlCol="0" anchor="ctr"/>
           <a:lstStyle/>
           <a:p>
-            <a:pPr indent="0" marL="0">
+            <a:pPr marL="0" indent="0">
               <a:buNone/>
             </a:pPr>
             <a:r>
@@ -7320,9 +7312,6 @@
               </a:rPr>
               <a:t>Implemented vs proposed: </a:t>
             </a:r>
-            <a:pPr indent="0" marL="0">
-              <a:buNone/>
-            </a:pPr>
             <a:r>
               <a:rPr lang="en-US" sz="1500" dirty="0">
                 <a:solidFill>
@@ -7355,7 +7344,7 @@
           </a:prstGeom>
           <a:extLst>
             <a:ext uri="{C572A759-6A51-4108-AA02-DFA0A04FC94B}">
-              <ma14:wrappingTextBoxFlag xmlns:ma14="http://schemas.microsoft.com/office/mac/drawingml/2011/main" val="0"/>
+              <ma14:wrappingTextBoxFlag xmlns:ma14="http://schemas.microsoft.com/office/mac/drawingml/2011/main" xmlns="" val="0"/>
             </a:ext>
           </a:extLst>
         </p:spPr>
@@ -7373,7 +7362,7 @@
           <a:p>
             <a:pPr algn="r"/>
             <a:fld id="{F7021451-1387-4CA6-816F-3879F97B5CBC}" type="slidenum">
-              <a:rPr b="0" lang="en-US"/>
+              <a:rPr lang="en-US" b="0"/>
               <a:t>13</a:t>
             </a:fld>
             <a:endParaRPr lang="en-US"/>
@@ -7408,9 +7397,11 @@
       <p:sp>
         <p:nvSpPr>
           <p:cNvPr id="2" name="Text 1"/>
-          <p:cNvSpPr/>
+          <p:cNvSpPr>
+            <a:spLocks noGrp="1"/>
+          </p:cNvSpPr>
           <p:nvPr>
-            <p:ph idx="101" type="title" hasCustomPrompt="1"/>
+            <p:ph type="title" idx="101" hasCustomPrompt="1"/>
           </p:nvPr>
         </p:nvSpPr>
         <p:spPr>
@@ -7428,7 +7419,7 @@
           <a:bodyPr wrap="square" lIns="0" tIns="0" rIns="0" bIns="0" rtlCol="0" anchor="ctr"/>
           <a:lstStyle/>
           <a:p>
-            <a:pPr algn="l" indent="0" marL="0">
+            <a:pPr marL="0" indent="0" algn="l">
               <a:buNone/>
             </a:pPr>
             <a:r>
@@ -7464,7 +7455,7 @@
           <a:bodyPr wrap="square" lIns="0" tIns="0" rIns="0" bIns="0" rtlCol="0" anchor="t"/>
           <a:lstStyle/>
           <a:p>
-            <a:pPr algn="l" marL="342900" indent="-342900">
+            <a:pPr marL="342900" indent="-342900" algn="l">
               <a:spcAft>
                 <a:spcPts val="1200"/>
               </a:spcAft>
@@ -7482,7 +7473,7 @@
             <a:endParaRPr lang="en-US" sz="1700" dirty="0"/>
           </a:p>
           <a:p>
-            <a:pPr algn="l" marL="342900" indent="-342900">
+            <a:pPr marL="342900" indent="-342900" algn="l">
               <a:spcAft>
                 <a:spcPts val="1200"/>
               </a:spcAft>
@@ -7500,7 +7491,7 @@
             <a:endParaRPr lang="en-US" sz="1700" dirty="0"/>
           </a:p>
           <a:p>
-            <a:pPr algn="l" marL="342900" indent="-342900">
+            <a:pPr marL="342900" indent="-342900" algn="l">
               <a:spcAft>
                 <a:spcPts val="1200"/>
               </a:spcAft>
@@ -7518,7 +7509,7 @@
             <a:endParaRPr lang="en-US" sz="1700" dirty="0"/>
           </a:p>
           <a:p>
-            <a:pPr algn="l" marL="342900" indent="-342900">
+            <a:pPr marL="342900" indent="-342900" algn="l">
               <a:spcAft>
                 <a:spcPts val="1200"/>
               </a:spcAft>
@@ -7558,6 +7549,13 @@
           </a:solidFill>
           <a:ln/>
         </p:spPr>
+        <p:txBody>
+          <a:bodyPr/>
+          <a:lstStyle/>
+          <a:p>
+            <a:endParaRPr lang="en-IN"/>
+          </a:p>
+        </p:txBody>
       </p:sp>
       <p:sp>
         <p:nvSpPr>
@@ -7580,7 +7578,7 @@
           <a:bodyPr wrap="square" lIns="0" tIns="0" rIns="0" bIns="0" rtlCol="0" anchor="t"/>
           <a:lstStyle/>
           <a:p>
-            <a:pPr algn="l" indent="0" marL="0">
+            <a:pPr marL="0" indent="0" algn="l">
               <a:buNone/>
             </a:pPr>
             <a:r>
@@ -7616,7 +7614,7 @@
           <a:bodyPr wrap="square" lIns="0" tIns="0" rIns="0" bIns="0" rtlCol="0" anchor="t"/>
           <a:lstStyle/>
           <a:p>
-            <a:pPr algn="l" indent="0" marL="0">
+            <a:pPr marL="0" indent="0" algn="l">
               <a:spcAft>
                 <a:spcPts val="600"/>
               </a:spcAft>
@@ -7633,7 +7631,7 @@
             <a:endParaRPr lang="en-US" sz="1200" dirty="0"/>
           </a:p>
           <a:p>
-            <a:pPr algn="l" indent="0" marL="0">
+            <a:pPr marL="0" indent="0" algn="l">
               <a:spcAft>
                 <a:spcPts val="600"/>
               </a:spcAft>
@@ -7650,7 +7648,7 @@
             <a:endParaRPr lang="en-US" sz="1200" dirty="0"/>
           </a:p>
           <a:p>
-            <a:pPr algn="l" indent="0" marL="0">
+            <a:pPr marL="0" indent="0" algn="l">
               <a:spcAft>
                 <a:spcPts val="600"/>
               </a:spcAft>
@@ -7667,7 +7665,7 @@
             <a:endParaRPr lang="en-US" sz="1200" dirty="0"/>
           </a:p>
           <a:p>
-            <a:pPr algn="l" indent="0" marL="0">
+            <a:pPr marL="0" indent="0" algn="l">
               <a:spcAft>
                 <a:spcPts val="600"/>
               </a:spcAft>
@@ -7684,7 +7682,7 @@
             <a:endParaRPr lang="en-US" sz="1200" dirty="0"/>
           </a:p>
           <a:p>
-            <a:pPr algn="l" indent="0" marL="0">
+            <a:pPr marL="0" indent="0" algn="l">
               <a:spcAft>
                 <a:spcPts val="600"/>
               </a:spcAft>
@@ -7701,7 +7699,7 @@
             <a:endParaRPr lang="en-US" sz="1200" dirty="0"/>
           </a:p>
           <a:p>
-            <a:pPr algn="l" indent="0" marL="0">
+            <a:pPr marL="0" indent="0" algn="l">
               <a:spcAft>
                 <a:spcPts val="600"/>
               </a:spcAft>
@@ -7718,7 +7716,7 @@
             <a:endParaRPr lang="en-US" sz="1200" dirty="0"/>
           </a:p>
           <a:p>
-            <a:pPr algn="l" indent="0" marL="0">
+            <a:pPr marL="0" indent="0" algn="l">
               <a:spcAft>
                 <a:spcPts val="600"/>
               </a:spcAft>
@@ -7735,7 +7733,7 @@
             <a:endParaRPr lang="en-US" sz="1200" dirty="0"/>
           </a:p>
           <a:p>
-            <a:pPr algn="l" indent="0" marL="0">
+            <a:pPr marL="0" indent="0" algn="l">
               <a:spcAft>
                 <a:spcPts val="600"/>
               </a:spcAft>
@@ -7774,7 +7772,7 @@
           <a:bodyPr wrap="square" lIns="0" tIns="0" rIns="0" bIns="0" rtlCol="0" anchor="t"/>
           <a:lstStyle/>
           <a:p>
-            <a:pPr algn="l" indent="0" marL="0">
+            <a:pPr marL="0" indent="0" algn="l">
               <a:buNone/>
             </a:pPr>
             <a:r>
@@ -7810,7 +7808,7 @@
           <a:bodyPr wrap="square" lIns="0" tIns="0" rIns="0" bIns="0" rtlCol="0" anchor="t"/>
           <a:lstStyle/>
           <a:p>
-            <a:pPr algn="l" indent="0" marL="0">
+            <a:pPr marL="0" indent="0" algn="l">
               <a:buNone/>
             </a:pPr>
             <a:r>
@@ -7845,7 +7843,7 @@
           </a:prstGeom>
           <a:extLst>
             <a:ext uri="{C572A759-6A51-4108-AA02-DFA0A04FC94B}">
-              <ma14:wrappingTextBoxFlag xmlns:ma14="http://schemas.microsoft.com/office/mac/drawingml/2011/main" val="0"/>
+              <ma14:wrappingTextBoxFlag xmlns:ma14="http://schemas.microsoft.com/office/mac/drawingml/2011/main" xmlns="" val="0"/>
             </a:ext>
           </a:extLst>
         </p:spPr>
@@ -7863,7 +7861,7 @@
           <a:p>
             <a:pPr algn="r"/>
             <a:fld id="{F7021451-1387-4CA6-816F-3879F97B5CBC}" type="slidenum">
-              <a:rPr b="0" lang="en-US"/>
+              <a:rPr lang="en-US" b="0"/>
               <a:t>14</a:t>
             </a:fld>
             <a:endParaRPr lang="en-US"/>
@@ -7898,9 +7896,11 @@
       <p:sp>
         <p:nvSpPr>
           <p:cNvPr id="2" name="Text 0"/>
-          <p:cNvSpPr/>
+          <p:cNvSpPr>
+            <a:spLocks noGrp="1"/>
+          </p:cNvSpPr>
           <p:nvPr>
-            <p:ph idx="100" type="title" hasCustomPrompt="1"/>
+            <p:ph type="title" idx="100" hasCustomPrompt="1"/>
           </p:nvPr>
         </p:nvSpPr>
         <p:spPr>
@@ -7918,7 +7918,7 @@
           <a:bodyPr wrap="square" lIns="0" tIns="0" rIns="0" bIns="0" rtlCol="0" anchor="ctr"/>
           <a:lstStyle/>
           <a:p>
-            <a:pPr algn="l" indent="0" marL="0">
+            <a:pPr marL="0" indent="0" algn="l">
               <a:buNone/>
             </a:pPr>
             <a:r>
@@ -7956,7 +7956,7 @@
           <a:bodyPr wrap="square" lIns="0" tIns="0" rIns="0" bIns="0" rtlCol="0" anchor="ctr"/>
           <a:lstStyle/>
           <a:p>
-            <a:pPr algn="ctr" indent="0" marL="0">
+            <a:pPr marL="0" indent="0" algn="ctr">
               <a:buNone/>
             </a:pPr>
             <a:r>
@@ -7992,7 +7992,7 @@
           <a:bodyPr wrap="square" lIns="0" tIns="0" rIns="0" bIns="0" rtlCol="0" anchor="t"/>
           <a:lstStyle/>
           <a:p>
-            <a:pPr algn="l" indent="0" marL="0">
+            <a:pPr marL="0" indent="0" algn="l">
               <a:buNone/>
             </a:pPr>
             <a:r>
@@ -8028,7 +8028,7 @@
           <a:bodyPr wrap="square" lIns="0" tIns="0" rIns="0" bIns="0" rtlCol="0" anchor="t"/>
           <a:lstStyle/>
           <a:p>
-            <a:pPr algn="l" indent="0" marL="0">
+            <a:pPr marL="0" indent="0" algn="l">
               <a:buNone/>
             </a:pPr>
             <a:r>
@@ -8066,7 +8066,7 @@
           <a:bodyPr wrap="square" lIns="0" tIns="0" rIns="0" bIns="0" rtlCol="0" anchor="ctr"/>
           <a:lstStyle/>
           <a:p>
-            <a:pPr algn="ctr" indent="0" marL="0">
+            <a:pPr marL="0" indent="0" algn="ctr">
               <a:buNone/>
             </a:pPr>
             <a:r>
@@ -8102,7 +8102,7 @@
           <a:bodyPr wrap="square" lIns="0" tIns="0" rIns="0" bIns="0" rtlCol="0" anchor="t"/>
           <a:lstStyle/>
           <a:p>
-            <a:pPr algn="l" indent="0" marL="0">
+            <a:pPr marL="0" indent="0" algn="l">
               <a:buNone/>
             </a:pPr>
             <a:r>
@@ -8138,7 +8138,7 @@
           <a:bodyPr wrap="square" lIns="0" tIns="0" rIns="0" bIns="0" rtlCol="0" anchor="t"/>
           <a:lstStyle/>
           <a:p>
-            <a:pPr algn="l" indent="0" marL="0">
+            <a:pPr marL="0" indent="0" algn="l">
               <a:buNone/>
             </a:pPr>
             <a:r>
@@ -8176,7 +8176,7 @@
           <a:bodyPr wrap="square" lIns="0" tIns="0" rIns="0" bIns="0" rtlCol="0" anchor="ctr"/>
           <a:lstStyle/>
           <a:p>
-            <a:pPr algn="ctr" indent="0" marL="0">
+            <a:pPr marL="0" indent="0" algn="ctr">
               <a:buNone/>
             </a:pPr>
             <a:r>
@@ -8212,7 +8212,7 @@
           <a:bodyPr wrap="square" lIns="0" tIns="0" rIns="0" bIns="0" rtlCol="0" anchor="t"/>
           <a:lstStyle/>
           <a:p>
-            <a:pPr algn="l" indent="0" marL="0">
+            <a:pPr marL="0" indent="0" algn="l">
               <a:buNone/>
             </a:pPr>
             <a:r>
@@ -8248,7 +8248,7 @@
           <a:bodyPr wrap="square" lIns="0" tIns="0" rIns="0" bIns="0" rtlCol="0" anchor="t"/>
           <a:lstStyle/>
           <a:p>
-            <a:pPr algn="l" indent="0" marL="0">
+            <a:pPr marL="0" indent="0" algn="l">
               <a:buNone/>
             </a:pPr>
             <a:r>
@@ -8284,7 +8284,7 @@
           <a:bodyPr wrap="square" lIns="0" tIns="0" rIns="0" bIns="0" rtlCol="0" anchor="t"/>
           <a:lstStyle/>
           <a:p>
-            <a:pPr algn="l" indent="0" marL="0">
+            <a:pPr marL="0" indent="0" algn="l">
               <a:buNone/>
             </a:pPr>
             <a:r>
@@ -8320,6 +8320,13 @@
           </a:solidFill>
           <a:ln/>
         </p:spPr>
+        <p:txBody>
+          <a:bodyPr/>
+          <a:lstStyle/>
+          <a:p>
+            <a:endParaRPr lang="en-IN"/>
+          </a:p>
+        </p:txBody>
       </p:sp>
       <p:sp>
         <p:nvSpPr>
@@ -8342,7 +8349,7 @@
           <a:bodyPr wrap="square" lIns="0" tIns="0" rIns="0" bIns="0" rtlCol="0" anchor="ctr"/>
           <a:lstStyle/>
           <a:p>
-            <a:pPr indent="0" marL="0">
+            <a:pPr marL="0" indent="0">
               <a:buNone/>
             </a:pPr>
             <a:r>
@@ -8353,9 +8360,6 @@
               </a:rPr>
               <a:t>Mining</a:t>
             </a:r>
-            <a:pPr indent="0" marL="0">
-              <a:buNone/>
-            </a:pPr>
             <a:r>
               <a:rPr lang="en-US" sz="1400" dirty="0">
                 <a:solidFill>
@@ -8391,6 +8395,13 @@
             <a:tailEnd type="triangle"/>
           </a:ln>
         </p:spPr>
+        <p:txBody>
+          <a:bodyPr/>
+          <a:lstStyle/>
+          <a:p>
+            <a:endParaRPr lang="en-IN"/>
+          </a:p>
+        </p:txBody>
       </p:sp>
       <p:sp>
         <p:nvSpPr>
@@ -8413,6 +8424,13 @@
           </a:solidFill>
           <a:ln/>
         </p:spPr>
+        <p:txBody>
+          <a:bodyPr/>
+          <a:lstStyle/>
+          <a:p>
+            <a:endParaRPr lang="en-IN"/>
+          </a:p>
+        </p:txBody>
       </p:sp>
       <p:sp>
         <p:nvSpPr>
@@ -8435,7 +8453,7 @@
           <a:bodyPr wrap="square" lIns="0" tIns="0" rIns="0" bIns="0" rtlCol="0" anchor="ctr"/>
           <a:lstStyle/>
           <a:p>
-            <a:pPr indent="0" marL="0">
+            <a:pPr marL="0" indent="0">
               <a:buNone/>
             </a:pPr>
             <a:r>
@@ -8446,9 +8464,6 @@
               </a:rPr>
               <a:t>Refining</a:t>
             </a:r>
-            <a:pPr indent="0" marL="0">
-              <a:buNone/>
-            </a:pPr>
             <a:r>
               <a:rPr lang="en-US" sz="1400" dirty="0">
                 <a:solidFill>
@@ -8484,6 +8499,13 @@
             <a:tailEnd type="triangle"/>
           </a:ln>
         </p:spPr>
+        <p:txBody>
+          <a:bodyPr/>
+          <a:lstStyle/>
+          <a:p>
+            <a:endParaRPr lang="en-IN"/>
+          </a:p>
+        </p:txBody>
       </p:sp>
       <p:sp>
         <p:nvSpPr>
@@ -8506,6 +8528,13 @@
           </a:solidFill>
           <a:ln/>
         </p:spPr>
+        <p:txBody>
+          <a:bodyPr/>
+          <a:lstStyle/>
+          <a:p>
+            <a:endParaRPr lang="en-IN"/>
+          </a:p>
+        </p:txBody>
       </p:sp>
       <p:sp>
         <p:nvSpPr>
@@ -8528,7 +8557,7 @@
           <a:bodyPr wrap="square" lIns="0" tIns="0" rIns="0" bIns="0" rtlCol="0" anchor="ctr"/>
           <a:lstStyle/>
           <a:p>
-            <a:pPr indent="0" marL="0">
+            <a:pPr marL="0" indent="0">
               <a:buNone/>
             </a:pPr>
             <a:r>
@@ -8539,9 +8568,6 @@
               </a:rPr>
               <a:t>Cell &amp; pack manufacturing</a:t>
             </a:r>
-            <a:pPr indent="0" marL="0">
-              <a:buNone/>
-            </a:pPr>
             <a:r>
               <a:rPr lang="en-US" sz="1400" dirty="0">
                 <a:solidFill>
@@ -8577,6 +8603,13 @@
             <a:tailEnd type="triangle"/>
           </a:ln>
         </p:spPr>
+        <p:txBody>
+          <a:bodyPr/>
+          <a:lstStyle/>
+          <a:p>
+            <a:endParaRPr lang="en-IN"/>
+          </a:p>
+        </p:txBody>
       </p:sp>
       <p:sp>
         <p:nvSpPr>
@@ -8599,6 +8632,13 @@
           </a:solidFill>
           <a:ln/>
         </p:spPr>
+        <p:txBody>
+          <a:bodyPr/>
+          <a:lstStyle/>
+          <a:p>
+            <a:endParaRPr lang="en-IN"/>
+          </a:p>
+        </p:txBody>
       </p:sp>
       <p:sp>
         <p:nvSpPr>
@@ -8621,7 +8661,7 @@
           <a:bodyPr wrap="square" lIns="0" tIns="0" rIns="0" bIns="0" rtlCol="0" anchor="ctr"/>
           <a:lstStyle/>
           <a:p>
-            <a:pPr indent="0" marL="0">
+            <a:pPr marL="0" indent="0">
               <a:buNone/>
             </a:pPr>
             <a:r>
@@ -8632,9 +8672,6 @@
               </a:rPr>
               <a:t>Vehicle assembly</a:t>
             </a:r>
-            <a:pPr indent="0" marL="0">
-              <a:buNone/>
-            </a:pPr>
             <a:r>
               <a:rPr lang="en-US" sz="1400" dirty="0">
                 <a:solidFill>
@@ -8670,6 +8707,13 @@
             <a:tailEnd type="triangle"/>
           </a:ln>
         </p:spPr>
+        <p:txBody>
+          <a:bodyPr/>
+          <a:lstStyle/>
+          <a:p>
+            <a:endParaRPr lang="en-IN"/>
+          </a:p>
+        </p:txBody>
       </p:sp>
       <p:sp>
         <p:nvSpPr>
@@ -8692,6 +8736,13 @@
           </a:solidFill>
           <a:ln/>
         </p:spPr>
+        <p:txBody>
+          <a:bodyPr/>
+          <a:lstStyle/>
+          <a:p>
+            <a:endParaRPr lang="en-IN"/>
+          </a:p>
+        </p:txBody>
       </p:sp>
       <p:sp>
         <p:nvSpPr>
@@ -8714,7 +8765,7 @@
           <a:bodyPr wrap="square" lIns="0" tIns="0" rIns="0" bIns="0" rtlCol="0" anchor="ctr"/>
           <a:lstStyle/>
           <a:p>
-            <a:pPr indent="0" marL="0">
+            <a:pPr marL="0" indent="0">
               <a:buNone/>
             </a:pPr>
             <a:r>
@@ -8725,9 +8776,6 @@
               </a:rPr>
               <a:t>Distribution &amp; use</a:t>
             </a:r>
-            <a:pPr indent="0" marL="0">
-              <a:buNone/>
-            </a:pPr>
             <a:r>
               <a:rPr lang="en-US" sz="1400" dirty="0">
                 <a:solidFill>
@@ -8763,6 +8811,13 @@
             <a:tailEnd type="triangle"/>
           </a:ln>
         </p:spPr>
+        <p:txBody>
+          <a:bodyPr/>
+          <a:lstStyle/>
+          <a:p>
+            <a:endParaRPr lang="en-IN"/>
+          </a:p>
+        </p:txBody>
       </p:sp>
       <p:sp>
         <p:nvSpPr>
@@ -8787,6 +8842,13 @@
           </a:solidFill>
           <a:ln/>
         </p:spPr>
+        <p:txBody>
+          <a:bodyPr/>
+          <a:lstStyle/>
+          <a:p>
+            <a:endParaRPr lang="en-IN"/>
+          </a:p>
+        </p:txBody>
       </p:sp>
       <p:sp>
         <p:nvSpPr>
@@ -8809,7 +8871,7 @@
           <a:bodyPr wrap="square" lIns="0" tIns="0" rIns="0" bIns="0" rtlCol="0" anchor="ctr"/>
           <a:lstStyle/>
           <a:p>
-            <a:pPr indent="0" marL="0">
+            <a:pPr marL="0" indent="0">
               <a:buNone/>
             </a:pPr>
             <a:r>
@@ -8820,9 +8882,6 @@
               </a:rPr>
               <a:t>End of life &amp; recycling</a:t>
             </a:r>
-            <a:pPr indent="0" marL="0">
-              <a:buNone/>
-            </a:pPr>
             <a:r>
               <a:rPr lang="en-US" sz="1400" dirty="0">
                 <a:solidFill>
@@ -8856,7 +8915,7 @@
           <a:bodyPr wrap="square" lIns="0" tIns="0" rIns="0" bIns="0" rtlCol="0" anchor="t"/>
           <a:lstStyle/>
           <a:p>
-            <a:pPr algn="l" indent="0" marL="0">
+            <a:pPr marL="0" indent="0" algn="l">
               <a:buNone/>
             </a:pPr>
             <a:r>
@@ -8894,6 +8953,13 @@
           </a:solidFill>
           <a:ln/>
         </p:spPr>
+        <p:txBody>
+          <a:bodyPr/>
+          <a:lstStyle/>
+          <a:p>
+            <a:endParaRPr lang="en-IN"/>
+          </a:p>
+        </p:txBody>
       </p:sp>
       <p:sp>
         <p:nvSpPr>
@@ -8916,7 +8982,7 @@
           <a:bodyPr wrap="square" lIns="0" tIns="0" rIns="0" bIns="0" rtlCol="0" anchor="ctr"/>
           <a:lstStyle/>
           <a:p>
-            <a:pPr indent="0" marL="0">
+            <a:pPr marL="0" indent="0">
               <a:buNone/>
             </a:pPr>
             <a:r>
@@ -8927,9 +8993,6 @@
               </a:rPr>
               <a:t>Motivation: </a:t>
             </a:r>
-            <a:pPr indent="0" marL="0">
-              <a:buNone/>
-            </a:pPr>
             <a:r>
               <a:rPr lang="en-US" sz="1500" dirty="0">
                 <a:solidFill>
@@ -8944,7 +9007,7 @@
       </p:sp>
       <p:sp>
         <p:nvSpPr>
-          <p:cNvPr id="25" name="Slide Number Placeholder 0"/>
+          <p:cNvPr id="33" name="Slide Number Placeholder 0"/>
           <p:cNvSpPr>
             <a:spLocks noGrp="1"/>
           </p:cNvSpPr>
@@ -8962,7 +9025,7 @@
           </a:prstGeom>
           <a:extLst>
             <a:ext uri="{C572A759-6A51-4108-AA02-DFA0A04FC94B}">
-              <ma14:wrappingTextBoxFlag xmlns:ma14="http://schemas.microsoft.com/office/mac/drawingml/2011/main" val="0"/>
+              <ma14:wrappingTextBoxFlag xmlns:ma14="http://schemas.microsoft.com/office/mac/drawingml/2011/main" xmlns="" val="0"/>
             </a:ext>
           </a:extLst>
         </p:spPr>
@@ -8980,7 +9043,7 @@
           <a:p>
             <a:pPr algn="r"/>
             <a:fld id="{F7021451-1387-4CA6-816F-3879F97B5CBC}" type="slidenum">
-              <a:rPr b="0" lang="en-US"/>
+              <a:rPr lang="en-US" b="0"/>
               <a:t>2</a:t>
             </a:fld>
             <a:endParaRPr lang="en-US"/>
@@ -9015,9 +9078,11 @@
       <p:sp>
         <p:nvSpPr>
           <p:cNvPr id="2" name="Text 0"/>
-          <p:cNvSpPr/>
+          <p:cNvSpPr>
+            <a:spLocks noGrp="1"/>
+          </p:cNvSpPr>
           <p:nvPr>
-            <p:ph idx="100" type="title" hasCustomPrompt="1"/>
+            <p:ph type="title" idx="100" hasCustomPrompt="1"/>
           </p:nvPr>
         </p:nvSpPr>
         <p:spPr>
@@ -9035,7 +9100,7 @@
           <a:bodyPr wrap="square" lIns="0" tIns="0" rIns="0" bIns="0" rtlCol="0" anchor="ctr"/>
           <a:lstStyle/>
           <a:p>
-            <a:pPr algn="l" indent="0" marL="0">
+            <a:pPr marL="0" indent="0" algn="l">
               <a:buNone/>
             </a:pPr>
             <a:r>
@@ -9071,7 +9136,7 @@
           <a:bodyPr wrap="square" lIns="0" tIns="0" rIns="0" bIns="0" rtlCol="0" anchor="t"/>
           <a:lstStyle/>
           <a:p>
-            <a:pPr algn="l" indent="0" marL="0">
+            <a:pPr marL="0" indent="0" algn="l">
               <a:buNone/>
             </a:pPr>
             <a:r>
@@ -9109,7 +9174,7 @@
           <a:bodyPr wrap="square" lIns="0" tIns="0" rIns="0" bIns="0" rtlCol="0" anchor="ctr"/>
           <a:lstStyle/>
           <a:p>
-            <a:pPr algn="ctr" indent="0" marL="0">
+            <a:pPr marL="0" indent="0" algn="ctr">
               <a:buNone/>
             </a:pPr>
             <a:r>
@@ -9145,7 +9210,7 @@
           <a:bodyPr wrap="square" lIns="0" tIns="0" rIns="0" bIns="0" rtlCol="0" anchor="ctr"/>
           <a:lstStyle/>
           <a:p>
-            <a:pPr algn="l" indent="0" marL="0">
+            <a:pPr marL="0" indent="0" algn="l">
               <a:buNone/>
             </a:pPr>
             <a:r>
@@ -9183,7 +9248,7 @@
           <a:bodyPr wrap="square" lIns="0" tIns="0" rIns="0" bIns="0" rtlCol="0" anchor="ctr"/>
           <a:lstStyle/>
           <a:p>
-            <a:pPr algn="ctr" indent="0" marL="0">
+            <a:pPr marL="0" indent="0" algn="ctr">
               <a:buNone/>
             </a:pPr>
             <a:r>
@@ -9219,7 +9284,7 @@
           <a:bodyPr wrap="square" lIns="0" tIns="0" rIns="0" bIns="0" rtlCol="0" anchor="ctr"/>
           <a:lstStyle/>
           <a:p>
-            <a:pPr algn="l" indent="0" marL="0">
+            <a:pPr marL="0" indent="0" algn="l">
               <a:buNone/>
             </a:pPr>
             <a:r>
@@ -9257,7 +9322,7 @@
           <a:bodyPr wrap="square" lIns="0" tIns="0" rIns="0" bIns="0" rtlCol="0" anchor="ctr"/>
           <a:lstStyle/>
           <a:p>
-            <a:pPr algn="ctr" indent="0" marL="0">
+            <a:pPr marL="0" indent="0" algn="ctr">
               <a:buNone/>
             </a:pPr>
             <a:r>
@@ -9293,7 +9358,7 @@
           <a:bodyPr wrap="square" lIns="0" tIns="0" rIns="0" bIns="0" rtlCol="0" anchor="ctr"/>
           <a:lstStyle/>
           <a:p>
-            <a:pPr algn="l" indent="0" marL="0">
+            <a:pPr marL="0" indent="0" algn="l">
               <a:buNone/>
             </a:pPr>
             <a:r>
@@ -9331,7 +9396,7 @@
           <a:bodyPr wrap="square" lIns="0" tIns="0" rIns="0" bIns="0" rtlCol="0" anchor="ctr"/>
           <a:lstStyle/>
           <a:p>
-            <a:pPr algn="ctr" indent="0" marL="0">
+            <a:pPr marL="0" indent="0" algn="ctr">
               <a:buNone/>
             </a:pPr>
             <a:r>
@@ -9367,7 +9432,7 @@
           <a:bodyPr wrap="square" lIns="0" tIns="0" rIns="0" bIns="0" rtlCol="0" anchor="ctr"/>
           <a:lstStyle/>
           <a:p>
-            <a:pPr algn="l" indent="0" marL="0">
+            <a:pPr marL="0" indent="0" algn="l">
               <a:buNone/>
             </a:pPr>
             <a:r>
@@ -9405,7 +9470,7 @@
           <a:bodyPr wrap="square" lIns="0" tIns="0" rIns="0" bIns="0" rtlCol="0" anchor="ctr"/>
           <a:lstStyle/>
           <a:p>
-            <a:pPr algn="ctr" indent="0" marL="0">
+            <a:pPr marL="0" indent="0" algn="ctr">
               <a:buNone/>
             </a:pPr>
             <a:r>
@@ -9441,7 +9506,7 @@
           <a:bodyPr wrap="square" lIns="0" tIns="0" rIns="0" bIns="0" rtlCol="0" anchor="ctr"/>
           <a:lstStyle/>
           <a:p>
-            <a:pPr algn="l" indent="0" marL="0">
+            <a:pPr marL="0" indent="0" algn="l">
               <a:buNone/>
             </a:pPr>
             <a:r>
@@ -9479,7 +9544,7 @@
           <a:bodyPr wrap="square" lIns="0" tIns="0" rIns="0" bIns="0" rtlCol="0" anchor="ctr"/>
           <a:lstStyle/>
           <a:p>
-            <a:pPr algn="ctr" indent="0" marL="0">
+            <a:pPr marL="0" indent="0" algn="ctr">
               <a:buNone/>
             </a:pPr>
             <a:r>
@@ -9515,7 +9580,7 @@
           <a:bodyPr wrap="square" lIns="0" tIns="0" rIns="0" bIns="0" rtlCol="0" anchor="ctr"/>
           <a:lstStyle/>
           <a:p>
-            <a:pPr algn="l" indent="0" marL="0">
+            <a:pPr marL="0" indent="0" algn="l">
               <a:buNone/>
             </a:pPr>
             <a:r>
@@ -9553,6 +9618,13 @@
           </a:solidFill>
           <a:ln/>
         </p:spPr>
+        <p:txBody>
+          <a:bodyPr/>
+          <a:lstStyle/>
+          <a:p>
+            <a:endParaRPr lang="en-IN"/>
+          </a:p>
+        </p:txBody>
       </p:sp>
       <p:sp>
         <p:nvSpPr>
@@ -9575,7 +9647,7 @@
           <a:bodyPr wrap="square" lIns="0" tIns="0" rIns="0" bIns="0" rtlCol="0" anchor="t"/>
           <a:lstStyle/>
           <a:p>
-            <a:pPr algn="l" indent="0" marL="0">
+            <a:pPr marL="0" indent="0" algn="l">
               <a:buNone/>
             </a:pPr>
             <a:r>
@@ -9611,7 +9683,7 @@
           <a:bodyPr wrap="square" lIns="0" tIns="0" rIns="0" bIns="0" rtlCol="0" anchor="t"/>
           <a:lstStyle/>
           <a:p>
-            <a:pPr algn="l" marL="342900" indent="-342900">
+            <a:pPr marL="342900" indent="-342900" algn="l">
               <a:spcAft>
                 <a:spcPts val="300"/>
               </a:spcAft>
@@ -9629,7 +9701,7 @@
             <a:endParaRPr lang="en-US" sz="1400" dirty="0"/>
           </a:p>
           <a:p>
-            <a:pPr algn="l" marL="342900" indent="-342900">
+            <a:pPr marL="342900" indent="-342900" algn="l">
               <a:spcAft>
                 <a:spcPts val="300"/>
               </a:spcAft>
@@ -9647,7 +9719,7 @@
             <a:endParaRPr lang="en-US" sz="1400" dirty="0"/>
           </a:p>
           <a:p>
-            <a:pPr algn="l" marL="342900" indent="-342900">
+            <a:pPr marL="342900" indent="-342900" algn="l">
               <a:spcAft>
                 <a:spcPts val="300"/>
               </a:spcAft>
@@ -9665,7 +9737,7 @@
             <a:endParaRPr lang="en-US" sz="1400" dirty="0"/>
           </a:p>
           <a:p>
-            <a:pPr algn="l" marL="342900" indent="-342900">
+            <a:pPr marL="342900" indent="-342900" algn="l">
               <a:spcAft>
                 <a:spcPts val="300"/>
               </a:spcAft>
@@ -9683,7 +9755,7 @@
             <a:endParaRPr lang="en-US" sz="1400" dirty="0"/>
           </a:p>
           <a:p>
-            <a:pPr algn="l" marL="342900" indent="-342900">
+            <a:pPr marL="342900" indent="-342900" algn="l">
               <a:spcAft>
                 <a:spcPts val="300"/>
               </a:spcAft>
@@ -9725,6 +9797,13 @@
           </a:solidFill>
           <a:ln/>
         </p:spPr>
+        <p:txBody>
+          <a:bodyPr/>
+          <a:lstStyle/>
+          <a:p>
+            <a:endParaRPr lang="en-IN"/>
+          </a:p>
+        </p:txBody>
       </p:sp>
       <p:sp>
         <p:nvSpPr>
@@ -9747,7 +9826,7 @@
           <a:bodyPr wrap="square" lIns="0" tIns="0" rIns="0" bIns="0" rtlCol="0" anchor="t"/>
           <a:lstStyle/>
           <a:p>
-            <a:pPr algn="l" indent="0" marL="0">
+            <a:pPr marL="0" indent="0" algn="l">
               <a:buNone/>
             </a:pPr>
             <a:r>
@@ -9783,7 +9862,7 @@
           <a:bodyPr wrap="square" lIns="0" tIns="0" rIns="0" bIns="0" rtlCol="0" anchor="t"/>
           <a:lstStyle/>
           <a:p>
-            <a:pPr algn="l" marL="342900" indent="-342900">
+            <a:pPr marL="342900" indent="-342900" algn="l">
               <a:spcAft>
                 <a:spcPts val="300"/>
               </a:spcAft>
@@ -9801,7 +9880,7 @@
             <a:endParaRPr lang="en-US" sz="1400" dirty="0"/>
           </a:p>
           <a:p>
-            <a:pPr algn="l" marL="342900" indent="-342900">
+            <a:pPr marL="342900" indent="-342900" algn="l">
               <a:spcAft>
                 <a:spcPts val="300"/>
               </a:spcAft>
@@ -9819,7 +9898,7 @@
             <a:endParaRPr lang="en-US" sz="1400" dirty="0"/>
           </a:p>
           <a:p>
-            <a:pPr algn="l" marL="342900" indent="-342900">
+            <a:pPr marL="342900" indent="-342900" algn="l">
               <a:spcAft>
                 <a:spcPts val="300"/>
               </a:spcAft>
@@ -9837,7 +9916,7 @@
             <a:endParaRPr lang="en-US" sz="1400" dirty="0"/>
           </a:p>
           <a:p>
-            <a:pPr algn="l" marL="342900" indent="-342900">
+            <a:pPr marL="342900" indent="-342900" algn="l">
               <a:spcAft>
                 <a:spcPts val="300"/>
               </a:spcAft>
@@ -9855,7 +9934,7 @@
             <a:endParaRPr lang="en-US" sz="1400" dirty="0"/>
           </a:p>
           <a:p>
-            <a:pPr algn="l" marL="342900" indent="-342900">
+            <a:pPr marL="342900" indent="-342900" algn="l">
               <a:spcAft>
                 <a:spcPts val="300"/>
               </a:spcAft>
@@ -9894,7 +9973,7 @@
           </a:prstGeom>
           <a:extLst>
             <a:ext uri="{C572A759-6A51-4108-AA02-DFA0A04FC94B}">
-              <ma14:wrappingTextBoxFlag xmlns:ma14="http://schemas.microsoft.com/office/mac/drawingml/2011/main" val="0"/>
+              <ma14:wrappingTextBoxFlag xmlns:ma14="http://schemas.microsoft.com/office/mac/drawingml/2011/main" xmlns="" val="0"/>
             </a:ext>
           </a:extLst>
         </p:spPr>
@@ -9912,7 +9991,7 @@
           <a:p>
             <a:pPr algn="r"/>
             <a:fld id="{F7021451-1387-4CA6-816F-3879F97B5CBC}" type="slidenum">
-              <a:rPr b="0" lang="en-US"/>
+              <a:rPr lang="en-US" b="0"/>
               <a:t>3</a:t>
             </a:fld>
             <a:endParaRPr lang="en-US"/>
@@ -9947,9 +10026,11 @@
       <p:sp>
         <p:nvSpPr>
           <p:cNvPr id="2" name="Text 0"/>
-          <p:cNvSpPr/>
+          <p:cNvSpPr>
+            <a:spLocks noGrp="1"/>
+          </p:cNvSpPr>
           <p:nvPr>
-            <p:ph idx="100" type="title" hasCustomPrompt="1"/>
+            <p:ph type="title" idx="100" hasCustomPrompt="1"/>
           </p:nvPr>
         </p:nvSpPr>
         <p:spPr>
@@ -9967,7 +10048,7 @@
           <a:bodyPr wrap="square" lIns="0" tIns="0" rIns="0" bIns="0" rtlCol="0" anchor="ctr"/>
           <a:lstStyle/>
           <a:p>
-            <a:pPr algn="l" indent="0" marL="0">
+            <a:pPr marL="0" indent="0" algn="l">
               <a:buNone/>
             </a:pPr>
             <a:r>
@@ -10003,6 +10084,13 @@
           </a:solidFill>
           <a:ln/>
         </p:spPr>
+        <p:txBody>
+          <a:bodyPr/>
+          <a:lstStyle/>
+          <a:p>
+            <a:endParaRPr lang="en-IN"/>
+          </a:p>
+        </p:txBody>
       </p:sp>
       <p:sp>
         <p:nvSpPr>
@@ -10027,7 +10115,7 @@
           <a:bodyPr wrap="square" lIns="0" tIns="0" rIns="0" bIns="0" rtlCol="0" anchor="ctr"/>
           <a:lstStyle/>
           <a:p>
-            <a:pPr algn="ctr" indent="0" marL="0">
+            <a:pPr marL="0" indent="0" algn="ctr">
               <a:buNone/>
             </a:pPr>
             <a:r>
@@ -10063,7 +10151,7 @@
           <a:bodyPr wrap="square" lIns="0" tIns="0" rIns="0" bIns="0" rtlCol="0" anchor="t"/>
           <a:lstStyle/>
           <a:p>
-            <a:pPr algn="l" indent="0" marL="0">
+            <a:pPr marL="0" indent="0" algn="l">
               <a:buNone/>
             </a:pPr>
             <a:r>
@@ -10099,7 +10187,7 @@
           <a:bodyPr wrap="square" lIns="0" tIns="0" rIns="0" bIns="0" rtlCol="0" anchor="t"/>
           <a:lstStyle/>
           <a:p>
-            <a:pPr algn="l" indent="0" marL="0">
+            <a:pPr marL="0" indent="0" algn="l">
               <a:buNone/>
             </a:pPr>
             <a:r>
@@ -10135,6 +10223,13 @@
           </a:solidFill>
           <a:ln/>
         </p:spPr>
+        <p:txBody>
+          <a:bodyPr/>
+          <a:lstStyle/>
+          <a:p>
+            <a:endParaRPr lang="en-IN"/>
+          </a:p>
+        </p:txBody>
       </p:sp>
       <p:sp>
         <p:nvSpPr>
@@ -10159,7 +10254,7 @@
           <a:bodyPr wrap="square" lIns="0" tIns="0" rIns="0" bIns="0" rtlCol="0" anchor="ctr"/>
           <a:lstStyle/>
           <a:p>
-            <a:pPr algn="ctr" indent="0" marL="0">
+            <a:pPr marL="0" indent="0" algn="ctr">
               <a:buNone/>
             </a:pPr>
             <a:r>
@@ -10195,7 +10290,7 @@
           <a:bodyPr wrap="square" lIns="0" tIns="0" rIns="0" bIns="0" rtlCol="0" anchor="t"/>
           <a:lstStyle/>
           <a:p>
-            <a:pPr algn="l" indent="0" marL="0">
+            <a:pPr marL="0" indent="0" algn="l">
               <a:buNone/>
             </a:pPr>
             <a:r>
@@ -10231,7 +10326,7 @@
           <a:bodyPr wrap="square" lIns="0" tIns="0" rIns="0" bIns="0" rtlCol="0" anchor="t"/>
           <a:lstStyle/>
           <a:p>
-            <a:pPr algn="l" indent="0" marL="0">
+            <a:pPr marL="0" indent="0" algn="l">
               <a:buNone/>
             </a:pPr>
             <a:r>
@@ -10267,6 +10362,13 @@
           </a:solidFill>
           <a:ln/>
         </p:spPr>
+        <p:txBody>
+          <a:bodyPr/>
+          <a:lstStyle/>
+          <a:p>
+            <a:endParaRPr lang="en-IN"/>
+          </a:p>
+        </p:txBody>
       </p:sp>
       <p:sp>
         <p:nvSpPr>
@@ -10291,7 +10393,7 @@
           <a:bodyPr wrap="square" lIns="0" tIns="0" rIns="0" bIns="0" rtlCol="0" anchor="ctr"/>
           <a:lstStyle/>
           <a:p>
-            <a:pPr algn="ctr" indent="0" marL="0">
+            <a:pPr marL="0" indent="0" algn="ctr">
               <a:buNone/>
             </a:pPr>
             <a:r>
@@ -10327,7 +10429,7 @@
           <a:bodyPr wrap="square" lIns="0" tIns="0" rIns="0" bIns="0" rtlCol="0" anchor="t"/>
           <a:lstStyle/>
           <a:p>
-            <a:pPr algn="l" indent="0" marL="0">
+            <a:pPr marL="0" indent="0" algn="l">
               <a:buNone/>
             </a:pPr>
             <a:r>
@@ -10363,7 +10465,7 @@
           <a:bodyPr wrap="square" lIns="0" tIns="0" rIns="0" bIns="0" rtlCol="0" anchor="t"/>
           <a:lstStyle/>
           <a:p>
-            <a:pPr algn="l" indent="0" marL="0">
+            <a:pPr marL="0" indent="0" algn="l">
               <a:buNone/>
             </a:pPr>
             <a:r>
@@ -10399,6 +10501,13 @@
           </a:solidFill>
           <a:ln/>
         </p:spPr>
+        <p:txBody>
+          <a:bodyPr/>
+          <a:lstStyle/>
+          <a:p>
+            <a:endParaRPr lang="en-IN"/>
+          </a:p>
+        </p:txBody>
       </p:sp>
       <p:sp>
         <p:nvSpPr>
@@ -10423,7 +10532,7 @@
           <a:bodyPr wrap="square" lIns="0" tIns="0" rIns="0" bIns="0" rtlCol="0" anchor="ctr"/>
           <a:lstStyle/>
           <a:p>
-            <a:pPr algn="ctr" indent="0" marL="0">
+            <a:pPr marL="0" indent="0" algn="ctr">
               <a:buNone/>
             </a:pPr>
             <a:r>
@@ -10459,7 +10568,7 @@
           <a:bodyPr wrap="square" lIns="0" tIns="0" rIns="0" bIns="0" rtlCol="0" anchor="t"/>
           <a:lstStyle/>
           <a:p>
-            <a:pPr algn="l" indent="0" marL="0">
+            <a:pPr marL="0" indent="0" algn="l">
               <a:buNone/>
             </a:pPr>
             <a:r>
@@ -10495,7 +10604,7 @@
           <a:bodyPr wrap="square" lIns="0" tIns="0" rIns="0" bIns="0" rtlCol="0" anchor="t"/>
           <a:lstStyle/>
           <a:p>
-            <a:pPr algn="l" indent="0" marL="0">
+            <a:pPr marL="0" indent="0" algn="l">
               <a:buNone/>
             </a:pPr>
             <a:r>
@@ -10533,6 +10642,13 @@
           </a:solidFill>
           <a:ln/>
         </p:spPr>
+        <p:txBody>
+          <a:bodyPr/>
+          <a:lstStyle/>
+          <a:p>
+            <a:endParaRPr lang="en-IN"/>
+          </a:p>
+        </p:txBody>
       </p:sp>
       <p:sp>
         <p:nvSpPr>
@@ -10555,7 +10671,7 @@
           <a:bodyPr wrap="square" lIns="0" tIns="0" rIns="0" bIns="0" rtlCol="0" anchor="t"/>
           <a:lstStyle/>
           <a:p>
-            <a:pPr algn="l" indent="0" marL="0">
+            <a:pPr marL="0" indent="0" algn="l">
               <a:buNone/>
             </a:pPr>
             <a:r>
@@ -10591,7 +10707,7 @@
           <a:bodyPr wrap="square" lIns="0" tIns="0" rIns="0" bIns="0" rtlCol="0" anchor="t"/>
           <a:lstStyle/>
           <a:p>
-            <a:pPr algn="l" marL="342900" indent="-342900">
+            <a:pPr marL="342900" indent="-342900" algn="l">
               <a:spcAft>
                 <a:spcPts val="600"/>
               </a:spcAft>
@@ -10609,7 +10725,7 @@
             <a:endParaRPr lang="en-US" sz="1500" dirty="0"/>
           </a:p>
           <a:p>
-            <a:pPr algn="l" marL="342900" indent="-342900">
+            <a:pPr marL="342900" indent="-342900" algn="l">
               <a:spcAft>
                 <a:spcPts val="600"/>
               </a:spcAft>
@@ -10627,7 +10743,7 @@
             <a:endParaRPr lang="en-US" sz="1500" dirty="0"/>
           </a:p>
           <a:p>
-            <a:pPr algn="l" marL="342900" indent="-342900">
+            <a:pPr marL="342900" indent="-342900" algn="l">
               <a:spcAft>
                 <a:spcPts val="600"/>
               </a:spcAft>
@@ -10669,6 +10785,13 @@
           </a:solidFill>
           <a:ln/>
         </p:spPr>
+        <p:txBody>
+          <a:bodyPr/>
+          <a:lstStyle/>
+          <a:p>
+            <a:endParaRPr lang="en-IN"/>
+          </a:p>
+        </p:txBody>
       </p:sp>
       <p:sp>
         <p:nvSpPr>
@@ -10691,7 +10814,7 @@
           <a:bodyPr wrap="square" lIns="0" tIns="0" rIns="0" bIns="0" rtlCol="0" anchor="t"/>
           <a:lstStyle/>
           <a:p>
-            <a:pPr algn="l" indent="0" marL="0">
+            <a:pPr marL="0" indent="0" algn="l">
               <a:buNone/>
             </a:pPr>
             <a:r>
@@ -10727,7 +10850,7 @@
           <a:bodyPr wrap="square" lIns="0" tIns="0" rIns="0" bIns="0" rtlCol="0" anchor="t"/>
           <a:lstStyle/>
           <a:p>
-            <a:pPr algn="l" marL="342900" indent="-342900">
+            <a:pPr marL="342900" indent="-342900" algn="l">
               <a:spcAft>
                 <a:spcPts val="600"/>
               </a:spcAft>
@@ -10745,7 +10868,7 @@
             <a:endParaRPr lang="en-US" sz="1500" dirty="0"/>
           </a:p>
           <a:p>
-            <a:pPr algn="l" marL="342900" indent="-342900">
+            <a:pPr marL="342900" indent="-342900" algn="l">
               <a:spcAft>
                 <a:spcPts val="600"/>
               </a:spcAft>
@@ -10763,7 +10886,7 @@
             <a:endParaRPr lang="en-US" sz="1500" dirty="0"/>
           </a:p>
           <a:p>
-            <a:pPr algn="l" marL="342900" indent="-342900">
+            <a:pPr marL="342900" indent="-342900" algn="l">
               <a:spcAft>
                 <a:spcPts val="600"/>
               </a:spcAft>
@@ -10802,7 +10925,7 @@
           </a:prstGeom>
           <a:extLst>
             <a:ext uri="{C572A759-6A51-4108-AA02-DFA0A04FC94B}">
-              <ma14:wrappingTextBoxFlag xmlns:ma14="http://schemas.microsoft.com/office/mac/drawingml/2011/main" val="0"/>
+              <ma14:wrappingTextBoxFlag xmlns:ma14="http://schemas.microsoft.com/office/mac/drawingml/2011/main" xmlns="" val="0"/>
             </a:ext>
           </a:extLst>
         </p:spPr>
@@ -10820,7 +10943,7 @@
           <a:p>
             <a:pPr algn="r"/>
             <a:fld id="{F7021451-1387-4CA6-816F-3879F97B5CBC}" type="slidenum">
-              <a:rPr b="0" lang="en-US"/>
+              <a:rPr lang="en-US" b="0"/>
               <a:t>4</a:t>
             </a:fld>
             <a:endParaRPr lang="en-US"/>
@@ -10855,9 +10978,11 @@
       <p:sp>
         <p:nvSpPr>
           <p:cNvPr id="2" name="Text 0"/>
-          <p:cNvSpPr/>
+          <p:cNvSpPr>
+            <a:spLocks noGrp="1"/>
+          </p:cNvSpPr>
           <p:nvPr>
-            <p:ph idx="100" type="title" hasCustomPrompt="1"/>
+            <p:ph type="title" idx="100" hasCustomPrompt="1"/>
           </p:nvPr>
         </p:nvSpPr>
         <p:spPr>
@@ -10875,7 +11000,7 @@
           <a:bodyPr wrap="square" lIns="0" tIns="0" rIns="0" bIns="0" rtlCol="0" anchor="ctr"/>
           <a:lstStyle/>
           <a:p>
-            <a:pPr algn="l" indent="0" marL="0">
+            <a:pPr marL="0" indent="0" algn="l">
               <a:buNone/>
             </a:pPr>
             <a:r>
@@ -10916,6 +11041,13 @@
             <a:prstDash val="solid"/>
           </a:ln>
         </p:spPr>
+        <p:txBody>
+          <a:bodyPr/>
+          <a:lstStyle/>
+          <a:p>
+            <a:endParaRPr lang="en-IN"/>
+          </a:p>
+        </p:txBody>
       </p:sp>
       <p:sp>
         <p:nvSpPr>
@@ -10938,7 +11070,7 @@
           <a:bodyPr wrap="square" lIns="0" tIns="0" rIns="0" bIns="0" rtlCol="0" anchor="ctr"/>
           <a:lstStyle/>
           <a:p>
-            <a:pPr algn="ctr" indent="0" marL="0">
+            <a:pPr marL="0" indent="0" algn="ctr">
               <a:buNone/>
             </a:pPr>
             <a:r>
@@ -10952,7 +11084,7 @@
             <a:endParaRPr lang="en-US" sz="1400" dirty="0"/>
           </a:p>
           <a:p>
-            <a:pPr algn="ctr" indent="0" marL="0">
+            <a:pPr marL="0" indent="0" algn="ctr">
               <a:buNone/>
             </a:pPr>
             <a:r>
@@ -10993,6 +11125,13 @@
             <a:prstDash val="solid"/>
           </a:ln>
         </p:spPr>
+        <p:txBody>
+          <a:bodyPr/>
+          <a:lstStyle/>
+          <a:p>
+            <a:endParaRPr lang="en-IN"/>
+          </a:p>
+        </p:txBody>
       </p:sp>
       <p:sp>
         <p:nvSpPr>
@@ -11015,7 +11154,7 @@
           <a:bodyPr wrap="square" lIns="0" tIns="0" rIns="0" bIns="0" rtlCol="0" anchor="t"/>
           <a:lstStyle/>
           <a:p>
-            <a:pPr algn="l" indent="0" marL="0">
+            <a:pPr marL="0" indent="0" algn="l">
               <a:buNone/>
             </a:pPr>
             <a:r>
@@ -11029,7 +11168,7 @@
             <a:endParaRPr lang="en-US" sz="1400" dirty="0"/>
           </a:p>
           <a:p>
-            <a:pPr algn="l" indent="0" marL="0">
+            <a:pPr marL="0" indent="0" algn="l">
               <a:buNone/>
             </a:pPr>
             <a:r>
@@ -11043,7 +11182,7 @@
             <a:endParaRPr lang="en-US" sz="1400" dirty="0"/>
           </a:p>
           <a:p>
-            <a:pPr algn="l" indent="0" marL="0">
+            <a:pPr marL="0" indent="0" algn="l">
               <a:buNone/>
             </a:pPr>
             <a:r>
@@ -11057,7 +11196,7 @@
             <a:endParaRPr lang="en-US" sz="1400" dirty="0"/>
           </a:p>
           <a:p>
-            <a:pPr algn="l" marL="342900" indent="-342900">
+            <a:pPr marL="342900" indent="-342900" algn="l">
               <a:buSzPct val="100000"/>
               <a:buChar char="•"/>
             </a:pPr>
@@ -11072,7 +11211,7 @@
             <a:endParaRPr lang="en-US" sz="1400" dirty="0"/>
           </a:p>
           <a:p>
-            <a:pPr algn="l" marL="342900" indent="-342900">
+            <a:pPr marL="342900" indent="-342900" algn="l">
               <a:buSzPct val="100000"/>
               <a:buChar char="•"/>
             </a:pPr>
@@ -11087,7 +11226,7 @@
             <a:endParaRPr lang="en-US" sz="1400" dirty="0"/>
           </a:p>
           <a:p>
-            <a:pPr algn="l" marL="342900" indent="-342900">
+            <a:pPr marL="342900" indent="-342900" algn="l">
               <a:buSzPct val="100000"/>
               <a:buChar char="•"/>
             </a:pPr>
@@ -11102,7 +11241,7 @@
             <a:endParaRPr lang="en-US" sz="1400" dirty="0"/>
           </a:p>
           <a:p>
-            <a:pPr algn="l" marL="342900" indent="-342900">
+            <a:pPr marL="342900" indent="-342900" algn="l">
               <a:buSzPct val="100000"/>
               <a:buChar char="•"/>
             </a:pPr>
@@ -11144,6 +11283,13 @@
             <a:prstDash val="dash"/>
           </a:ln>
         </p:spPr>
+        <p:txBody>
+          <a:bodyPr/>
+          <a:lstStyle/>
+          <a:p>
+            <a:endParaRPr lang="en-IN"/>
+          </a:p>
+        </p:txBody>
       </p:sp>
       <p:sp>
         <p:nvSpPr>
@@ -11166,7 +11312,7 @@
           <a:bodyPr wrap="square" lIns="0" tIns="0" rIns="0" bIns="0" rtlCol="0" anchor="ctr"/>
           <a:lstStyle/>
           <a:p>
-            <a:pPr algn="ctr" indent="0" marL="0">
+            <a:pPr marL="0" indent="0" algn="ctr">
               <a:buNone/>
             </a:pPr>
             <a:r>
@@ -11183,7 +11329,7 @@
             <a:endParaRPr lang="en-US" sz="1400" dirty="0"/>
           </a:p>
           <a:p>
-            <a:pPr algn="ctr" indent="0" marL="0">
+            <a:pPr marL="0" indent="0" algn="ctr">
               <a:buNone/>
             </a:pPr>
             <a:r>
@@ -11219,7 +11365,7 @@
           <a:bodyPr wrap="square" lIns="0" tIns="0" rIns="0" bIns="0" rtlCol="0" anchor="t"/>
           <a:lstStyle/>
           <a:p>
-            <a:pPr algn="l" indent="0" marL="0">
+            <a:pPr marL="0" indent="0" algn="l">
               <a:buNone/>
             </a:pPr>
             <a:r>
@@ -11255,7 +11401,7 @@
           <a:bodyPr wrap="square" lIns="0" tIns="0" rIns="0" bIns="0" rtlCol="0" anchor="t"/>
           <a:lstStyle/>
           <a:p>
-            <a:pPr algn="l" indent="0" marL="0">
+            <a:pPr marL="0" indent="0" algn="l">
               <a:buNone/>
             </a:pPr>
             <a:r>
@@ -11298,6 +11444,13 @@
             <a:prstDash val="solid"/>
           </a:ln>
         </p:spPr>
+        <p:txBody>
+          <a:bodyPr/>
+          <a:lstStyle/>
+          <a:p>
+            <a:endParaRPr lang="en-IN"/>
+          </a:p>
+        </p:txBody>
       </p:sp>
       <p:sp>
         <p:nvSpPr>
@@ -11320,7 +11473,7 @@
           <a:bodyPr wrap="square" lIns="0" tIns="0" rIns="0" bIns="0" rtlCol="0" anchor="ctr"/>
           <a:lstStyle/>
           <a:p>
-            <a:pPr algn="ctr" indent="0" marL="0">
+            <a:pPr marL="0" indent="0" algn="ctr">
               <a:buNone/>
             </a:pPr>
             <a:r>
@@ -11334,7 +11487,7 @@
             <a:endParaRPr lang="en-US" sz="1400" dirty="0"/>
           </a:p>
           <a:p>
-            <a:pPr algn="ctr" indent="0" marL="0">
+            <a:pPr marL="0" indent="0" algn="ctr">
               <a:buNone/>
             </a:pPr>
             <a:r>
@@ -11377,6 +11530,13 @@
             <a:prstDash val="solid"/>
           </a:ln>
         </p:spPr>
+        <p:txBody>
+          <a:bodyPr/>
+          <a:lstStyle/>
+          <a:p>
+            <a:endParaRPr lang="en-IN"/>
+          </a:p>
+        </p:txBody>
       </p:sp>
       <p:sp>
         <p:nvSpPr>
@@ -11399,7 +11559,7 @@
           <a:bodyPr wrap="square" lIns="0" tIns="0" rIns="0" bIns="0" rtlCol="0" anchor="ctr"/>
           <a:lstStyle/>
           <a:p>
-            <a:pPr algn="ctr" indent="0" marL="0">
+            <a:pPr marL="0" indent="0" algn="ctr">
               <a:buNone/>
             </a:pPr>
             <a:r>
@@ -11413,7 +11573,7 @@
             <a:endParaRPr lang="en-US" sz="1400" dirty="0"/>
           </a:p>
           <a:p>
-            <a:pPr algn="ctr" indent="0" marL="0">
+            <a:pPr marL="0" indent="0" algn="ctr">
               <a:buNone/>
             </a:pPr>
             <a:r>
@@ -11456,6 +11616,13 @@
             <a:prstDash val="solid"/>
           </a:ln>
         </p:spPr>
+        <p:txBody>
+          <a:bodyPr/>
+          <a:lstStyle/>
+          <a:p>
+            <a:endParaRPr lang="en-IN"/>
+          </a:p>
+        </p:txBody>
       </p:sp>
       <p:sp>
         <p:nvSpPr>
@@ -11478,7 +11645,7 @@
           <a:bodyPr wrap="square" lIns="0" tIns="0" rIns="0" bIns="0" rtlCol="0" anchor="ctr"/>
           <a:lstStyle/>
           <a:p>
-            <a:pPr algn="ctr" indent="0" marL="0">
+            <a:pPr marL="0" indent="0" algn="ctr">
               <a:buNone/>
             </a:pPr>
             <a:r>
@@ -11492,7 +11659,7 @@
             <a:endParaRPr lang="en-US" sz="1400" dirty="0"/>
           </a:p>
           <a:p>
-            <a:pPr algn="ctr" indent="0" marL="0">
+            <a:pPr marL="0" indent="0" algn="ctr">
               <a:buNone/>
             </a:pPr>
             <a:r>
@@ -11528,7 +11695,7 @@
           <a:bodyPr wrap="square" lIns="0" tIns="0" rIns="0" bIns="0" rtlCol="0" anchor="t"/>
           <a:lstStyle/>
           <a:p>
-            <a:pPr algn="ctr" indent="0" marL="0">
+            <a:pPr marL="0" indent="0" algn="ctr">
               <a:buNone/>
             </a:pPr>
             <a:r>
@@ -11569,6 +11736,13 @@
             <a:prstDash val="solid"/>
           </a:ln>
         </p:spPr>
+        <p:txBody>
+          <a:bodyPr/>
+          <a:lstStyle/>
+          <a:p>
+            <a:endParaRPr lang="en-IN"/>
+          </a:p>
+        </p:txBody>
       </p:sp>
       <p:sp>
         <p:nvSpPr>
@@ -11591,7 +11765,7 @@
           <a:bodyPr wrap="square" lIns="0" tIns="0" rIns="0" bIns="0" rtlCol="0" anchor="t"/>
           <a:lstStyle/>
           <a:p>
-            <a:pPr algn="ctr" indent="0" marL="0">
+            <a:pPr marL="0" indent="0" algn="ctr">
               <a:buNone/>
             </a:pPr>
             <a:r>
@@ -11605,7 +11779,7 @@
             <a:endParaRPr lang="en-US" sz="1400" dirty="0"/>
           </a:p>
           <a:p>
-            <a:pPr algn="ctr" indent="0" marL="0">
+            <a:pPr marL="0" indent="0" algn="ctr">
               <a:buNone/>
             </a:pPr>
             <a:r>
@@ -11641,6 +11815,13 @@
           </a:solidFill>
           <a:ln/>
         </p:spPr>
+        <p:txBody>
+          <a:bodyPr/>
+          <a:lstStyle/>
+          <a:p>
+            <a:endParaRPr lang="en-IN"/>
+          </a:p>
+        </p:txBody>
       </p:sp>
       <p:sp>
         <p:nvSpPr>
@@ -11663,7 +11844,7 @@
           <a:bodyPr wrap="square" lIns="0" tIns="0" rIns="0" bIns="0" rtlCol="0" anchor="ctr"/>
           <a:lstStyle/>
           <a:p>
-            <a:pPr algn="ctr" indent="0" marL="0">
+            <a:pPr marL="0" indent="0" algn="ctr">
               <a:buNone/>
             </a:pPr>
             <a:r>
@@ -11677,7 +11858,7 @@
             <a:endParaRPr lang="en-US" sz="1400" dirty="0"/>
           </a:p>
           <a:p>
-            <a:pPr algn="ctr" indent="0" marL="0">
+            <a:pPr marL="0" indent="0" algn="ctr">
               <a:buNone/>
             </a:pPr>
             <a:r>
@@ -11691,7 +11872,7 @@
             <a:endParaRPr lang="en-US" sz="1400" dirty="0"/>
           </a:p>
           <a:p>
-            <a:pPr algn="ctr" indent="0" marL="0">
+            <a:pPr marL="0" indent="0" algn="ctr">
               <a:buNone/>
             </a:pPr>
             <a:r>
@@ -11730,7 +11911,7 @@
           <a:bodyPr wrap="square" lIns="0" tIns="0" rIns="0" bIns="0" rtlCol="0" anchor="t"/>
           <a:lstStyle/>
           <a:p>
-            <a:pPr algn="ctr" indent="0" marL="0">
+            <a:pPr marL="0" indent="0" algn="ctr">
               <a:buNone/>
             </a:pPr>
             <a:r>
@@ -11768,6 +11949,13 @@
             <a:tailEnd type="triangle"/>
           </a:ln>
         </p:spPr>
+        <p:txBody>
+          <a:bodyPr/>
+          <a:lstStyle/>
+          <a:p>
+            <a:endParaRPr lang="en-IN"/>
+          </a:p>
+        </p:txBody>
       </p:sp>
       <p:sp>
         <p:nvSpPr>
@@ -11792,6 +11980,13 @@
             <a:tailEnd type="triangle"/>
           </a:ln>
         </p:spPr>
+        <p:txBody>
+          <a:bodyPr/>
+          <a:lstStyle/>
+          <a:p>
+            <a:endParaRPr lang="en-IN"/>
+          </a:p>
+        </p:txBody>
       </p:sp>
       <p:sp>
         <p:nvSpPr>
@@ -11816,6 +12011,13 @@
             <a:tailEnd type="triangle"/>
           </a:ln>
         </p:spPr>
+        <p:txBody>
+          <a:bodyPr/>
+          <a:lstStyle/>
+          <a:p>
+            <a:endParaRPr lang="en-IN"/>
+          </a:p>
+        </p:txBody>
       </p:sp>
       <p:sp>
         <p:nvSpPr>
@@ -11840,6 +12042,13 @@
             <a:tailEnd type="triangle"/>
           </a:ln>
         </p:spPr>
+        <p:txBody>
+          <a:bodyPr/>
+          <a:lstStyle/>
+          <a:p>
+            <a:endParaRPr lang="en-IN"/>
+          </a:p>
+        </p:txBody>
       </p:sp>
       <p:sp>
         <p:nvSpPr>
@@ -11864,6 +12073,13 @@
             <a:tailEnd type="triangle"/>
           </a:ln>
         </p:spPr>
+        <p:txBody>
+          <a:bodyPr/>
+          <a:lstStyle/>
+          <a:p>
+            <a:endParaRPr lang="en-IN"/>
+          </a:p>
+        </p:txBody>
       </p:sp>
       <p:sp>
         <p:nvSpPr>
@@ -11888,6 +12104,13 @@
             <a:tailEnd type="triangle"/>
           </a:ln>
         </p:spPr>
+        <p:txBody>
+          <a:bodyPr/>
+          <a:lstStyle/>
+          <a:p>
+            <a:endParaRPr lang="en-IN"/>
+          </a:p>
+        </p:txBody>
       </p:sp>
       <p:sp>
         <p:nvSpPr>
@@ -11910,7 +12133,7 @@
           <a:bodyPr wrap="square" lIns="0" tIns="0" rIns="0" bIns="0" rtlCol="0" anchor="t"/>
           <a:lstStyle/>
           <a:p>
-            <a:pPr algn="l" indent="0" marL="0">
+            <a:pPr marL="0" indent="0" algn="l">
               <a:buNone/>
             </a:pPr>
             <a:r>
@@ -11951,6 +12174,13 @@
             <a:prstDash val="dash"/>
           </a:ln>
         </p:spPr>
+        <p:txBody>
+          <a:bodyPr/>
+          <a:lstStyle/>
+          <a:p>
+            <a:endParaRPr lang="en-IN"/>
+          </a:p>
+        </p:txBody>
       </p:sp>
       <p:sp>
         <p:nvSpPr>
@@ -11973,7 +12203,7 @@
           <a:bodyPr wrap="square" lIns="0" tIns="0" rIns="0" bIns="0" rtlCol="0" anchor="ctr"/>
           <a:lstStyle/>
           <a:p>
-            <a:pPr algn="ctr" indent="0" marL="0">
+            <a:pPr marL="0" indent="0" algn="ctr">
               <a:buNone/>
             </a:pPr>
             <a:r>
@@ -11990,7 +12220,7 @@
             <a:endParaRPr lang="en-US" sz="1400" dirty="0"/>
           </a:p>
           <a:p>
-            <a:pPr algn="ctr" indent="0" marL="0">
+            <a:pPr marL="0" indent="0" algn="ctr">
               <a:buNone/>
             </a:pPr>
             <a:r>
@@ -12028,6 +12258,13 @@
             <a:tailEnd type="triangle"/>
           </a:ln>
         </p:spPr>
+        <p:txBody>
+          <a:bodyPr/>
+          <a:lstStyle/>
+          <a:p>
+            <a:endParaRPr lang="en-IN"/>
+          </a:p>
+        </p:txBody>
       </p:sp>
       <p:sp>
         <p:nvSpPr>
@@ -12055,6 +12292,13 @@
             <a:prstDash val="dash"/>
           </a:ln>
         </p:spPr>
+        <p:txBody>
+          <a:bodyPr/>
+          <a:lstStyle/>
+          <a:p>
+            <a:endParaRPr lang="en-IN"/>
+          </a:p>
+        </p:txBody>
       </p:sp>
       <p:sp>
         <p:nvSpPr>
@@ -12077,7 +12321,7 @@
           <a:bodyPr wrap="square" lIns="0" tIns="0" rIns="0" bIns="0" rtlCol="0" anchor="ctr"/>
           <a:lstStyle/>
           <a:p>
-            <a:pPr algn="ctr" indent="0" marL="0">
+            <a:pPr marL="0" indent="0" algn="ctr">
               <a:buNone/>
             </a:pPr>
             <a:r>
@@ -12089,12 +12333,31 @@
                 <a:ea typeface="Consolas" pitchFamily="34" charset="-122"/>
                 <a:cs typeface="Consolas" pitchFamily="34" charset="-120"/>
               </a:rPr>
-              <a:t>npx hardhat build</a:t>
+              <a:t>npx </a:t>
+            </a:r>
+            <a:r>
+              <a:rPr lang="en-US" sz="1100" b="1">
+                <a:solidFill>
+                  <a:schemeClr val="tx1"/>
+                </a:solidFill>
+                <a:latin typeface="Consolas" pitchFamily="34" charset="0"/>
+                <a:ea typeface="Consolas" pitchFamily="34" charset="-122"/>
+                <a:cs typeface="Consolas" pitchFamily="34" charset="-120"/>
+              </a:rPr>
+              <a:t>hardhat </a:t>
+            </a:r>
+            <a:r>
+              <a:rPr lang="en-US" sz="1100" b="1">
+                <a:latin typeface="Consolas" pitchFamily="34" charset="0"/>
+                <a:ea typeface="Consolas" pitchFamily="34" charset="-122"/>
+                <a:cs typeface="Consolas" pitchFamily="34" charset="-120"/>
+              </a:rPr>
+              <a:t>compile</a:t>
             </a:r>
             <a:endParaRPr lang="en-US" sz="1400" dirty="0"/>
           </a:p>
           <a:p>
-            <a:pPr algn="ctr" indent="0" marL="0">
+            <a:pPr marL="0" indent="0" algn="ctr">
               <a:buNone/>
             </a:pPr>
             <a:r>
@@ -12132,6 +12395,13 @@
             <a:tailEnd type="triangle"/>
           </a:ln>
         </p:spPr>
+        <p:txBody>
+          <a:bodyPr/>
+          <a:lstStyle/>
+          <a:p>
+            <a:endParaRPr lang="en-IN"/>
+          </a:p>
+        </p:txBody>
       </p:sp>
       <p:sp>
         <p:nvSpPr>
@@ -12159,6 +12429,13 @@
             <a:prstDash val="dash"/>
           </a:ln>
         </p:spPr>
+        <p:txBody>
+          <a:bodyPr/>
+          <a:lstStyle/>
+          <a:p>
+            <a:endParaRPr lang="en-IN"/>
+          </a:p>
+        </p:txBody>
       </p:sp>
       <p:sp>
         <p:nvSpPr>
@@ -12181,7 +12458,7 @@
           <a:bodyPr wrap="square" lIns="0" tIns="0" rIns="0" bIns="0" rtlCol="0" anchor="ctr"/>
           <a:lstStyle/>
           <a:p>
-            <a:pPr algn="ctr" indent="0" marL="0">
+            <a:pPr marL="0" indent="0" algn="ctr">
               <a:buNone/>
             </a:pPr>
             <a:r>
@@ -12198,7 +12475,7 @@
             <a:endParaRPr lang="en-US" sz="1400" dirty="0"/>
           </a:p>
           <a:p>
-            <a:pPr algn="ctr" indent="0" marL="0">
+            <a:pPr marL="0" indent="0" algn="ctr">
               <a:buNone/>
             </a:pPr>
             <a:r>
@@ -12236,6 +12513,13 @@
             <a:tailEnd type="triangle"/>
           </a:ln>
         </p:spPr>
+        <p:txBody>
+          <a:bodyPr/>
+          <a:lstStyle/>
+          <a:p>
+            <a:endParaRPr lang="en-IN"/>
+          </a:p>
+        </p:txBody>
       </p:sp>
       <p:sp>
         <p:nvSpPr>
@@ -12263,6 +12547,13 @@
             <a:prstDash val="dash"/>
           </a:ln>
         </p:spPr>
+        <p:txBody>
+          <a:bodyPr/>
+          <a:lstStyle/>
+          <a:p>
+            <a:endParaRPr lang="en-IN"/>
+          </a:p>
+        </p:txBody>
       </p:sp>
       <p:sp>
         <p:nvSpPr>
@@ -12285,7 +12576,7 @@
           <a:bodyPr wrap="square" lIns="0" tIns="0" rIns="0" bIns="0" rtlCol="0" anchor="ctr"/>
           <a:lstStyle/>
           <a:p>
-            <a:pPr algn="ctr" indent="0" marL="0">
+            <a:pPr marL="0" indent="0" algn="ctr">
               <a:buNone/>
             </a:pPr>
             <a:r>
@@ -12302,7 +12593,7 @@
             <a:endParaRPr lang="en-US" sz="1400" dirty="0"/>
           </a:p>
           <a:p>
-            <a:pPr algn="ctr" indent="0" marL="0">
+            <a:pPr marL="0" indent="0" algn="ctr">
               <a:buNone/>
             </a:pPr>
             <a:r>
@@ -12319,7 +12610,7 @@
             <a:endParaRPr lang="en-US" sz="1400" dirty="0"/>
           </a:p>
           <a:p>
-            <a:pPr algn="ctr" indent="0" marL="0">
+            <a:pPr marL="0" indent="0" algn="ctr">
               <a:buNone/>
             </a:pPr>
             <a:r>
@@ -12357,6 +12648,13 @@
             <a:tailEnd type="triangle"/>
           </a:ln>
         </p:spPr>
+        <p:txBody>
+          <a:bodyPr/>
+          <a:lstStyle/>
+          <a:p>
+            <a:endParaRPr lang="en-IN"/>
+          </a:p>
+        </p:txBody>
       </p:sp>
       <p:sp>
         <p:nvSpPr>
@@ -12384,6 +12682,13 @@
             <a:prstDash val="dash"/>
           </a:ln>
         </p:spPr>
+        <p:txBody>
+          <a:bodyPr/>
+          <a:lstStyle/>
+          <a:p>
+            <a:endParaRPr lang="en-IN"/>
+          </a:p>
+        </p:txBody>
       </p:sp>
       <p:sp>
         <p:nvSpPr>
@@ -12406,7 +12711,7 @@
           <a:bodyPr wrap="square" lIns="0" tIns="0" rIns="0" bIns="0" rtlCol="0" anchor="ctr"/>
           <a:lstStyle/>
           <a:p>
-            <a:pPr algn="ctr" indent="0" marL="0">
+            <a:pPr marL="0" indent="0" algn="ctr">
               <a:buNone/>
             </a:pPr>
             <a:r>
@@ -12423,7 +12728,7 @@
             <a:endParaRPr lang="en-US" sz="1400" dirty="0"/>
           </a:p>
           <a:p>
-            <a:pPr algn="ctr" indent="0" marL="0">
+            <a:pPr marL="0" indent="0" algn="ctr">
               <a:buNone/>
             </a:pPr>
             <a:r>
@@ -12440,7 +12745,7 @@
             <a:endParaRPr lang="en-US" sz="1400" dirty="0"/>
           </a:p>
           <a:p>
-            <a:pPr algn="ctr" indent="0" marL="0">
+            <a:pPr marL="0" indent="0" algn="ctr">
               <a:buNone/>
             </a:pPr>
             <a:r>
@@ -12476,7 +12781,7 @@
           <a:bodyPr wrap="square" lIns="0" tIns="0" rIns="0" bIns="0" rtlCol="0" anchor="t"/>
           <a:lstStyle/>
           <a:p>
-            <a:pPr algn="l" indent="0" marL="0">
+            <a:pPr marL="0" indent="0" algn="l">
               <a:buNone/>
             </a:pPr>
             <a:r>
@@ -12493,7 +12798,7 @@
       </p:sp>
       <p:sp>
         <p:nvSpPr>
-          <p:cNvPr id="25" name="Slide Number Placeholder 0"/>
+          <p:cNvPr id="45" name="Slide Number Placeholder 0"/>
           <p:cNvSpPr>
             <a:spLocks noGrp="1"/>
           </p:cNvSpPr>
@@ -12511,7 +12816,7 @@
           </a:prstGeom>
           <a:extLst>
             <a:ext uri="{C572A759-6A51-4108-AA02-DFA0A04FC94B}">
-              <ma14:wrappingTextBoxFlag xmlns:ma14="http://schemas.microsoft.com/office/mac/drawingml/2011/main" val="0"/>
+              <ma14:wrappingTextBoxFlag xmlns:ma14="http://schemas.microsoft.com/office/mac/drawingml/2011/main" xmlns="" val="0"/>
             </a:ext>
           </a:extLst>
         </p:spPr>
@@ -12529,7 +12834,7 @@
           <a:p>
             <a:pPr algn="r"/>
             <a:fld id="{F7021451-1387-4CA6-816F-3879F97B5CBC}" type="slidenum">
-              <a:rPr b="0" lang="en-US"/>
+              <a:rPr lang="en-US" b="0"/>
               <a:t>5</a:t>
             </a:fld>
             <a:endParaRPr lang="en-US"/>
@@ -12564,9 +12869,11 @@
       <p:sp>
         <p:nvSpPr>
           <p:cNvPr id="2" name="Text 0"/>
-          <p:cNvSpPr/>
+          <p:cNvSpPr>
+            <a:spLocks noGrp="1"/>
+          </p:cNvSpPr>
           <p:nvPr>
-            <p:ph idx="100" type="title" hasCustomPrompt="1"/>
+            <p:ph type="title" idx="100" hasCustomPrompt="1"/>
           </p:nvPr>
         </p:nvSpPr>
         <p:spPr>
@@ -12584,7 +12891,7 @@
           <a:bodyPr wrap="square" lIns="0" tIns="0" rIns="0" bIns="0" rtlCol="0" anchor="ctr"/>
           <a:lstStyle/>
           <a:p>
-            <a:pPr algn="l" indent="0" marL="0">
+            <a:pPr marL="0" indent="0" algn="l">
               <a:buNone/>
             </a:pPr>
             <a:r>
@@ -12620,6 +12927,13 @@
           </a:solidFill>
           <a:ln/>
         </p:spPr>
+        <p:txBody>
+          <a:bodyPr/>
+          <a:lstStyle/>
+          <a:p>
+            <a:endParaRPr lang="en-IN"/>
+          </a:p>
+        </p:txBody>
       </p:sp>
       <p:sp>
         <p:nvSpPr>
@@ -12642,7 +12956,7 @@
           <a:bodyPr wrap="square" lIns="0" tIns="0" rIns="0" bIns="0" rtlCol="0" anchor="t"/>
           <a:lstStyle/>
           <a:p>
-            <a:pPr algn="l" indent="0" marL="0">
+            <a:pPr marL="0" indent="0" algn="l">
               <a:buNone/>
             </a:pPr>
             <a:r>
@@ -12678,7 +12992,7 @@
           <a:bodyPr wrap="square" lIns="0" tIns="0" rIns="0" bIns="0" rtlCol="0" anchor="t"/>
           <a:lstStyle/>
           <a:p>
-            <a:pPr algn="l" indent="0" marL="0">
+            <a:pPr marL="0" indent="0" algn="l">
               <a:buNone/>
             </a:pPr>
             <a:r>
@@ -12714,7 +13028,7 @@
           <a:bodyPr wrap="square" lIns="0" tIns="0" rIns="0" bIns="0" rtlCol="0" anchor="t"/>
           <a:lstStyle/>
           <a:p>
-            <a:pPr algn="l" indent="0" marL="0">
+            <a:pPr marL="0" indent="0" algn="l">
               <a:buNone/>
             </a:pPr>
             <a:r>
@@ -12750,6 +13064,13 @@
           </a:solidFill>
           <a:ln/>
         </p:spPr>
+        <p:txBody>
+          <a:bodyPr/>
+          <a:lstStyle/>
+          <a:p>
+            <a:endParaRPr lang="en-IN"/>
+          </a:p>
+        </p:txBody>
       </p:sp>
       <p:sp>
         <p:nvSpPr>
@@ -12772,7 +13093,7 @@
           <a:bodyPr wrap="square" lIns="0" tIns="0" rIns="0" bIns="0" rtlCol="0" anchor="t"/>
           <a:lstStyle/>
           <a:p>
-            <a:pPr algn="l" indent="0" marL="0">
+            <a:pPr marL="0" indent="0" algn="l">
               <a:buNone/>
             </a:pPr>
             <a:r>
@@ -12808,7 +13129,7 @@
           <a:bodyPr wrap="square" lIns="0" tIns="0" rIns="0" bIns="0" rtlCol="0" anchor="t"/>
           <a:lstStyle/>
           <a:p>
-            <a:pPr algn="l" indent="0" marL="0">
+            <a:pPr marL="0" indent="0" algn="l">
               <a:buNone/>
             </a:pPr>
             <a:r>
@@ -12844,7 +13165,7 @@
           <a:bodyPr wrap="square" lIns="0" tIns="0" rIns="0" bIns="0" rtlCol="0" anchor="t"/>
           <a:lstStyle/>
           <a:p>
-            <a:pPr algn="l" indent="0" marL="0">
+            <a:pPr marL="0" indent="0" algn="l">
               <a:buNone/>
             </a:pPr>
             <a:r>
@@ -12880,6 +13201,13 @@
           </a:solidFill>
           <a:ln/>
         </p:spPr>
+        <p:txBody>
+          <a:bodyPr/>
+          <a:lstStyle/>
+          <a:p>
+            <a:endParaRPr lang="en-IN"/>
+          </a:p>
+        </p:txBody>
       </p:sp>
       <p:sp>
         <p:nvSpPr>
@@ -12902,7 +13230,7 @@
           <a:bodyPr wrap="square" lIns="0" tIns="0" rIns="0" bIns="0" rtlCol="0" anchor="t"/>
           <a:lstStyle/>
           <a:p>
-            <a:pPr algn="l" indent="0" marL="0">
+            <a:pPr marL="0" indent="0" algn="l">
               <a:buNone/>
             </a:pPr>
             <a:r>
@@ -12938,7 +13266,7 @@
           <a:bodyPr wrap="square" lIns="0" tIns="0" rIns="0" bIns="0" rtlCol="0" anchor="t"/>
           <a:lstStyle/>
           <a:p>
-            <a:pPr algn="l" indent="0" marL="0">
+            <a:pPr marL="0" indent="0" algn="l">
               <a:buNone/>
             </a:pPr>
             <a:r>
@@ -12974,7 +13302,7 @@
           <a:bodyPr wrap="square" lIns="0" tIns="0" rIns="0" bIns="0" rtlCol="0" anchor="t"/>
           <a:lstStyle/>
           <a:p>
-            <a:pPr algn="l" indent="0" marL="0">
+            <a:pPr marL="0" indent="0" algn="l">
               <a:buNone/>
             </a:pPr>
             <a:r>
@@ -13010,6 +13338,13 @@
           </a:solidFill>
           <a:ln/>
         </p:spPr>
+        <p:txBody>
+          <a:bodyPr/>
+          <a:lstStyle/>
+          <a:p>
+            <a:endParaRPr lang="en-IN"/>
+          </a:p>
+        </p:txBody>
       </p:sp>
       <p:sp>
         <p:nvSpPr>
@@ -13032,7 +13367,7 @@
           <a:bodyPr wrap="square" lIns="0" tIns="0" rIns="0" bIns="0" rtlCol="0" anchor="t"/>
           <a:lstStyle/>
           <a:p>
-            <a:pPr algn="l" indent="0" marL="0">
+            <a:pPr marL="0" indent="0" algn="l">
               <a:buNone/>
             </a:pPr>
             <a:r>
@@ -13068,7 +13403,7 @@
           <a:bodyPr wrap="square" lIns="0" tIns="0" rIns="0" bIns="0" rtlCol="0" anchor="t"/>
           <a:lstStyle/>
           <a:p>
-            <a:pPr algn="l" indent="0" marL="0">
+            <a:pPr marL="0" indent="0" algn="l">
               <a:buNone/>
             </a:pPr>
             <a:r>
@@ -13104,7 +13439,7 @@
           <a:bodyPr wrap="square" lIns="0" tIns="0" rIns="0" bIns="0" rtlCol="0" anchor="t"/>
           <a:lstStyle/>
           <a:p>
-            <a:pPr algn="l" indent="0" marL="0">
+            <a:pPr marL="0" indent="0" algn="l">
               <a:buNone/>
             </a:pPr>
             <a:r>
@@ -13140,6 +13475,13 @@
           </a:solidFill>
           <a:ln/>
         </p:spPr>
+        <p:txBody>
+          <a:bodyPr/>
+          <a:lstStyle/>
+          <a:p>
+            <a:endParaRPr lang="en-IN"/>
+          </a:p>
+        </p:txBody>
       </p:sp>
       <p:sp>
         <p:nvSpPr>
@@ -13162,7 +13504,7 @@
           <a:bodyPr wrap="square" lIns="0" tIns="0" rIns="0" bIns="0" rtlCol="0" anchor="t"/>
           <a:lstStyle/>
           <a:p>
-            <a:pPr algn="l" indent="0" marL="0">
+            <a:pPr marL="0" indent="0" algn="l">
               <a:buNone/>
             </a:pPr>
             <a:r>
@@ -13198,7 +13540,7 @@
           <a:bodyPr wrap="square" lIns="0" tIns="0" rIns="0" bIns="0" rtlCol="0" anchor="t"/>
           <a:lstStyle/>
           <a:p>
-            <a:pPr algn="l" indent="0" marL="0">
+            <a:pPr marL="0" indent="0" algn="l">
               <a:buNone/>
             </a:pPr>
             <a:r>
@@ -13234,7 +13576,7 @@
           <a:bodyPr wrap="square" lIns="0" tIns="0" rIns="0" bIns="0" rtlCol="0" anchor="t"/>
           <a:lstStyle/>
           <a:p>
-            <a:pPr algn="l" indent="0" marL="0">
+            <a:pPr marL="0" indent="0" algn="l">
               <a:buNone/>
             </a:pPr>
             <a:r>
@@ -13270,6 +13612,13 @@
           </a:solidFill>
           <a:ln/>
         </p:spPr>
+        <p:txBody>
+          <a:bodyPr/>
+          <a:lstStyle/>
+          <a:p>
+            <a:endParaRPr lang="en-IN"/>
+          </a:p>
+        </p:txBody>
       </p:sp>
       <p:sp>
         <p:nvSpPr>
@@ -13292,7 +13641,7 @@
           <a:bodyPr wrap="square" lIns="0" tIns="0" rIns="0" bIns="0" rtlCol="0" anchor="t"/>
           <a:lstStyle/>
           <a:p>
-            <a:pPr algn="l" indent="0" marL="0">
+            <a:pPr marL="0" indent="0" algn="l">
               <a:buNone/>
             </a:pPr>
             <a:r>
@@ -13328,7 +13677,7 @@
           <a:bodyPr wrap="square" lIns="0" tIns="0" rIns="0" bIns="0" rtlCol="0" anchor="t"/>
           <a:lstStyle/>
           <a:p>
-            <a:pPr algn="l" indent="0" marL="0">
+            <a:pPr marL="0" indent="0" algn="l">
               <a:buNone/>
             </a:pPr>
             <a:r>
@@ -13364,7 +13713,7 @@
           <a:bodyPr wrap="square" lIns="0" tIns="0" rIns="0" bIns="0" rtlCol="0" anchor="t"/>
           <a:lstStyle/>
           <a:p>
-            <a:pPr algn="l" indent="0" marL="0">
+            <a:pPr marL="0" indent="0" algn="l">
               <a:buNone/>
             </a:pPr>
             <a:r>
@@ -13400,6 +13749,13 @@
           </a:solidFill>
           <a:ln/>
         </p:spPr>
+        <p:txBody>
+          <a:bodyPr/>
+          <a:lstStyle/>
+          <a:p>
+            <a:endParaRPr lang="en-IN"/>
+          </a:p>
+        </p:txBody>
       </p:sp>
       <p:sp>
         <p:nvSpPr>
@@ -13422,7 +13778,7 @@
           <a:bodyPr wrap="square" lIns="0" tIns="0" rIns="0" bIns="0" rtlCol="0" anchor="t"/>
           <a:lstStyle/>
           <a:p>
-            <a:pPr algn="l" indent="0" marL="0">
+            <a:pPr marL="0" indent="0" algn="l">
               <a:buNone/>
             </a:pPr>
             <a:r>
@@ -13458,7 +13814,7 @@
           <a:bodyPr wrap="square" lIns="0" tIns="0" rIns="0" bIns="0" rtlCol="0" anchor="t"/>
           <a:lstStyle/>
           <a:p>
-            <a:pPr algn="l" indent="0" marL="0">
+            <a:pPr marL="0" indent="0" algn="l">
               <a:buNone/>
             </a:pPr>
             <a:r>
@@ -13494,7 +13850,7 @@
           <a:bodyPr wrap="square" lIns="0" tIns="0" rIns="0" bIns="0" rtlCol="0" anchor="t"/>
           <a:lstStyle/>
           <a:p>
-            <a:pPr algn="l" indent="0" marL="0">
+            <a:pPr marL="0" indent="0" algn="l">
               <a:buNone/>
             </a:pPr>
             <a:r>
@@ -13530,6 +13886,13 @@
           </a:solidFill>
           <a:ln/>
         </p:spPr>
+        <p:txBody>
+          <a:bodyPr/>
+          <a:lstStyle/>
+          <a:p>
+            <a:endParaRPr lang="en-IN"/>
+          </a:p>
+        </p:txBody>
       </p:sp>
       <p:sp>
         <p:nvSpPr>
@@ -13552,7 +13915,7 @@
           <a:bodyPr wrap="square" lIns="0" tIns="0" rIns="0" bIns="0" rtlCol="0" anchor="t"/>
           <a:lstStyle/>
           <a:p>
-            <a:pPr algn="l" indent="0" marL="0">
+            <a:pPr marL="0" indent="0" algn="l">
               <a:buNone/>
             </a:pPr>
             <a:r>
@@ -13588,7 +13951,7 @@
           <a:bodyPr wrap="square" lIns="0" tIns="0" rIns="0" bIns="0" rtlCol="0" anchor="t"/>
           <a:lstStyle/>
           <a:p>
-            <a:pPr algn="l" indent="0" marL="0">
+            <a:pPr marL="0" indent="0" algn="l">
               <a:buNone/>
             </a:pPr>
             <a:r>
@@ -13624,7 +13987,7 @@
           <a:bodyPr wrap="square" lIns="0" tIns="0" rIns="0" bIns="0" rtlCol="0" anchor="t"/>
           <a:lstStyle/>
           <a:p>
-            <a:pPr algn="l" indent="0" marL="0">
+            <a:pPr marL="0" indent="0" algn="l">
               <a:buNone/>
             </a:pPr>
             <a:r>
@@ -13660,7 +14023,7 @@
           <a:bodyPr wrap="square" lIns="0" tIns="0" rIns="0" bIns="0" rtlCol="0" anchor="t"/>
           <a:lstStyle/>
           <a:p>
-            <a:pPr algn="l" indent="0" marL="0">
+            <a:pPr marL="0" indent="0" algn="l">
               <a:buNone/>
             </a:pPr>
             <a:r>
@@ -13677,7 +14040,7 @@
       </p:sp>
       <p:sp>
         <p:nvSpPr>
-          <p:cNvPr id="25" name="Slide Number Placeholder 0"/>
+          <p:cNvPr id="36" name="Slide Number Placeholder 0"/>
           <p:cNvSpPr>
             <a:spLocks noGrp="1"/>
           </p:cNvSpPr>
@@ -13695,7 +14058,7 @@
           </a:prstGeom>
           <a:extLst>
             <a:ext uri="{C572A759-6A51-4108-AA02-DFA0A04FC94B}">
-              <ma14:wrappingTextBoxFlag xmlns:ma14="http://schemas.microsoft.com/office/mac/drawingml/2011/main" val="0"/>
+              <ma14:wrappingTextBoxFlag xmlns:ma14="http://schemas.microsoft.com/office/mac/drawingml/2011/main" xmlns="" val="0"/>
             </a:ext>
           </a:extLst>
         </p:spPr>
@@ -13713,7 +14076,7 @@
           <a:p>
             <a:pPr algn="r"/>
             <a:fld id="{F7021451-1387-4CA6-816F-3879F97B5CBC}" type="slidenum">
-              <a:rPr b="0" lang="en-US"/>
+              <a:rPr lang="en-US" b="0"/>
               <a:t>6</a:t>
             </a:fld>
             <a:endParaRPr lang="en-US"/>
@@ -13748,9 +14111,11 @@
       <p:sp>
         <p:nvSpPr>
           <p:cNvPr id="2" name="Text 0"/>
-          <p:cNvSpPr/>
+          <p:cNvSpPr>
+            <a:spLocks noGrp="1"/>
+          </p:cNvSpPr>
           <p:nvPr>
-            <p:ph idx="100" type="title" hasCustomPrompt="1"/>
+            <p:ph type="title" idx="100" hasCustomPrompt="1"/>
           </p:nvPr>
         </p:nvSpPr>
         <p:spPr>
@@ -13768,7 +14133,7 @@
           <a:bodyPr wrap="square" lIns="0" tIns="0" rIns="0" bIns="0" rtlCol="0" anchor="ctr"/>
           <a:lstStyle/>
           <a:p>
-            <a:pPr algn="l" indent="0" marL="0">
+            <a:pPr marL="0" indent="0" algn="l">
               <a:buNone/>
             </a:pPr>
             <a:r>
@@ -13804,6 +14169,13 @@
           </a:solidFill>
           <a:ln/>
         </p:spPr>
+        <p:txBody>
+          <a:bodyPr/>
+          <a:lstStyle/>
+          <a:p>
+            <a:endParaRPr lang="en-IN"/>
+          </a:p>
+        </p:txBody>
       </p:sp>
       <p:sp>
         <p:nvSpPr>
@@ -13826,7 +14198,7 @@
           <a:bodyPr wrap="square" lIns="0" tIns="0" rIns="0" bIns="0" rtlCol="0" anchor="t"/>
           <a:lstStyle/>
           <a:p>
-            <a:pPr algn="l" indent="0" marL="0">
+            <a:pPr marL="0" indent="0" algn="l">
               <a:buNone/>
             </a:pPr>
             <a:r>
@@ -13865,7 +14237,7 @@
           <a:bodyPr wrap="square" lIns="0" tIns="0" rIns="0" bIns="0" rtlCol="0" anchor="t"/>
           <a:lstStyle/>
           <a:p>
-            <a:pPr algn="l" indent="0" marL="0">
+            <a:pPr marL="0" indent="0" algn="l">
               <a:buNone/>
             </a:pPr>
             <a:r>
@@ -13901,6 +14273,13 @@
           </a:solidFill>
           <a:ln/>
         </p:spPr>
+        <p:txBody>
+          <a:bodyPr/>
+          <a:lstStyle/>
+          <a:p>
+            <a:endParaRPr lang="en-IN"/>
+          </a:p>
+        </p:txBody>
       </p:sp>
       <p:sp>
         <p:nvSpPr>
@@ -13923,7 +14302,7 @@
           <a:bodyPr wrap="square" lIns="0" tIns="0" rIns="0" bIns="0" rtlCol="0" anchor="t"/>
           <a:lstStyle/>
           <a:p>
-            <a:pPr algn="l" indent="0" marL="0">
+            <a:pPr marL="0" indent="0" algn="l">
               <a:buNone/>
             </a:pPr>
             <a:r>
@@ -13962,7 +14341,7 @@
           <a:bodyPr wrap="square" lIns="0" tIns="0" rIns="0" bIns="0" rtlCol="0" anchor="t"/>
           <a:lstStyle/>
           <a:p>
-            <a:pPr algn="l" indent="0" marL="0">
+            <a:pPr marL="0" indent="0" algn="l">
               <a:buNone/>
             </a:pPr>
             <a:r>
@@ -13998,6 +14377,13 @@
           </a:solidFill>
           <a:ln/>
         </p:spPr>
+        <p:txBody>
+          <a:bodyPr/>
+          <a:lstStyle/>
+          <a:p>
+            <a:endParaRPr lang="en-IN"/>
+          </a:p>
+        </p:txBody>
       </p:sp>
       <p:sp>
         <p:nvSpPr>
@@ -14020,7 +14406,7 @@
           <a:bodyPr wrap="square" lIns="0" tIns="0" rIns="0" bIns="0" rtlCol="0" anchor="t"/>
           <a:lstStyle/>
           <a:p>
-            <a:pPr algn="l" indent="0" marL="0">
+            <a:pPr marL="0" indent="0" algn="l">
               <a:buNone/>
             </a:pPr>
             <a:r>
@@ -14059,7 +14445,7 @@
           <a:bodyPr wrap="square" lIns="0" tIns="0" rIns="0" bIns="0" rtlCol="0" anchor="t"/>
           <a:lstStyle/>
           <a:p>
-            <a:pPr algn="l" indent="0" marL="0">
+            <a:pPr marL="0" indent="0" algn="l">
               <a:buNone/>
             </a:pPr>
             <a:r>
@@ -14095,6 +14481,13 @@
           </a:solidFill>
           <a:ln/>
         </p:spPr>
+        <p:txBody>
+          <a:bodyPr/>
+          <a:lstStyle/>
+          <a:p>
+            <a:endParaRPr lang="en-IN"/>
+          </a:p>
+        </p:txBody>
       </p:sp>
       <p:sp>
         <p:nvSpPr>
@@ -14117,7 +14510,7 @@
           <a:bodyPr wrap="square" lIns="0" tIns="0" rIns="0" bIns="0" rtlCol="0" anchor="t"/>
           <a:lstStyle/>
           <a:p>
-            <a:pPr algn="l" indent="0" marL="0">
+            <a:pPr marL="0" indent="0" algn="l">
               <a:buNone/>
             </a:pPr>
             <a:r>
@@ -14156,7 +14549,7 @@
           <a:bodyPr wrap="square" lIns="0" tIns="0" rIns="0" bIns="0" rtlCol="0" anchor="t"/>
           <a:lstStyle/>
           <a:p>
-            <a:pPr algn="l" indent="0" marL="0">
+            <a:pPr marL="0" indent="0" algn="l">
               <a:buNone/>
             </a:pPr>
             <a:r>
@@ -14173,7 +14566,7 @@
             <a:endParaRPr lang="en-US" sz="1300" dirty="0"/>
           </a:p>
           <a:p>
-            <a:pPr algn="l" indent="0" marL="0">
+            <a:pPr marL="0" indent="0" algn="l">
               <a:buNone/>
             </a:pPr>
             <a:r>
@@ -14190,7 +14583,7 @@
             <a:endParaRPr lang="en-US" sz="1300" dirty="0"/>
           </a:p>
           <a:p>
-            <a:pPr algn="l" indent="0" marL="0">
+            <a:pPr marL="0" indent="0" algn="l">
               <a:buNone/>
             </a:pPr>
             <a:r>
@@ -14210,7 +14603,7 @@
       </p:sp>
       <p:graphicFrame>
         <p:nvGraphicFramePr>
-          <p:cNvPr id="8" name="functions-table"/>
+          <p:cNvPr id="15" name="functions-table"/>
           <p:cNvGraphicFramePr>
             <a:graphicFrameLocks noGrp="1"/>
           </p:cNvGraphicFramePr>
@@ -14231,9 +14624,27 @@
             <a:tbl>
               <a:tblPr/>
               <a:tblGrid>
-                <a:gridCol w="2148840"/>
-                <a:gridCol w="1417320"/>
-                <a:gridCol w="2770632"/>
+                <a:gridCol w="2148840">
+                  <a:extLst>
+                    <a:ext uri="{9D8B030D-6E8A-4147-A177-3AD203B41FA5}">
+                      <a16:colId xmlns:a16="http://schemas.microsoft.com/office/drawing/2014/main" val="20000"/>
+                    </a:ext>
+                  </a:extLst>
+                </a:gridCol>
+                <a:gridCol w="1417320">
+                  <a:extLst>
+                    <a:ext uri="{9D8B030D-6E8A-4147-A177-3AD203B41FA5}">
+                      <a16:colId xmlns:a16="http://schemas.microsoft.com/office/drawing/2014/main" val="20001"/>
+                    </a:ext>
+                  </a:extLst>
+                </a:gridCol>
+                <a:gridCol w="2770632">
+                  <a:extLst>
+                    <a:ext uri="{9D8B030D-6E8A-4147-A177-3AD203B41FA5}">
+                      <a16:colId xmlns:a16="http://schemas.microsoft.com/office/drawing/2014/main" val="20002"/>
+                    </a:ext>
+                  </a:extLst>
+                </a:gridCol>
               </a:tblGrid>
               <a:tr h="310896">
                 <a:tc>
@@ -14241,7 +14652,7 @@
                     <a:bodyPr/>
                     <a:lstStyle/>
                     <a:p>
-                      <a:pPr indent="0" marL="0">
+                      <a:pPr marL="0" indent="0">
                         <a:buNone/>
                       </a:pPr>
                       <a:r>
@@ -14302,7 +14713,7 @@
                     <a:bodyPr/>
                     <a:lstStyle/>
                     <a:p>
-                      <a:pPr indent="0" marL="0">
+                      <a:pPr marL="0" indent="0">
                         <a:buNone/>
                       </a:pPr>
                       <a:r>
@@ -14363,7 +14774,7 @@
                     <a:bodyPr/>
                     <a:lstStyle/>
                     <a:p>
-                      <a:pPr indent="0" marL="0">
+                      <a:pPr marL="0" indent="0">
                         <a:buNone/>
                       </a:pPr>
                       <a:r>
@@ -14419,6 +14830,11 @@
                     </a:solidFill>
                   </a:tcPr>
                 </a:tc>
+                <a:extLst>
+                  <a:ext uri="{0D108BD9-81ED-4DB2-BD59-A6C34878D82A}">
+                    <a16:rowId xmlns:a16="http://schemas.microsoft.com/office/drawing/2014/main" val="10000"/>
+                  </a:ext>
+                </a:extLst>
               </a:tr>
               <a:tr h="310896">
                 <a:tc>
@@ -14426,7 +14842,7 @@
                     <a:bodyPr/>
                     <a:lstStyle/>
                     <a:p>
-                      <a:pPr indent="0" marL="0">
+                      <a:pPr marL="0" indent="0">
                         <a:buNone/>
                       </a:pPr>
                       <a:r>
@@ -14491,7 +14907,7 @@
                     <a:bodyPr/>
                     <a:lstStyle/>
                     <a:p>
-                      <a:pPr indent="0" marL="0">
+                      <a:pPr marL="0" indent="0">
                         <a:buNone/>
                       </a:pPr>
                       <a:r>
@@ -14549,7 +14965,7 @@
                     <a:bodyPr/>
                     <a:lstStyle/>
                     <a:p>
-                      <a:pPr indent="0" marL="0">
+                      <a:pPr marL="0" indent="0">
                         <a:buNone/>
                       </a:pPr>
                       <a:r>
@@ -14602,6 +15018,11 @@
                     </a:lnB>
                   </a:tcPr>
                 </a:tc>
+                <a:extLst>
+                  <a:ext uri="{0D108BD9-81ED-4DB2-BD59-A6C34878D82A}">
+                    <a16:rowId xmlns:a16="http://schemas.microsoft.com/office/drawing/2014/main" val="10001"/>
+                  </a:ext>
+                </a:extLst>
               </a:tr>
               <a:tr h="310896">
                 <a:tc>
@@ -14609,7 +15030,7 @@
                     <a:bodyPr/>
                     <a:lstStyle/>
                     <a:p>
-                      <a:pPr indent="0" marL="0">
+                      <a:pPr marL="0" indent="0">
                         <a:buNone/>
                       </a:pPr>
                       <a:r>
@@ -14674,7 +15095,7 @@
                     <a:bodyPr/>
                     <a:lstStyle/>
                     <a:p>
-                      <a:pPr indent="0" marL="0">
+                      <a:pPr marL="0" indent="0">
                         <a:buNone/>
                       </a:pPr>
                       <a:r>
@@ -14732,7 +15153,7 @@
                     <a:bodyPr/>
                     <a:lstStyle/>
                     <a:p>
-                      <a:pPr indent="0" marL="0">
+                      <a:pPr marL="0" indent="0">
                         <a:buNone/>
                       </a:pPr>
                       <a:r>
@@ -14785,6 +15206,11 @@
                     </a:lnB>
                   </a:tcPr>
                 </a:tc>
+                <a:extLst>
+                  <a:ext uri="{0D108BD9-81ED-4DB2-BD59-A6C34878D82A}">
+                    <a16:rowId xmlns:a16="http://schemas.microsoft.com/office/drawing/2014/main" val="10002"/>
+                  </a:ext>
+                </a:extLst>
               </a:tr>
               <a:tr h="310896">
                 <a:tc>
@@ -14792,7 +15218,7 @@
                     <a:bodyPr/>
                     <a:lstStyle/>
                     <a:p>
-                      <a:pPr indent="0" marL="0">
+                      <a:pPr marL="0" indent="0">
                         <a:buNone/>
                       </a:pPr>
                       <a:r>
@@ -14857,7 +15283,7 @@
                     <a:bodyPr/>
                     <a:lstStyle/>
                     <a:p>
-                      <a:pPr indent="0" marL="0">
+                      <a:pPr marL="0" indent="0">
                         <a:buNone/>
                       </a:pPr>
                       <a:r>
@@ -14915,7 +15341,7 @@
                     <a:bodyPr/>
                     <a:lstStyle/>
                     <a:p>
-                      <a:pPr indent="0" marL="0">
+                      <a:pPr marL="0" indent="0">
                         <a:buNone/>
                       </a:pPr>
                       <a:r>
@@ -14968,6 +15394,11 @@
                     </a:lnB>
                   </a:tcPr>
                 </a:tc>
+                <a:extLst>
+                  <a:ext uri="{0D108BD9-81ED-4DB2-BD59-A6C34878D82A}">
+                    <a16:rowId xmlns:a16="http://schemas.microsoft.com/office/drawing/2014/main" val="10003"/>
+                  </a:ext>
+                </a:extLst>
               </a:tr>
               <a:tr h="310896">
                 <a:tc>
@@ -14975,7 +15406,7 @@
                     <a:bodyPr/>
                     <a:lstStyle/>
                     <a:p>
-                      <a:pPr indent="0" marL="0">
+                      <a:pPr marL="0" indent="0">
                         <a:buNone/>
                       </a:pPr>
                       <a:r>
@@ -15040,7 +15471,7 @@
                     <a:bodyPr/>
                     <a:lstStyle/>
                     <a:p>
-                      <a:pPr indent="0" marL="0">
+                      <a:pPr marL="0" indent="0">
                         <a:buNone/>
                       </a:pPr>
                       <a:r>
@@ -15098,7 +15529,7 @@
                     <a:bodyPr/>
                     <a:lstStyle/>
                     <a:p>
-                      <a:pPr indent="0" marL="0">
+                      <a:pPr marL="0" indent="0">
                         <a:buNone/>
                       </a:pPr>
                       <a:r>
@@ -15151,6 +15582,11 @@
                     </a:lnB>
                   </a:tcPr>
                 </a:tc>
+                <a:extLst>
+                  <a:ext uri="{0D108BD9-81ED-4DB2-BD59-A6C34878D82A}">
+                    <a16:rowId xmlns:a16="http://schemas.microsoft.com/office/drawing/2014/main" val="10004"/>
+                  </a:ext>
+                </a:extLst>
               </a:tr>
               <a:tr h="310896">
                 <a:tc>
@@ -15158,7 +15594,7 @@
                     <a:bodyPr/>
                     <a:lstStyle/>
                     <a:p>
-                      <a:pPr indent="0" marL="0">
+                      <a:pPr marL="0" indent="0">
                         <a:buNone/>
                       </a:pPr>
                       <a:r>
@@ -15223,7 +15659,7 @@
                     <a:bodyPr/>
                     <a:lstStyle/>
                     <a:p>
-                      <a:pPr indent="0" marL="0">
+                      <a:pPr marL="0" indent="0">
                         <a:buNone/>
                       </a:pPr>
                       <a:r>
@@ -15281,7 +15717,7 @@
                     <a:bodyPr/>
                     <a:lstStyle/>
                     <a:p>
-                      <a:pPr indent="0" marL="0">
+                      <a:pPr marL="0" indent="0">
                         <a:buNone/>
                       </a:pPr>
                       <a:r>
@@ -15334,6 +15770,11 @@
                     </a:lnB>
                   </a:tcPr>
                 </a:tc>
+                <a:extLst>
+                  <a:ext uri="{0D108BD9-81ED-4DB2-BD59-A6C34878D82A}">
+                    <a16:rowId xmlns:a16="http://schemas.microsoft.com/office/drawing/2014/main" val="10005"/>
+                  </a:ext>
+                </a:extLst>
               </a:tr>
               <a:tr h="310896">
                 <a:tc>
@@ -15341,7 +15782,7 @@
                     <a:bodyPr/>
                     <a:lstStyle/>
                     <a:p>
-                      <a:pPr indent="0" marL="0">
+                      <a:pPr marL="0" indent="0">
                         <a:buNone/>
                       </a:pPr>
                       <a:r>
@@ -15406,7 +15847,7 @@
                     <a:bodyPr/>
                     <a:lstStyle/>
                     <a:p>
-                      <a:pPr indent="0" marL="0">
+                      <a:pPr marL="0" indent="0">
                         <a:buNone/>
                       </a:pPr>
                       <a:r>
@@ -15464,7 +15905,7 @@
                     <a:bodyPr/>
                     <a:lstStyle/>
                     <a:p>
-                      <a:pPr indent="0" marL="0">
+                      <a:pPr marL="0" indent="0">
                         <a:buNone/>
                       </a:pPr>
                       <a:r>
@@ -15517,6 +15958,11 @@
                     </a:lnB>
                   </a:tcPr>
                 </a:tc>
+                <a:extLst>
+                  <a:ext uri="{0D108BD9-81ED-4DB2-BD59-A6C34878D82A}">
+                    <a16:rowId xmlns:a16="http://schemas.microsoft.com/office/drawing/2014/main" val="10006"/>
+                  </a:ext>
+                </a:extLst>
               </a:tr>
               <a:tr h="310896">
                 <a:tc>
@@ -15524,7 +15970,7 @@
                     <a:bodyPr/>
                     <a:lstStyle/>
                     <a:p>
-                      <a:pPr indent="0" marL="0">
+                      <a:pPr marL="0" indent="0">
                         <a:buNone/>
                       </a:pPr>
                       <a:r>
@@ -15589,7 +16035,7 @@
                     <a:bodyPr/>
                     <a:lstStyle/>
                     <a:p>
-                      <a:pPr indent="0" marL="0">
+                      <a:pPr marL="0" indent="0">
                         <a:buNone/>
                       </a:pPr>
                       <a:r>
@@ -15647,7 +16093,7 @@
                     <a:bodyPr/>
                     <a:lstStyle/>
                     <a:p>
-                      <a:pPr indent="0" marL="0">
+                      <a:pPr marL="0" indent="0">
                         <a:buNone/>
                       </a:pPr>
                       <a:r>
@@ -15700,6 +16146,11 @@
                     </a:lnB>
                   </a:tcPr>
                 </a:tc>
+                <a:extLst>
+                  <a:ext uri="{0D108BD9-81ED-4DB2-BD59-A6C34878D82A}">
+                    <a16:rowId xmlns:a16="http://schemas.microsoft.com/office/drawing/2014/main" val="10007"/>
+                  </a:ext>
+                </a:extLst>
               </a:tr>
               <a:tr h="310896">
                 <a:tc>
@@ -15707,7 +16158,7 @@
                     <a:bodyPr/>
                     <a:lstStyle/>
                     <a:p>
-                      <a:pPr indent="0" marL="0">
+                      <a:pPr marL="0" indent="0">
                         <a:buNone/>
                       </a:pPr>
                       <a:r>
@@ -15772,7 +16223,7 @@
                     <a:bodyPr/>
                     <a:lstStyle/>
                     <a:p>
-                      <a:pPr indent="0" marL="0">
+                      <a:pPr marL="0" indent="0">
                         <a:buNone/>
                       </a:pPr>
                       <a:r>
@@ -15830,7 +16281,7 @@
                     <a:bodyPr/>
                     <a:lstStyle/>
                     <a:p>
-                      <a:pPr indent="0" marL="0">
+                      <a:pPr marL="0" indent="0">
                         <a:buNone/>
                       </a:pPr>
                       <a:r>
@@ -15883,6 +16334,11 @@
                     </a:lnB>
                   </a:tcPr>
                 </a:tc>
+                <a:extLst>
+                  <a:ext uri="{0D108BD9-81ED-4DB2-BD59-A6C34878D82A}">
+                    <a16:rowId xmlns:a16="http://schemas.microsoft.com/office/drawing/2014/main" val="10008"/>
+                  </a:ext>
+                </a:extLst>
               </a:tr>
               <a:tr h="310896">
                 <a:tc>
@@ -15890,7 +16346,7 @@
                     <a:bodyPr/>
                     <a:lstStyle/>
                     <a:p>
-                      <a:pPr indent="0" marL="0">
+                      <a:pPr marL="0" indent="0">
                         <a:buNone/>
                       </a:pPr>
                       <a:r>
@@ -15955,7 +16411,7 @@
                     <a:bodyPr/>
                     <a:lstStyle/>
                     <a:p>
-                      <a:pPr indent="0" marL="0">
+                      <a:pPr marL="0" indent="0">
                         <a:buNone/>
                       </a:pPr>
                       <a:r>
@@ -16013,7 +16469,7 @@
                     <a:bodyPr/>
                     <a:lstStyle/>
                     <a:p>
-                      <a:pPr indent="0" marL="0">
+                      <a:pPr marL="0" indent="0">
                         <a:buNone/>
                       </a:pPr>
                       <a:r>
@@ -16066,6 +16522,11 @@
                     </a:lnB>
                   </a:tcPr>
                 </a:tc>
+                <a:extLst>
+                  <a:ext uri="{0D108BD9-81ED-4DB2-BD59-A6C34878D82A}">
+                    <a16:rowId xmlns:a16="http://schemas.microsoft.com/office/drawing/2014/main" val="10009"/>
+                  </a:ext>
+                </a:extLst>
               </a:tr>
               <a:tr h="310896">
                 <a:tc>
@@ -16073,7 +16534,7 @@
                     <a:bodyPr/>
                     <a:lstStyle/>
                     <a:p>
-                      <a:pPr indent="0" marL="0">
+                      <a:pPr marL="0" indent="0">
                         <a:buNone/>
                       </a:pPr>
                       <a:r>
@@ -16138,7 +16599,7 @@
                     <a:bodyPr/>
                     <a:lstStyle/>
                     <a:p>
-                      <a:pPr indent="0" marL="0">
+                      <a:pPr marL="0" indent="0">
                         <a:buNone/>
                       </a:pPr>
                       <a:r>
@@ -16196,7 +16657,7 @@
                     <a:bodyPr/>
                     <a:lstStyle/>
                     <a:p>
-                      <a:pPr indent="0" marL="0">
+                      <a:pPr marL="0" indent="0">
                         <a:buNone/>
                       </a:pPr>
                       <a:r>
@@ -16249,6 +16710,11 @@
                     </a:lnB>
                   </a:tcPr>
                 </a:tc>
+                <a:extLst>
+                  <a:ext uri="{0D108BD9-81ED-4DB2-BD59-A6C34878D82A}">
+                    <a16:rowId xmlns:a16="http://schemas.microsoft.com/office/drawing/2014/main" val="10010"/>
+                  </a:ext>
+                </a:extLst>
               </a:tr>
               <a:tr h="310896">
                 <a:tc>
@@ -16256,7 +16722,7 @@
                     <a:bodyPr/>
                     <a:lstStyle/>
                     <a:p>
-                      <a:pPr indent="0" marL="0">
+                      <a:pPr marL="0" indent="0">
                         <a:buNone/>
                       </a:pPr>
                       <a:r>
@@ -16321,7 +16787,7 @@
                     <a:bodyPr/>
                     <a:lstStyle/>
                     <a:p>
-                      <a:pPr indent="0" marL="0">
+                      <a:pPr marL="0" indent="0">
                         <a:buNone/>
                       </a:pPr>
                       <a:r>
@@ -16379,7 +16845,7 @@
                     <a:bodyPr/>
                     <a:lstStyle/>
                     <a:p>
-                      <a:pPr indent="0" marL="0">
+                      <a:pPr marL="0" indent="0">
                         <a:buNone/>
                       </a:pPr>
                       <a:r>
@@ -16432,6 +16898,11 @@
                     </a:lnB>
                   </a:tcPr>
                 </a:tc>
+                <a:extLst>
+                  <a:ext uri="{0D108BD9-81ED-4DB2-BD59-A6C34878D82A}">
+                    <a16:rowId xmlns:a16="http://schemas.microsoft.com/office/drawing/2014/main" val="10011"/>
+                  </a:ext>
+                </a:extLst>
               </a:tr>
               <a:tr h="310896">
                 <a:tc>
@@ -16439,7 +16910,7 @@
                     <a:bodyPr/>
                     <a:lstStyle/>
                     <a:p>
-                      <a:pPr indent="0" marL="0">
+                      <a:pPr marL="0" indent="0">
                         <a:buNone/>
                       </a:pPr>
                       <a:r>
@@ -16504,7 +16975,7 @@
                     <a:bodyPr/>
                     <a:lstStyle/>
                     <a:p>
-                      <a:pPr indent="0" marL="0">
+                      <a:pPr marL="0" indent="0">
                         <a:buNone/>
                       </a:pPr>
                       <a:r>
@@ -16562,7 +17033,7 @@
                     <a:bodyPr/>
                     <a:lstStyle/>
                     <a:p>
-                      <a:pPr indent="0" marL="0">
+                      <a:pPr marL="0" indent="0">
                         <a:buNone/>
                       </a:pPr>
                       <a:r>
@@ -16615,6 +17086,11 @@
                     </a:lnB>
                   </a:tcPr>
                 </a:tc>
+                <a:extLst>
+                  <a:ext uri="{0D108BD9-81ED-4DB2-BD59-A6C34878D82A}">
+                    <a16:rowId xmlns:a16="http://schemas.microsoft.com/office/drawing/2014/main" val="10012"/>
+                  </a:ext>
+                </a:extLst>
               </a:tr>
             </a:tbl>
           </a:graphicData>
@@ -16641,7 +17117,7 @@
           <a:bodyPr wrap="square" lIns="0" tIns="0" rIns="0" bIns="0" rtlCol="0" anchor="ctr"/>
           <a:lstStyle/>
           <a:p>
-            <a:pPr indent="0" marL="0">
+            <a:pPr marL="0" indent="0">
               <a:buNone/>
             </a:pPr>
             <a:r>
@@ -16652,9 +17128,6 @@
               </a:rPr>
               <a:t>Events (on-chain audit trail): </a:t>
             </a:r>
-            <a:pPr indent="0" marL="0">
-              <a:buNone/>
-            </a:pPr>
             <a:r>
               <a:rPr lang="en-US" sz="1200" dirty="0">
                 <a:solidFill>
@@ -16690,7 +17163,7 @@
           </a:prstGeom>
           <a:extLst>
             <a:ext uri="{C572A759-6A51-4108-AA02-DFA0A04FC94B}">
-              <ma14:wrappingTextBoxFlag xmlns:ma14="http://schemas.microsoft.com/office/mac/drawingml/2011/main" val="0"/>
+              <ma14:wrappingTextBoxFlag xmlns:ma14="http://schemas.microsoft.com/office/mac/drawingml/2011/main" xmlns="" val="0"/>
             </a:ext>
           </a:extLst>
         </p:spPr>
@@ -16708,7 +17181,7 @@
           <a:p>
             <a:pPr algn="r"/>
             <a:fld id="{F7021451-1387-4CA6-816F-3879F97B5CBC}" type="slidenum">
-              <a:rPr b="0" lang="en-US"/>
+              <a:rPr lang="en-US" b="0"/>
               <a:t>7</a:t>
             </a:fld>
             <a:endParaRPr lang="en-US"/>
@@ -16743,9 +17216,11 @@
       <p:sp>
         <p:nvSpPr>
           <p:cNvPr id="2" name="Text 0"/>
-          <p:cNvSpPr/>
+          <p:cNvSpPr>
+            <a:spLocks noGrp="1"/>
+          </p:cNvSpPr>
           <p:nvPr>
-            <p:ph idx="100" type="title" hasCustomPrompt="1"/>
+            <p:ph type="title" idx="100" hasCustomPrompt="1"/>
           </p:nvPr>
         </p:nvSpPr>
         <p:spPr>
@@ -16763,7 +17238,7 @@
           <a:bodyPr wrap="square" lIns="0" tIns="0" rIns="0" bIns="0" rtlCol="0" anchor="ctr"/>
           <a:lstStyle/>
           <a:p>
-            <a:pPr algn="l" indent="0" marL="0">
+            <a:pPr marL="0" indent="0" algn="l">
               <a:buNone/>
             </a:pPr>
             <a:r>
@@ -16801,12 +17276,48 @@
             <a:tbl>
               <a:tblPr/>
               <a:tblGrid>
-                <a:gridCol w="2651760"/>
-                <a:gridCol w="914400"/>
-                <a:gridCol w="914400"/>
-                <a:gridCol w="914400"/>
-                <a:gridCol w="914400"/>
-                <a:gridCol w="914400"/>
+                <a:gridCol w="2651760">
+                  <a:extLst>
+                    <a:ext uri="{9D8B030D-6E8A-4147-A177-3AD203B41FA5}">
+                      <a16:colId xmlns:a16="http://schemas.microsoft.com/office/drawing/2014/main" val="20000"/>
+                    </a:ext>
+                  </a:extLst>
+                </a:gridCol>
+                <a:gridCol w="914400">
+                  <a:extLst>
+                    <a:ext uri="{9D8B030D-6E8A-4147-A177-3AD203B41FA5}">
+                      <a16:colId xmlns:a16="http://schemas.microsoft.com/office/drawing/2014/main" val="20001"/>
+                    </a:ext>
+                  </a:extLst>
+                </a:gridCol>
+                <a:gridCol w="914400">
+                  <a:extLst>
+                    <a:ext uri="{9D8B030D-6E8A-4147-A177-3AD203B41FA5}">
+                      <a16:colId xmlns:a16="http://schemas.microsoft.com/office/drawing/2014/main" val="20002"/>
+                    </a:ext>
+                  </a:extLst>
+                </a:gridCol>
+                <a:gridCol w="914400">
+                  <a:extLst>
+                    <a:ext uri="{9D8B030D-6E8A-4147-A177-3AD203B41FA5}">
+                      <a16:colId xmlns:a16="http://schemas.microsoft.com/office/drawing/2014/main" val="20003"/>
+                    </a:ext>
+                  </a:extLst>
+                </a:gridCol>
+                <a:gridCol w="914400">
+                  <a:extLst>
+                    <a:ext uri="{9D8B030D-6E8A-4147-A177-3AD203B41FA5}">
+                      <a16:colId xmlns:a16="http://schemas.microsoft.com/office/drawing/2014/main" val="20004"/>
+                    </a:ext>
+                  </a:extLst>
+                </a:gridCol>
+                <a:gridCol w="914400">
+                  <a:extLst>
+                    <a:ext uri="{9D8B030D-6E8A-4147-A177-3AD203B41FA5}">
+                      <a16:colId xmlns:a16="http://schemas.microsoft.com/office/drawing/2014/main" val="20005"/>
+                    </a:ext>
+                  </a:extLst>
+                </a:gridCol>
               </a:tblGrid>
               <a:tr h="384048">
                 <a:tc>
@@ -16814,7 +17325,7 @@
                     <a:bodyPr/>
                     <a:lstStyle/>
                     <a:p>
-                      <a:pPr indent="0" marL="0">
+                      <a:pPr marL="0" indent="0">
                         <a:buNone/>
                       </a:pPr>
                       <a:r>
@@ -16828,7 +17339,7 @@
                       <a:endParaRPr lang="en-US" sz="1400" dirty="0"/>
                     </a:p>
                   </a:txBody>
-                  <a:tcPr marL="91440" marR="91440" marT="27432" marB="27432" anchor="ctr">
+                  <a:tcPr marT="27432" marB="27432" anchor="ctr">
                     <a:lnL w="9525" cap="flat" cmpd="sng" algn="ctr">
                       <a:solidFill>
                         <a:srgbClr val="C9CFD6"/>
@@ -16875,7 +17386,7 @@
                     <a:bodyPr/>
                     <a:lstStyle/>
                     <a:p>
-                      <a:pPr algn="ctr" indent="0" marL="0">
+                      <a:pPr marL="0" indent="0" algn="ctr">
                         <a:buNone/>
                       </a:pPr>
                       <a:r>
@@ -16889,7 +17400,7 @@
                       <a:endParaRPr lang="en-US" sz="1200" dirty="0"/>
                     </a:p>
                   </a:txBody>
-                  <a:tcPr marL="91440" marR="91440" marT="27432" marB="27432" anchor="ctr">
+                  <a:tcPr marT="27432" marB="27432" anchor="ctr">
                     <a:lnL w="9525" cap="flat" cmpd="sng" algn="ctr">
                       <a:solidFill>
                         <a:srgbClr val="C9CFD6"/>
@@ -16936,7 +17447,7 @@
                     <a:bodyPr/>
                     <a:lstStyle/>
                     <a:p>
-                      <a:pPr algn="ctr" indent="0" marL="0">
+                      <a:pPr marL="0" indent="0" algn="ctr">
                         <a:buNone/>
                       </a:pPr>
                       <a:r>
@@ -16950,7 +17461,7 @@
                       <a:endParaRPr lang="en-US" sz="1200" dirty="0"/>
                     </a:p>
                   </a:txBody>
-                  <a:tcPr marL="91440" marR="91440" marT="27432" marB="27432" anchor="ctr">
+                  <a:tcPr marT="27432" marB="27432" anchor="ctr">
                     <a:lnL w="9525" cap="flat" cmpd="sng" algn="ctr">
                       <a:solidFill>
                         <a:srgbClr val="C9CFD6"/>
@@ -16997,7 +17508,7 @@
                     <a:bodyPr/>
                     <a:lstStyle/>
                     <a:p>
-                      <a:pPr algn="ctr" indent="0" marL="0">
+                      <a:pPr marL="0" indent="0" algn="ctr">
                         <a:buNone/>
                       </a:pPr>
                       <a:r>
@@ -17011,7 +17522,7 @@
                       <a:endParaRPr lang="en-US" sz="1200" dirty="0"/>
                     </a:p>
                   </a:txBody>
-                  <a:tcPr marL="91440" marR="91440" marT="27432" marB="27432" anchor="ctr">
+                  <a:tcPr marT="27432" marB="27432" anchor="ctr">
                     <a:lnL w="9525" cap="flat" cmpd="sng" algn="ctr">
                       <a:solidFill>
                         <a:srgbClr val="C9CFD6"/>
@@ -17058,7 +17569,7 @@
                     <a:bodyPr/>
                     <a:lstStyle/>
                     <a:p>
-                      <a:pPr algn="ctr" indent="0" marL="0">
+                      <a:pPr marL="0" indent="0" algn="ctr">
                         <a:buNone/>
                       </a:pPr>
                       <a:r>
@@ -17072,7 +17583,7 @@
                       <a:endParaRPr lang="en-US" sz="1200" dirty="0"/>
                     </a:p>
                   </a:txBody>
-                  <a:tcPr marL="91440" marR="91440" marT="27432" marB="27432" anchor="ctr">
+                  <a:tcPr marT="27432" marB="27432" anchor="ctr">
                     <a:lnL w="9525" cap="flat" cmpd="sng" algn="ctr">
                       <a:solidFill>
                         <a:srgbClr val="C9CFD6"/>
@@ -17119,7 +17630,7 @@
                     <a:bodyPr/>
                     <a:lstStyle/>
                     <a:p>
-                      <a:pPr algn="ctr" indent="0" marL="0">
+                      <a:pPr marL="0" indent="0" algn="ctr">
                         <a:buNone/>
                       </a:pPr>
                       <a:r>
@@ -17133,7 +17644,7 @@
                       <a:endParaRPr lang="en-US" sz="1200" dirty="0"/>
                     </a:p>
                   </a:txBody>
-                  <a:tcPr marL="91440" marR="91440" marT="27432" marB="27432" anchor="ctr">
+                  <a:tcPr marT="27432" marB="27432" anchor="ctr">
                     <a:lnL w="9525" cap="flat" cmpd="sng" algn="ctr">
                       <a:solidFill>
                         <a:srgbClr val="C9CFD6"/>
@@ -17175,6 +17686,11 @@
                     </a:solidFill>
                   </a:tcPr>
                 </a:tc>
+                <a:extLst>
+                  <a:ext uri="{0D108BD9-81ED-4DB2-BD59-A6C34878D82A}">
+                    <a16:rowId xmlns:a16="http://schemas.microsoft.com/office/drawing/2014/main" val="10000"/>
+                  </a:ext>
+                </a:extLst>
               </a:tr>
               <a:tr h="384048">
                 <a:tc>
@@ -17182,7 +17698,7 @@
                     <a:bodyPr/>
                     <a:lstStyle/>
                     <a:p>
-                      <a:pPr indent="0" marL="0">
+                      <a:pPr marL="0" indent="0">
                         <a:buNone/>
                       </a:pPr>
                       <a:r>
@@ -17196,7 +17712,7 @@
                       <a:endParaRPr lang="en-US" sz="1400" dirty="0"/>
                     </a:p>
                   </a:txBody>
-                  <a:tcPr marL="91440" marR="91440" marT="27432" marB="27432" anchor="ctr">
+                  <a:tcPr marT="27432" marB="27432" anchor="ctr">
                     <a:lnL w="9525" cap="flat" cmpd="sng" algn="ctr">
                       <a:solidFill>
                         <a:srgbClr val="C9CFD6"/>
@@ -17240,7 +17756,7 @@
                     <a:bodyPr/>
                     <a:lstStyle/>
                     <a:p>
-                      <a:pPr algn="ctr" indent="0" marL="0">
+                      <a:pPr marL="0" indent="0" algn="ctr">
                         <a:buNone/>
                       </a:pPr>
                       <a:r>
@@ -17254,7 +17770,7 @@
                       <a:endParaRPr lang="en-US" sz="1400" dirty="0"/>
                     </a:p>
                   </a:txBody>
-                  <a:tcPr marL="91440" marR="91440" marT="27432" marB="27432" anchor="ctr">
+                  <a:tcPr marT="27432" marB="27432" anchor="ctr">
                     <a:lnL w="9525" cap="flat" cmpd="sng" algn="ctr">
                       <a:solidFill>
                         <a:srgbClr val="C9CFD6"/>
@@ -17298,7 +17814,7 @@
                     <a:bodyPr/>
                     <a:lstStyle/>
                     <a:p>
-                      <a:pPr algn="ctr" indent="0" marL="0">
+                      <a:pPr marL="0" indent="0" algn="ctr">
                         <a:buNone/>
                       </a:pPr>
                       <a:r>
@@ -17312,7 +17828,7 @@
                       <a:endParaRPr lang="en-US" sz="1400" dirty="0"/>
                     </a:p>
                   </a:txBody>
-                  <a:tcPr marL="91440" marR="91440" marT="27432" marB="27432" anchor="ctr">
+                  <a:tcPr marT="27432" marB="27432" anchor="ctr">
                     <a:lnL w="9525" cap="flat" cmpd="sng" algn="ctr">
                       <a:solidFill>
                         <a:srgbClr val="C9CFD6"/>
@@ -17356,7 +17872,7 @@
                     <a:bodyPr/>
                     <a:lstStyle/>
                     <a:p>
-                      <a:pPr algn="ctr" indent="0" marL="0">
+                      <a:pPr marL="0" indent="0" algn="ctr">
                         <a:buNone/>
                       </a:pPr>
                       <a:r>
@@ -17370,7 +17886,7 @@
                       <a:endParaRPr lang="en-US" sz="1400" dirty="0"/>
                     </a:p>
                   </a:txBody>
-                  <a:tcPr marL="91440" marR="91440" marT="27432" marB="27432" anchor="ctr">
+                  <a:tcPr marT="27432" marB="27432" anchor="ctr">
                     <a:lnL w="9525" cap="flat" cmpd="sng" algn="ctr">
                       <a:solidFill>
                         <a:srgbClr val="C9CFD6"/>
@@ -17414,7 +17930,7 @@
                     <a:bodyPr/>
                     <a:lstStyle/>
                     <a:p>
-                      <a:pPr algn="ctr" indent="0" marL="0">
+                      <a:pPr marL="0" indent="0" algn="ctr">
                         <a:buNone/>
                       </a:pPr>
                       <a:r>
@@ -17428,7 +17944,7 @@
                       <a:endParaRPr lang="en-US" sz="1400" dirty="0"/>
                     </a:p>
                   </a:txBody>
-                  <a:tcPr marL="91440" marR="91440" marT="27432" marB="27432" anchor="ctr">
+                  <a:tcPr marT="27432" marB="27432" anchor="ctr">
                     <a:lnL w="9525" cap="flat" cmpd="sng" algn="ctr">
                       <a:solidFill>
                         <a:srgbClr val="C9CFD6"/>
@@ -17472,7 +17988,7 @@
                     <a:bodyPr/>
                     <a:lstStyle/>
                     <a:p>
-                      <a:pPr algn="ctr" indent="0" marL="0">
+                      <a:pPr marL="0" indent="0" algn="ctr">
                         <a:buNone/>
                       </a:pPr>
                       <a:r>
@@ -17486,7 +18002,7 @@
                       <a:endParaRPr lang="en-US" sz="1400" dirty="0"/>
                     </a:p>
                   </a:txBody>
-                  <a:tcPr marL="91440" marR="91440" marT="27432" marB="27432" anchor="ctr">
+                  <a:tcPr marT="27432" marB="27432" anchor="ctr">
                     <a:lnL w="9525" cap="flat" cmpd="sng" algn="ctr">
                       <a:solidFill>
                         <a:srgbClr val="C9CFD6"/>
@@ -17525,6 +18041,11 @@
                     </a:lnB>
                   </a:tcPr>
                 </a:tc>
+                <a:extLst>
+                  <a:ext uri="{0D108BD9-81ED-4DB2-BD59-A6C34878D82A}">
+                    <a16:rowId xmlns:a16="http://schemas.microsoft.com/office/drawing/2014/main" val="10001"/>
+                  </a:ext>
+                </a:extLst>
               </a:tr>
               <a:tr h="384048">
                 <a:tc>
@@ -17532,7 +18053,7 @@
                     <a:bodyPr/>
                     <a:lstStyle/>
                     <a:p>
-                      <a:pPr indent="0" marL="0">
+                      <a:pPr marL="0" indent="0">
                         <a:buNone/>
                       </a:pPr>
                       <a:r>
@@ -17546,7 +18067,7 @@
                       <a:endParaRPr lang="en-US" sz="1400" dirty="0"/>
                     </a:p>
                   </a:txBody>
-                  <a:tcPr marL="91440" marR="91440" marT="27432" marB="27432" anchor="ctr">
+                  <a:tcPr marT="27432" marB="27432" anchor="ctr">
                     <a:lnL w="9525" cap="flat" cmpd="sng" algn="ctr">
                       <a:solidFill>
                         <a:srgbClr val="C9CFD6"/>
@@ -17590,7 +18111,7 @@
                     <a:bodyPr/>
                     <a:lstStyle/>
                     <a:p>
-                      <a:pPr algn="ctr" indent="0" marL="0">
+                      <a:pPr marL="0" indent="0" algn="ctr">
                         <a:buNone/>
                       </a:pPr>
                       <a:r>
@@ -17604,7 +18125,7 @@
                       <a:endParaRPr lang="en-US" sz="1400" dirty="0"/>
                     </a:p>
                   </a:txBody>
-                  <a:tcPr marL="91440" marR="91440" marT="27432" marB="27432" anchor="ctr">
+                  <a:tcPr marT="27432" marB="27432" anchor="ctr">
                     <a:lnL w="9525" cap="flat" cmpd="sng" algn="ctr">
                       <a:solidFill>
                         <a:srgbClr val="C9CFD6"/>
@@ -17648,7 +18169,7 @@
                     <a:bodyPr/>
                     <a:lstStyle/>
                     <a:p>
-                      <a:pPr algn="ctr" indent="0" marL="0">
+                      <a:pPr marL="0" indent="0" algn="ctr">
                         <a:buNone/>
                       </a:pPr>
                       <a:r>
@@ -17662,7 +18183,7 @@
                       <a:endParaRPr lang="en-US" sz="1400" dirty="0"/>
                     </a:p>
                   </a:txBody>
-                  <a:tcPr marL="91440" marR="91440" marT="27432" marB="27432" anchor="ctr">
+                  <a:tcPr marT="27432" marB="27432" anchor="ctr">
                     <a:lnL w="9525" cap="flat" cmpd="sng" algn="ctr">
                       <a:solidFill>
                         <a:srgbClr val="C9CFD6"/>
@@ -17706,7 +18227,7 @@
                     <a:bodyPr/>
                     <a:lstStyle/>
                     <a:p>
-                      <a:pPr algn="ctr" indent="0" marL="0">
+                      <a:pPr marL="0" indent="0" algn="ctr">
                         <a:buNone/>
                       </a:pPr>
                       <a:r>
@@ -17720,7 +18241,7 @@
                       <a:endParaRPr lang="en-US" sz="1400" dirty="0"/>
                     </a:p>
                   </a:txBody>
-                  <a:tcPr marL="91440" marR="91440" marT="27432" marB="27432" anchor="ctr">
+                  <a:tcPr marT="27432" marB="27432" anchor="ctr">
                     <a:lnL w="9525" cap="flat" cmpd="sng" algn="ctr">
                       <a:solidFill>
                         <a:srgbClr val="C9CFD6"/>
@@ -17764,7 +18285,7 @@
                     <a:bodyPr/>
                     <a:lstStyle/>
                     <a:p>
-                      <a:pPr algn="ctr" indent="0" marL="0">
+                      <a:pPr marL="0" indent="0" algn="ctr">
                         <a:buNone/>
                       </a:pPr>
                       <a:r>
@@ -17778,7 +18299,7 @@
                       <a:endParaRPr lang="en-US" sz="1400" dirty="0"/>
                     </a:p>
                   </a:txBody>
-                  <a:tcPr marL="91440" marR="91440" marT="27432" marB="27432" anchor="ctr">
+                  <a:tcPr marT="27432" marB="27432" anchor="ctr">
                     <a:lnL w="9525" cap="flat" cmpd="sng" algn="ctr">
                       <a:solidFill>
                         <a:srgbClr val="C9CFD6"/>
@@ -17822,7 +18343,7 @@
                     <a:bodyPr/>
                     <a:lstStyle/>
                     <a:p>
-                      <a:pPr algn="ctr" indent="0" marL="0">
+                      <a:pPr marL="0" indent="0" algn="ctr">
                         <a:buNone/>
                       </a:pPr>
                       <a:r>
@@ -17836,7 +18357,7 @@
                       <a:endParaRPr lang="en-US" sz="1400" dirty="0"/>
                     </a:p>
                   </a:txBody>
-                  <a:tcPr marL="91440" marR="91440" marT="27432" marB="27432" anchor="ctr">
+                  <a:tcPr marT="27432" marB="27432" anchor="ctr">
                     <a:lnL w="9525" cap="flat" cmpd="sng" algn="ctr">
                       <a:solidFill>
                         <a:srgbClr val="C9CFD6"/>
@@ -17875,6 +18396,11 @@
                     </a:lnB>
                   </a:tcPr>
                 </a:tc>
+                <a:extLst>
+                  <a:ext uri="{0D108BD9-81ED-4DB2-BD59-A6C34878D82A}">
+                    <a16:rowId xmlns:a16="http://schemas.microsoft.com/office/drawing/2014/main" val="10002"/>
+                  </a:ext>
+                </a:extLst>
               </a:tr>
               <a:tr h="384048">
                 <a:tc>
@@ -17882,7 +18408,7 @@
                     <a:bodyPr/>
                     <a:lstStyle/>
                     <a:p>
-                      <a:pPr indent="0" marL="0">
+                      <a:pPr marL="0" indent="0">
                         <a:buNone/>
                       </a:pPr>
                       <a:r>
@@ -17896,7 +18422,7 @@
                       <a:endParaRPr lang="en-US" sz="1400" dirty="0"/>
                     </a:p>
                   </a:txBody>
-                  <a:tcPr marL="91440" marR="91440" marT="27432" marB="27432" anchor="ctr">
+                  <a:tcPr marT="27432" marB="27432" anchor="ctr">
                     <a:lnL w="9525" cap="flat" cmpd="sng" algn="ctr">
                       <a:solidFill>
                         <a:srgbClr val="C9CFD6"/>
@@ -17940,7 +18466,7 @@
                     <a:bodyPr/>
                     <a:lstStyle/>
                     <a:p>
-                      <a:pPr algn="ctr" indent="0" marL="0">
+                      <a:pPr marL="0" indent="0" algn="ctr">
                         <a:buNone/>
                       </a:pPr>
                       <a:r>
@@ -17954,7 +18480,7 @@
                       <a:endParaRPr lang="en-US" sz="1400" dirty="0"/>
                     </a:p>
                   </a:txBody>
-                  <a:tcPr marL="91440" marR="91440" marT="27432" marB="27432" anchor="ctr">
+                  <a:tcPr marT="27432" marB="27432" anchor="ctr">
                     <a:lnL w="9525" cap="flat" cmpd="sng" algn="ctr">
                       <a:solidFill>
                         <a:srgbClr val="C9CFD6"/>
@@ -17998,7 +18524,7 @@
                     <a:bodyPr/>
                     <a:lstStyle/>
                     <a:p>
-                      <a:pPr algn="ctr" indent="0" marL="0">
+                      <a:pPr marL="0" indent="0" algn="ctr">
                         <a:buNone/>
                       </a:pPr>
                       <a:r>
@@ -18012,7 +18538,7 @@
                       <a:endParaRPr lang="en-US" sz="1400" dirty="0"/>
                     </a:p>
                   </a:txBody>
-                  <a:tcPr marL="91440" marR="91440" marT="27432" marB="27432" anchor="ctr">
+                  <a:tcPr marT="27432" marB="27432" anchor="ctr">
                     <a:lnL w="9525" cap="flat" cmpd="sng" algn="ctr">
                       <a:solidFill>
                         <a:srgbClr val="C9CFD6"/>
@@ -18056,7 +18582,7 @@
                     <a:bodyPr/>
                     <a:lstStyle/>
                     <a:p>
-                      <a:pPr algn="ctr" indent="0" marL="0">
+                      <a:pPr marL="0" indent="0" algn="ctr">
                         <a:buNone/>
                       </a:pPr>
                       <a:r>
@@ -18070,7 +18596,7 @@
                       <a:endParaRPr lang="en-US" sz="1400" dirty="0"/>
                     </a:p>
                   </a:txBody>
-                  <a:tcPr marL="91440" marR="91440" marT="27432" marB="27432" anchor="ctr">
+                  <a:tcPr marT="27432" marB="27432" anchor="ctr">
                     <a:lnL w="9525" cap="flat" cmpd="sng" algn="ctr">
                       <a:solidFill>
                         <a:srgbClr val="C9CFD6"/>
@@ -18114,7 +18640,7 @@
                     <a:bodyPr/>
                     <a:lstStyle/>
                     <a:p>
-                      <a:pPr algn="ctr" indent="0" marL="0">
+                      <a:pPr marL="0" indent="0" algn="ctr">
                         <a:buNone/>
                       </a:pPr>
                       <a:r>
@@ -18128,7 +18654,7 @@
                       <a:endParaRPr lang="en-US" sz="1400" dirty="0"/>
                     </a:p>
                   </a:txBody>
-                  <a:tcPr marL="91440" marR="91440" marT="27432" marB="27432" anchor="ctr">
+                  <a:tcPr marT="27432" marB="27432" anchor="ctr">
                     <a:lnL w="9525" cap="flat" cmpd="sng" algn="ctr">
                       <a:solidFill>
                         <a:srgbClr val="C9CFD6"/>
@@ -18172,7 +18698,7 @@
                     <a:bodyPr/>
                     <a:lstStyle/>
                     <a:p>
-                      <a:pPr algn="ctr" indent="0" marL="0">
+                      <a:pPr marL="0" indent="0" algn="ctr">
                         <a:buNone/>
                       </a:pPr>
                       <a:r>
@@ -18186,7 +18712,7 @@
                       <a:endParaRPr lang="en-US" sz="1400" dirty="0"/>
                     </a:p>
                   </a:txBody>
-                  <a:tcPr marL="91440" marR="91440" marT="27432" marB="27432" anchor="ctr">
+                  <a:tcPr marT="27432" marB="27432" anchor="ctr">
                     <a:lnL w="9525" cap="flat" cmpd="sng" algn="ctr">
                       <a:solidFill>
                         <a:srgbClr val="C9CFD6"/>
@@ -18225,6 +18751,11 @@
                     </a:lnB>
                   </a:tcPr>
                 </a:tc>
+                <a:extLst>
+                  <a:ext uri="{0D108BD9-81ED-4DB2-BD59-A6C34878D82A}">
+                    <a16:rowId xmlns:a16="http://schemas.microsoft.com/office/drawing/2014/main" val="10003"/>
+                  </a:ext>
+                </a:extLst>
               </a:tr>
               <a:tr h="384048">
                 <a:tc>
@@ -18232,7 +18763,7 @@
                     <a:bodyPr/>
                     <a:lstStyle/>
                     <a:p>
-                      <a:pPr indent="0" marL="0">
+                      <a:pPr marL="0" indent="0">
                         <a:buNone/>
                       </a:pPr>
                       <a:r>
@@ -18246,7 +18777,7 @@
                       <a:endParaRPr lang="en-US" sz="1400" dirty="0"/>
                     </a:p>
                   </a:txBody>
-                  <a:tcPr marL="91440" marR="91440" marT="27432" marB="27432" anchor="ctr">
+                  <a:tcPr marT="27432" marB="27432" anchor="ctr">
                     <a:lnL w="9525" cap="flat" cmpd="sng" algn="ctr">
                       <a:solidFill>
                         <a:srgbClr val="C9CFD6"/>
@@ -18290,7 +18821,7 @@
                     <a:bodyPr/>
                     <a:lstStyle/>
                     <a:p>
-                      <a:pPr algn="ctr" indent="0" marL="0">
+                      <a:pPr marL="0" indent="0" algn="ctr">
                         <a:buNone/>
                       </a:pPr>
                       <a:r>
@@ -18304,7 +18835,7 @@
                       <a:endParaRPr lang="en-US" sz="1400" dirty="0"/>
                     </a:p>
                   </a:txBody>
-                  <a:tcPr marL="91440" marR="91440" marT="27432" marB="27432" anchor="ctr">
+                  <a:tcPr marT="27432" marB="27432" anchor="ctr">
                     <a:lnL w="9525" cap="flat" cmpd="sng" algn="ctr">
                       <a:solidFill>
                         <a:srgbClr val="C9CFD6"/>
@@ -18348,7 +18879,7 @@
                     <a:bodyPr/>
                     <a:lstStyle/>
                     <a:p>
-                      <a:pPr algn="ctr" indent="0" marL="0">
+                      <a:pPr marL="0" indent="0" algn="ctr">
                         <a:buNone/>
                       </a:pPr>
                       <a:r>
@@ -18362,7 +18893,7 @@
                       <a:endParaRPr lang="en-US" sz="1400" dirty="0"/>
                     </a:p>
                   </a:txBody>
-                  <a:tcPr marL="91440" marR="91440" marT="27432" marB="27432" anchor="ctr">
+                  <a:tcPr marT="27432" marB="27432" anchor="ctr">
                     <a:lnL w="9525" cap="flat" cmpd="sng" algn="ctr">
                       <a:solidFill>
                         <a:srgbClr val="C9CFD6"/>
@@ -18406,7 +18937,7 @@
                     <a:bodyPr/>
                     <a:lstStyle/>
                     <a:p>
-                      <a:pPr algn="ctr" indent="0" marL="0">
+                      <a:pPr marL="0" indent="0" algn="ctr">
                         <a:buNone/>
                       </a:pPr>
                       <a:r>
@@ -18420,7 +18951,7 @@
                       <a:endParaRPr lang="en-US" sz="1400" dirty="0"/>
                     </a:p>
                   </a:txBody>
-                  <a:tcPr marL="91440" marR="91440" marT="27432" marB="27432" anchor="ctr">
+                  <a:tcPr marT="27432" marB="27432" anchor="ctr">
                     <a:lnL w="9525" cap="flat" cmpd="sng" algn="ctr">
                       <a:solidFill>
                         <a:srgbClr val="C9CFD6"/>
@@ -18464,7 +18995,7 @@
                     <a:bodyPr/>
                     <a:lstStyle/>
                     <a:p>
-                      <a:pPr algn="ctr" indent="0" marL="0">
+                      <a:pPr marL="0" indent="0" algn="ctr">
                         <a:buNone/>
                       </a:pPr>
                       <a:r>
@@ -18478,7 +19009,7 @@
                       <a:endParaRPr lang="en-US" sz="1400" dirty="0"/>
                     </a:p>
                   </a:txBody>
-                  <a:tcPr marL="91440" marR="91440" marT="27432" marB="27432" anchor="ctr">
+                  <a:tcPr marT="27432" marB="27432" anchor="ctr">
                     <a:lnL w="9525" cap="flat" cmpd="sng" algn="ctr">
                       <a:solidFill>
                         <a:srgbClr val="C9CFD6"/>
@@ -18522,7 +19053,7 @@
                     <a:bodyPr/>
                     <a:lstStyle/>
                     <a:p>
-                      <a:pPr algn="ctr" indent="0" marL="0">
+                      <a:pPr marL="0" indent="0" algn="ctr">
                         <a:buNone/>
                       </a:pPr>
                       <a:r>
@@ -18536,7 +19067,7 @@
                       <a:endParaRPr lang="en-US" sz="1400" dirty="0"/>
                     </a:p>
                   </a:txBody>
-                  <a:tcPr marL="91440" marR="91440" marT="27432" marB="27432" anchor="ctr">
+                  <a:tcPr marT="27432" marB="27432" anchor="ctr">
                     <a:lnL w="9525" cap="flat" cmpd="sng" algn="ctr">
                       <a:solidFill>
                         <a:srgbClr val="C9CFD6"/>
@@ -18575,6 +19106,11 @@
                     </a:lnB>
                   </a:tcPr>
                 </a:tc>
+                <a:extLst>
+                  <a:ext uri="{0D108BD9-81ED-4DB2-BD59-A6C34878D82A}">
+                    <a16:rowId xmlns:a16="http://schemas.microsoft.com/office/drawing/2014/main" val="10004"/>
+                  </a:ext>
+                </a:extLst>
               </a:tr>
               <a:tr h="384048">
                 <a:tc>
@@ -18582,7 +19118,7 @@
                     <a:bodyPr/>
                     <a:lstStyle/>
                     <a:p>
-                      <a:pPr indent="0" marL="0">
+                      <a:pPr marL="0" indent="0">
                         <a:buNone/>
                       </a:pPr>
                       <a:r>
@@ -18596,7 +19132,7 @@
                       <a:endParaRPr lang="en-US" sz="1400" dirty="0"/>
                     </a:p>
                   </a:txBody>
-                  <a:tcPr marL="91440" marR="91440" marT="27432" marB="27432" anchor="ctr">
+                  <a:tcPr marT="27432" marB="27432" anchor="ctr">
                     <a:lnL w="9525" cap="flat" cmpd="sng" algn="ctr">
                       <a:solidFill>
                         <a:srgbClr val="C9CFD6"/>
@@ -18640,7 +19176,7 @@
                     <a:bodyPr/>
                     <a:lstStyle/>
                     <a:p>
-                      <a:pPr algn="ctr" indent="0" marL="0">
+                      <a:pPr marL="0" indent="0" algn="ctr">
                         <a:buNone/>
                       </a:pPr>
                       <a:r>
@@ -18654,7 +19190,7 @@
                       <a:endParaRPr lang="en-US" sz="1400" dirty="0"/>
                     </a:p>
                   </a:txBody>
-                  <a:tcPr marL="91440" marR="91440" marT="27432" marB="27432" anchor="ctr">
+                  <a:tcPr marT="27432" marB="27432" anchor="ctr">
                     <a:lnL w="9525" cap="flat" cmpd="sng" algn="ctr">
                       <a:solidFill>
                         <a:srgbClr val="C9CFD6"/>
@@ -18698,7 +19234,7 @@
                     <a:bodyPr/>
                     <a:lstStyle/>
                     <a:p>
-                      <a:pPr algn="ctr" indent="0" marL="0">
+                      <a:pPr marL="0" indent="0" algn="ctr">
                         <a:buNone/>
                       </a:pPr>
                       <a:r>
@@ -18712,7 +19248,7 @@
                       <a:endParaRPr lang="en-US" sz="1400" dirty="0"/>
                     </a:p>
                   </a:txBody>
-                  <a:tcPr marL="91440" marR="91440" marT="27432" marB="27432" anchor="ctr">
+                  <a:tcPr marT="27432" marB="27432" anchor="ctr">
                     <a:lnL w="9525" cap="flat" cmpd="sng" algn="ctr">
                       <a:solidFill>
                         <a:srgbClr val="C9CFD6"/>
@@ -18756,7 +19292,7 @@
                     <a:bodyPr/>
                     <a:lstStyle/>
                     <a:p>
-                      <a:pPr algn="ctr" indent="0" marL="0">
+                      <a:pPr marL="0" indent="0" algn="ctr">
                         <a:buNone/>
                       </a:pPr>
                       <a:r>
@@ -18770,7 +19306,7 @@
                       <a:endParaRPr lang="en-US" sz="1400" dirty="0"/>
                     </a:p>
                   </a:txBody>
-                  <a:tcPr marL="91440" marR="91440" marT="27432" marB="27432" anchor="ctr">
+                  <a:tcPr marT="27432" marB="27432" anchor="ctr">
                     <a:lnL w="9525" cap="flat" cmpd="sng" algn="ctr">
                       <a:solidFill>
                         <a:srgbClr val="C9CFD6"/>
@@ -18814,7 +19350,7 @@
                     <a:bodyPr/>
                     <a:lstStyle/>
                     <a:p>
-                      <a:pPr algn="ctr" indent="0" marL="0">
+                      <a:pPr marL="0" indent="0" algn="ctr">
                         <a:buNone/>
                       </a:pPr>
                       <a:r>
@@ -18828,7 +19364,7 @@
                       <a:endParaRPr lang="en-US" sz="1400" dirty="0"/>
                     </a:p>
                   </a:txBody>
-                  <a:tcPr marL="91440" marR="91440" marT="27432" marB="27432" anchor="ctr">
+                  <a:tcPr marT="27432" marB="27432" anchor="ctr">
                     <a:lnL w="9525" cap="flat" cmpd="sng" algn="ctr">
                       <a:solidFill>
                         <a:srgbClr val="C9CFD6"/>
@@ -18872,7 +19408,7 @@
                     <a:bodyPr/>
                     <a:lstStyle/>
                     <a:p>
-                      <a:pPr algn="ctr" indent="0" marL="0">
+                      <a:pPr marL="0" indent="0" algn="ctr">
                         <a:buNone/>
                       </a:pPr>
                       <a:r>
@@ -18886,7 +19422,7 @@
                       <a:endParaRPr lang="en-US" sz="1400" dirty="0"/>
                     </a:p>
                   </a:txBody>
-                  <a:tcPr marL="91440" marR="91440" marT="27432" marB="27432" anchor="ctr">
+                  <a:tcPr marT="27432" marB="27432" anchor="ctr">
                     <a:lnL w="9525" cap="flat" cmpd="sng" algn="ctr">
                       <a:solidFill>
                         <a:srgbClr val="C9CFD6"/>
@@ -18925,6 +19461,11 @@
                     </a:lnB>
                   </a:tcPr>
                 </a:tc>
+                <a:extLst>
+                  <a:ext uri="{0D108BD9-81ED-4DB2-BD59-A6C34878D82A}">
+                    <a16:rowId xmlns:a16="http://schemas.microsoft.com/office/drawing/2014/main" val="10005"/>
+                  </a:ext>
+                </a:extLst>
               </a:tr>
               <a:tr h="384048">
                 <a:tc>
@@ -18932,7 +19473,7 @@
                     <a:bodyPr/>
                     <a:lstStyle/>
                     <a:p>
-                      <a:pPr indent="0" marL="0">
+                      <a:pPr marL="0" indent="0">
                         <a:buNone/>
                       </a:pPr>
                       <a:r>
@@ -18946,7 +19487,7 @@
                       <a:endParaRPr lang="en-US" sz="1400" dirty="0"/>
                     </a:p>
                   </a:txBody>
-                  <a:tcPr marL="91440" marR="91440" marT="27432" marB="27432" anchor="ctr">
+                  <a:tcPr marT="27432" marB="27432" anchor="ctr">
                     <a:lnL w="9525" cap="flat" cmpd="sng" algn="ctr">
                       <a:solidFill>
                         <a:srgbClr val="C9CFD6"/>
@@ -18990,7 +19531,7 @@
                     <a:bodyPr/>
                     <a:lstStyle/>
                     <a:p>
-                      <a:pPr algn="ctr" indent="0" marL="0">
+                      <a:pPr marL="0" indent="0" algn="ctr">
                         <a:buNone/>
                       </a:pPr>
                       <a:r>
@@ -19004,7 +19545,7 @@
                       <a:endParaRPr lang="en-US" sz="1400" dirty="0"/>
                     </a:p>
                   </a:txBody>
-                  <a:tcPr marL="91440" marR="91440" marT="27432" marB="27432" anchor="ctr">
+                  <a:tcPr marT="27432" marB="27432" anchor="ctr">
                     <a:lnL w="9525" cap="flat" cmpd="sng" algn="ctr">
                       <a:solidFill>
                         <a:srgbClr val="C9CFD6"/>
@@ -19048,7 +19589,7 @@
                     <a:bodyPr/>
                     <a:lstStyle/>
                     <a:p>
-                      <a:pPr algn="ctr" indent="0" marL="0">
+                      <a:pPr marL="0" indent="0" algn="ctr">
                         <a:buNone/>
                       </a:pPr>
                       <a:r>
@@ -19062,7 +19603,7 @@
                       <a:endParaRPr lang="en-US" sz="1400" dirty="0"/>
                     </a:p>
                   </a:txBody>
-                  <a:tcPr marL="91440" marR="91440" marT="27432" marB="27432" anchor="ctr">
+                  <a:tcPr marT="27432" marB="27432" anchor="ctr">
                     <a:lnL w="9525" cap="flat" cmpd="sng" algn="ctr">
                       <a:solidFill>
                         <a:srgbClr val="C9CFD6"/>
@@ -19106,7 +19647,7 @@
                     <a:bodyPr/>
                     <a:lstStyle/>
                     <a:p>
-                      <a:pPr algn="ctr" indent="0" marL="0">
+                      <a:pPr marL="0" indent="0" algn="ctr">
                         <a:buNone/>
                       </a:pPr>
                       <a:r>
@@ -19120,7 +19661,7 @@
                       <a:endParaRPr lang="en-US" sz="1400" dirty="0"/>
                     </a:p>
                   </a:txBody>
-                  <a:tcPr marL="91440" marR="91440" marT="27432" marB="27432" anchor="ctr">
+                  <a:tcPr marT="27432" marB="27432" anchor="ctr">
                     <a:lnL w="9525" cap="flat" cmpd="sng" algn="ctr">
                       <a:solidFill>
                         <a:srgbClr val="C9CFD6"/>
@@ -19164,7 +19705,7 @@
                     <a:bodyPr/>
                     <a:lstStyle/>
                     <a:p>
-                      <a:pPr algn="ctr" indent="0" marL="0">
+                      <a:pPr marL="0" indent="0" algn="ctr">
                         <a:buNone/>
                       </a:pPr>
                       <a:r>
@@ -19178,7 +19719,7 @@
                       <a:endParaRPr lang="en-US" sz="1400" dirty="0"/>
                     </a:p>
                   </a:txBody>
-                  <a:tcPr marL="91440" marR="91440" marT="27432" marB="27432" anchor="ctr">
+                  <a:tcPr marT="27432" marB="27432" anchor="ctr">
                     <a:lnL w="9525" cap="flat" cmpd="sng" algn="ctr">
                       <a:solidFill>
                         <a:srgbClr val="C9CFD6"/>
@@ -19222,7 +19763,7 @@
                     <a:bodyPr/>
                     <a:lstStyle/>
                     <a:p>
-                      <a:pPr algn="ctr" indent="0" marL="0">
+                      <a:pPr marL="0" indent="0" algn="ctr">
                         <a:buNone/>
                       </a:pPr>
                       <a:r>
@@ -19236,7 +19777,7 @@
                       <a:endParaRPr lang="en-US" sz="1400" dirty="0"/>
                     </a:p>
                   </a:txBody>
-                  <a:tcPr marL="91440" marR="91440" marT="27432" marB="27432" anchor="ctr">
+                  <a:tcPr marT="27432" marB="27432" anchor="ctr">
                     <a:lnL w="9525" cap="flat" cmpd="sng" algn="ctr">
                       <a:solidFill>
                         <a:srgbClr val="C9CFD6"/>
@@ -19275,6 +19816,11 @@
                     </a:lnB>
                   </a:tcPr>
                 </a:tc>
+                <a:extLst>
+                  <a:ext uri="{0D108BD9-81ED-4DB2-BD59-A6C34878D82A}">
+                    <a16:rowId xmlns:a16="http://schemas.microsoft.com/office/drawing/2014/main" val="10006"/>
+                  </a:ext>
+                </a:extLst>
               </a:tr>
               <a:tr h="384048">
                 <a:tc>
@@ -19282,7 +19828,7 @@
                     <a:bodyPr/>
                     <a:lstStyle/>
                     <a:p>
-                      <a:pPr indent="0" marL="0">
+                      <a:pPr marL="0" indent="0">
                         <a:buNone/>
                       </a:pPr>
                       <a:r>
@@ -19296,7 +19842,7 @@
                       <a:endParaRPr lang="en-US" sz="1400" dirty="0"/>
                     </a:p>
                   </a:txBody>
-                  <a:tcPr marL="91440" marR="91440" marT="27432" marB="27432" anchor="ctr">
+                  <a:tcPr marT="27432" marB="27432" anchor="ctr">
                     <a:lnL w="9525" cap="flat" cmpd="sng" algn="ctr">
                       <a:solidFill>
                         <a:srgbClr val="C9CFD6"/>
@@ -19340,7 +19886,7 @@
                     <a:bodyPr/>
                     <a:lstStyle/>
                     <a:p>
-                      <a:pPr algn="ctr" indent="0" marL="0">
+                      <a:pPr marL="0" indent="0" algn="ctr">
                         <a:buNone/>
                       </a:pPr>
                       <a:r>
@@ -19354,7 +19900,7 @@
                       <a:endParaRPr lang="en-US" sz="1400" dirty="0"/>
                     </a:p>
                   </a:txBody>
-                  <a:tcPr marL="91440" marR="91440" marT="27432" marB="27432" anchor="ctr">
+                  <a:tcPr marT="27432" marB="27432" anchor="ctr">
                     <a:lnL w="9525" cap="flat" cmpd="sng" algn="ctr">
                       <a:solidFill>
                         <a:srgbClr val="C9CFD6"/>
@@ -19398,7 +19944,7 @@
                     <a:bodyPr/>
                     <a:lstStyle/>
                     <a:p>
-                      <a:pPr algn="ctr" indent="0" marL="0">
+                      <a:pPr marL="0" indent="0" algn="ctr">
                         <a:buNone/>
                       </a:pPr>
                       <a:r>
@@ -19412,7 +19958,7 @@
                       <a:endParaRPr lang="en-US" sz="1400" dirty="0"/>
                     </a:p>
                   </a:txBody>
-                  <a:tcPr marL="91440" marR="91440" marT="27432" marB="27432" anchor="ctr">
+                  <a:tcPr marT="27432" marB="27432" anchor="ctr">
                     <a:lnL w="9525" cap="flat" cmpd="sng" algn="ctr">
                       <a:solidFill>
                         <a:srgbClr val="C9CFD6"/>
@@ -19456,7 +20002,7 @@
                     <a:bodyPr/>
                     <a:lstStyle/>
                     <a:p>
-                      <a:pPr algn="ctr" indent="0" marL="0">
+                      <a:pPr marL="0" indent="0" algn="ctr">
                         <a:buNone/>
                       </a:pPr>
                       <a:r>
@@ -19470,7 +20016,7 @@
                       <a:endParaRPr lang="en-US" sz="1400" dirty="0"/>
                     </a:p>
                   </a:txBody>
-                  <a:tcPr marL="91440" marR="91440" marT="27432" marB="27432" anchor="ctr">
+                  <a:tcPr marT="27432" marB="27432" anchor="ctr">
                     <a:lnL w="9525" cap="flat" cmpd="sng" algn="ctr">
                       <a:solidFill>
                         <a:srgbClr val="C9CFD6"/>
@@ -19514,7 +20060,7 @@
                     <a:bodyPr/>
                     <a:lstStyle/>
                     <a:p>
-                      <a:pPr algn="ctr" indent="0" marL="0">
+                      <a:pPr marL="0" indent="0" algn="ctr">
                         <a:buNone/>
                       </a:pPr>
                       <a:r>
@@ -19528,7 +20074,7 @@
                       <a:endParaRPr lang="en-US" sz="1400" dirty="0"/>
                     </a:p>
                   </a:txBody>
-                  <a:tcPr marL="91440" marR="91440" marT="27432" marB="27432" anchor="ctr">
+                  <a:tcPr marT="27432" marB="27432" anchor="ctr">
                     <a:lnL w="9525" cap="flat" cmpd="sng" algn="ctr">
                       <a:solidFill>
                         <a:srgbClr val="C9CFD6"/>
@@ -19572,7 +20118,7 @@
                     <a:bodyPr/>
                     <a:lstStyle/>
                     <a:p>
-                      <a:pPr algn="ctr" indent="0" marL="0">
+                      <a:pPr marL="0" indent="0" algn="ctr">
                         <a:buNone/>
                       </a:pPr>
                       <a:r>
@@ -19586,7 +20132,7 @@
                       <a:endParaRPr lang="en-US" sz="1400" dirty="0"/>
                     </a:p>
                   </a:txBody>
-                  <a:tcPr marL="91440" marR="91440" marT="27432" marB="27432" anchor="ctr">
+                  <a:tcPr marT="27432" marB="27432" anchor="ctr">
                     <a:lnL w="9525" cap="flat" cmpd="sng" algn="ctr">
                       <a:solidFill>
                         <a:srgbClr val="C9CFD6"/>
@@ -19625,6 +20171,11 @@
                     </a:lnB>
                   </a:tcPr>
                 </a:tc>
+                <a:extLst>
+                  <a:ext uri="{0D108BD9-81ED-4DB2-BD59-A6C34878D82A}">
+                    <a16:rowId xmlns:a16="http://schemas.microsoft.com/office/drawing/2014/main" val="10007"/>
+                  </a:ext>
+                </a:extLst>
               </a:tr>
               <a:tr h="384048">
                 <a:tc>
@@ -19632,7 +20183,7 @@
                     <a:bodyPr/>
                     <a:lstStyle/>
                     <a:p>
-                      <a:pPr indent="0" marL="0">
+                      <a:pPr marL="0" indent="0">
                         <a:buNone/>
                       </a:pPr>
                       <a:r>
@@ -19646,7 +20197,7 @@
                       <a:endParaRPr lang="en-US" sz="1400" dirty="0"/>
                     </a:p>
                   </a:txBody>
-                  <a:tcPr marL="91440" marR="91440" marT="27432" marB="27432" anchor="ctr">
+                  <a:tcPr marT="27432" marB="27432" anchor="ctr">
                     <a:lnL w="9525" cap="flat" cmpd="sng" algn="ctr">
                       <a:solidFill>
                         <a:srgbClr val="C9CFD6"/>
@@ -19690,7 +20241,7 @@
                     <a:bodyPr/>
                     <a:lstStyle/>
                     <a:p>
-                      <a:pPr algn="ctr" indent="0" marL="0">
+                      <a:pPr marL="0" indent="0" algn="ctr">
                         <a:buNone/>
                       </a:pPr>
                       <a:r>
@@ -19704,7 +20255,7 @@
                       <a:endParaRPr lang="en-US" sz="1400" dirty="0"/>
                     </a:p>
                   </a:txBody>
-                  <a:tcPr marL="91440" marR="91440" marT="27432" marB="27432" anchor="ctr">
+                  <a:tcPr marT="27432" marB="27432" anchor="ctr">
                     <a:lnL w="9525" cap="flat" cmpd="sng" algn="ctr">
                       <a:solidFill>
                         <a:srgbClr val="C9CFD6"/>
@@ -19748,7 +20299,7 @@
                     <a:bodyPr/>
                     <a:lstStyle/>
                     <a:p>
-                      <a:pPr algn="ctr" indent="0" marL="0">
+                      <a:pPr marL="0" indent="0" algn="ctr">
                         <a:buNone/>
                       </a:pPr>
                       <a:r>
@@ -19762,7 +20313,7 @@
                       <a:endParaRPr lang="en-US" sz="1400" dirty="0"/>
                     </a:p>
                   </a:txBody>
-                  <a:tcPr marL="91440" marR="91440" marT="27432" marB="27432" anchor="ctr">
+                  <a:tcPr marT="27432" marB="27432" anchor="ctr">
                     <a:lnL w="9525" cap="flat" cmpd="sng" algn="ctr">
                       <a:solidFill>
                         <a:srgbClr val="C9CFD6"/>
@@ -19806,7 +20357,7 @@
                     <a:bodyPr/>
                     <a:lstStyle/>
                     <a:p>
-                      <a:pPr algn="ctr" indent="0" marL="0">
+                      <a:pPr marL="0" indent="0" algn="ctr">
                         <a:buNone/>
                       </a:pPr>
                       <a:r>
@@ -19820,7 +20371,7 @@
                       <a:endParaRPr lang="en-US" sz="1400" dirty="0"/>
                     </a:p>
                   </a:txBody>
-                  <a:tcPr marL="91440" marR="91440" marT="27432" marB="27432" anchor="ctr">
+                  <a:tcPr marT="27432" marB="27432" anchor="ctr">
                     <a:lnL w="9525" cap="flat" cmpd="sng" algn="ctr">
                       <a:solidFill>
                         <a:srgbClr val="C9CFD6"/>
@@ -19864,7 +20415,7 @@
                     <a:bodyPr/>
                     <a:lstStyle/>
                     <a:p>
-                      <a:pPr algn="ctr" indent="0" marL="0">
+                      <a:pPr marL="0" indent="0" algn="ctr">
                         <a:buNone/>
                       </a:pPr>
                       <a:r>
@@ -19878,7 +20429,7 @@
                       <a:endParaRPr lang="en-US" sz="1400" dirty="0"/>
                     </a:p>
                   </a:txBody>
-                  <a:tcPr marL="91440" marR="91440" marT="27432" marB="27432" anchor="ctr">
+                  <a:tcPr marT="27432" marB="27432" anchor="ctr">
                     <a:lnL w="9525" cap="flat" cmpd="sng" algn="ctr">
                       <a:solidFill>
                         <a:srgbClr val="C9CFD6"/>
@@ -19922,7 +20473,7 @@
                     <a:bodyPr/>
                     <a:lstStyle/>
                     <a:p>
-                      <a:pPr algn="ctr" indent="0" marL="0">
+                      <a:pPr marL="0" indent="0" algn="ctr">
                         <a:buNone/>
                       </a:pPr>
                       <a:r>
@@ -19936,7 +20487,7 @@
                       <a:endParaRPr lang="en-US" sz="1400" dirty="0"/>
                     </a:p>
                   </a:txBody>
-                  <a:tcPr marL="91440" marR="91440" marT="27432" marB="27432" anchor="ctr">
+                  <a:tcPr marT="27432" marB="27432" anchor="ctr">
                     <a:lnL w="9525" cap="flat" cmpd="sng" algn="ctr">
                       <a:solidFill>
                         <a:srgbClr val="C9CFD6"/>
@@ -19975,6 +20526,11 @@
                     </a:lnB>
                   </a:tcPr>
                 </a:tc>
+                <a:extLst>
+                  <a:ext uri="{0D108BD9-81ED-4DB2-BD59-A6C34878D82A}">
+                    <a16:rowId xmlns:a16="http://schemas.microsoft.com/office/drawing/2014/main" val="10008"/>
+                  </a:ext>
+                </a:extLst>
               </a:tr>
               <a:tr h="384048">
                 <a:tc>
@@ -19982,7 +20538,7 @@
                     <a:bodyPr/>
                     <a:lstStyle/>
                     <a:p>
-                      <a:pPr indent="0" marL="0">
+                      <a:pPr marL="0" indent="0">
                         <a:buNone/>
                       </a:pPr>
                       <a:r>
@@ -19996,7 +20552,7 @@
                       <a:endParaRPr lang="en-US" sz="1400" dirty="0"/>
                     </a:p>
                   </a:txBody>
-                  <a:tcPr marL="91440" marR="91440" marT="27432" marB="27432" anchor="ctr">
+                  <a:tcPr marT="27432" marB="27432" anchor="ctr">
                     <a:lnL w="9525" cap="flat" cmpd="sng" algn="ctr">
                       <a:solidFill>
                         <a:srgbClr val="C9CFD6"/>
@@ -20040,7 +20596,7 @@
                     <a:bodyPr/>
                     <a:lstStyle/>
                     <a:p>
-                      <a:pPr algn="ctr" indent="0" marL="0">
+                      <a:pPr marL="0" indent="0" algn="ctr">
                         <a:buNone/>
                       </a:pPr>
                       <a:r>
@@ -20054,7 +20610,7 @@
                       <a:endParaRPr lang="en-US" sz="1400" dirty="0"/>
                     </a:p>
                   </a:txBody>
-                  <a:tcPr marL="91440" marR="91440" marT="27432" marB="27432" anchor="ctr">
+                  <a:tcPr marT="27432" marB="27432" anchor="ctr">
                     <a:lnL w="9525" cap="flat" cmpd="sng" algn="ctr">
                       <a:solidFill>
                         <a:srgbClr val="C9CFD6"/>
@@ -20098,7 +20654,7 @@
                     <a:bodyPr/>
                     <a:lstStyle/>
                     <a:p>
-                      <a:pPr algn="ctr" indent="0" marL="0">
+                      <a:pPr marL="0" indent="0" algn="ctr">
                         <a:buNone/>
                       </a:pPr>
                       <a:r>
@@ -20112,7 +20668,7 @@
                       <a:endParaRPr lang="en-US" sz="1400" dirty="0"/>
                     </a:p>
                   </a:txBody>
-                  <a:tcPr marL="91440" marR="91440" marT="27432" marB="27432" anchor="ctr">
+                  <a:tcPr marT="27432" marB="27432" anchor="ctr">
                     <a:lnL w="9525" cap="flat" cmpd="sng" algn="ctr">
                       <a:solidFill>
                         <a:srgbClr val="C9CFD6"/>
@@ -20156,7 +20712,7 @@
                     <a:bodyPr/>
                     <a:lstStyle/>
                     <a:p>
-                      <a:pPr algn="ctr" indent="0" marL="0">
+                      <a:pPr marL="0" indent="0" algn="ctr">
                         <a:buNone/>
                       </a:pPr>
                       <a:r>
@@ -20170,7 +20726,7 @@
                       <a:endParaRPr lang="en-US" sz="1400" dirty="0"/>
                     </a:p>
                   </a:txBody>
-                  <a:tcPr marL="91440" marR="91440" marT="27432" marB="27432" anchor="ctr">
+                  <a:tcPr marT="27432" marB="27432" anchor="ctr">
                     <a:lnL w="9525" cap="flat" cmpd="sng" algn="ctr">
                       <a:solidFill>
                         <a:srgbClr val="C9CFD6"/>
@@ -20214,7 +20770,7 @@
                     <a:bodyPr/>
                     <a:lstStyle/>
                     <a:p>
-                      <a:pPr algn="ctr" indent="0" marL="0">
+                      <a:pPr marL="0" indent="0" algn="ctr">
                         <a:buNone/>
                       </a:pPr>
                       <a:r>
@@ -20228,7 +20784,7 @@
                       <a:endParaRPr lang="en-US" sz="1400" dirty="0"/>
                     </a:p>
                   </a:txBody>
-                  <a:tcPr marL="91440" marR="91440" marT="27432" marB="27432" anchor="ctr">
+                  <a:tcPr marT="27432" marB="27432" anchor="ctr">
                     <a:lnL w="9525" cap="flat" cmpd="sng" algn="ctr">
                       <a:solidFill>
                         <a:srgbClr val="C9CFD6"/>
@@ -20272,7 +20828,7 @@
                     <a:bodyPr/>
                     <a:lstStyle/>
                     <a:p>
-                      <a:pPr algn="ctr" indent="0" marL="0">
+                      <a:pPr marL="0" indent="0" algn="ctr">
                         <a:buNone/>
                       </a:pPr>
                       <a:r>
@@ -20286,7 +20842,7 @@
                       <a:endParaRPr lang="en-US" sz="1400" dirty="0"/>
                     </a:p>
                   </a:txBody>
-                  <a:tcPr marL="91440" marR="91440" marT="27432" marB="27432" anchor="ctr">
+                  <a:tcPr marT="27432" marB="27432" anchor="ctr">
                     <a:lnL w="9525" cap="flat" cmpd="sng" algn="ctr">
                       <a:solidFill>
                         <a:srgbClr val="C9CFD6"/>
@@ -20325,6 +20881,11 @@
                     </a:lnB>
                   </a:tcPr>
                 </a:tc>
+                <a:extLst>
+                  <a:ext uri="{0D108BD9-81ED-4DB2-BD59-A6C34878D82A}">
+                    <a16:rowId xmlns:a16="http://schemas.microsoft.com/office/drawing/2014/main" val="10009"/>
+                  </a:ext>
+                </a:extLst>
               </a:tr>
             </a:tbl>
           </a:graphicData>
@@ -20351,7 +20912,7 @@
           <a:bodyPr wrap="square" lIns="0" tIns="0" rIns="0" bIns="0" rtlCol="0" anchor="t"/>
           <a:lstStyle/>
           <a:p>
-            <a:pPr algn="l" indent="0" marL="0">
+            <a:pPr marL="0" indent="0" algn="l">
               <a:buNone/>
             </a:pPr>
             <a:r>
@@ -20387,6 +20948,13 @@
           </a:solidFill>
           <a:ln/>
         </p:spPr>
+        <p:txBody>
+          <a:bodyPr/>
+          <a:lstStyle/>
+          <a:p>
+            <a:endParaRPr lang="en-IN"/>
+          </a:p>
+        </p:txBody>
       </p:sp>
       <p:sp>
         <p:nvSpPr>
@@ -20409,7 +20977,7 @@
           <a:bodyPr wrap="square" lIns="0" tIns="0" rIns="0" bIns="0" rtlCol="0" anchor="t"/>
           <a:lstStyle/>
           <a:p>
-            <a:pPr algn="l" indent="0" marL="0">
+            <a:pPr marL="0" indent="0" algn="l">
               <a:buNone/>
             </a:pPr>
             <a:r>
@@ -20445,7 +21013,7 @@
           <a:bodyPr wrap="square" lIns="0" tIns="0" rIns="0" bIns="0" rtlCol="0" anchor="t"/>
           <a:lstStyle/>
           <a:p>
-            <a:pPr algn="l" indent="0" marL="0">
+            <a:pPr marL="0" indent="0" algn="l">
               <a:buNone/>
             </a:pPr>
             <a:r>
@@ -20481,10 +21049,17 @@
           </a:solidFill>
           <a:ln/>
         </p:spPr>
-      </p:sp>
-      <p:sp>
-        <p:nvSpPr>
-          <p:cNvPr id="9" name="rbac-card-1-title"/>
+        <p:txBody>
+          <a:bodyPr/>
+          <a:lstStyle/>
+          <a:p>
+            <a:endParaRPr lang="en-IN"/>
+          </a:p>
+        </p:txBody>
+      </p:sp>
+      <p:sp>
+        <p:nvSpPr>
+          <p:cNvPr id="3" name="rbac-card-1-title"/>
           <p:cNvSpPr txBox="1"/>
           <p:nvPr/>
         </p:nvSpPr>
@@ -20503,7 +21078,7 @@
           <a:bodyPr wrap="square" lIns="0" tIns="0" rIns="0" bIns="0" rtlCol="0" anchor="t"/>
           <a:lstStyle/>
           <a:p>
-            <a:pPr algn="l" indent="0" marL="0">
+            <a:pPr marL="0" indent="0" algn="l">
               <a:buNone/>
             </a:pPr>
             <a:r>
@@ -20539,7 +21114,7 @@
           <a:bodyPr wrap="square" lIns="0" tIns="0" rIns="0" bIns="0" rtlCol="0" anchor="t"/>
           <a:lstStyle/>
           <a:p>
-            <a:pPr algn="l" indent="0" marL="0">
+            <a:pPr marL="0" indent="0" algn="l">
               <a:buNone/>
             </a:pPr>
             <a:r>
@@ -20577,6 +21152,13 @@
           </a:solidFill>
           <a:ln/>
         </p:spPr>
+        <p:txBody>
+          <a:bodyPr/>
+          <a:lstStyle/>
+          <a:p>
+            <a:endParaRPr lang="en-IN"/>
+          </a:p>
+        </p:txBody>
       </p:sp>
       <p:sp>
         <p:nvSpPr>
@@ -20599,7 +21181,7 @@
           <a:bodyPr wrap="square" lIns="0" tIns="0" rIns="0" bIns="0" rtlCol="0" anchor="t"/>
           <a:lstStyle/>
           <a:p>
-            <a:pPr algn="l" indent="0" marL="0">
+            <a:pPr marL="0" indent="0" algn="l">
               <a:buNone/>
             </a:pPr>
             <a:r>
@@ -20635,7 +21217,7 @@
           <a:bodyPr wrap="square" lIns="0" tIns="0" rIns="0" bIns="0" rtlCol="0" anchor="t"/>
           <a:lstStyle/>
           <a:p>
-            <a:pPr algn="l" indent="0" marL="0">
+            <a:pPr marL="0" indent="0" algn="l">
               <a:buNone/>
             </a:pPr>
             <a:r>
@@ -20670,7 +21252,7 @@
           </a:prstGeom>
           <a:extLst>
             <a:ext uri="{C572A759-6A51-4108-AA02-DFA0A04FC94B}">
-              <ma14:wrappingTextBoxFlag xmlns:ma14="http://schemas.microsoft.com/office/mac/drawingml/2011/main" val="0"/>
+              <ma14:wrappingTextBoxFlag xmlns:ma14="http://schemas.microsoft.com/office/mac/drawingml/2011/main" xmlns="" val="0"/>
             </a:ext>
           </a:extLst>
         </p:spPr>
@@ -20688,7 +21270,7 @@
           <a:p>
             <a:pPr algn="r"/>
             <a:fld id="{F7021451-1387-4CA6-816F-3879F97B5CBC}" type="slidenum">
-              <a:rPr b="0" lang="en-US"/>
+              <a:rPr lang="en-US" b="0"/>
               <a:t>8</a:t>
             </a:fld>
             <a:endParaRPr lang="en-US"/>
@@ -20723,9 +21305,11 @@
       <p:sp>
         <p:nvSpPr>
           <p:cNvPr id="2" name="Text 0"/>
-          <p:cNvSpPr/>
+          <p:cNvSpPr>
+            <a:spLocks noGrp="1"/>
+          </p:cNvSpPr>
           <p:nvPr>
-            <p:ph idx="100" type="title" hasCustomPrompt="1"/>
+            <p:ph type="title" idx="100" hasCustomPrompt="1"/>
           </p:nvPr>
         </p:nvSpPr>
         <p:spPr>
@@ -20743,7 +21327,7 @@
           <a:bodyPr wrap="square" lIns="0" tIns="0" rIns="0" bIns="0" rtlCol="0" anchor="ctr"/>
           <a:lstStyle/>
           <a:p>
-            <a:pPr algn="l" indent="0" marL="0">
+            <a:pPr marL="0" indent="0" algn="l">
               <a:buNone/>
             </a:pPr>
             <a:r>
@@ -20781,7 +21365,7 @@
           <a:bodyPr wrap="square" lIns="0" tIns="0" rIns="0" bIns="0" rtlCol="0" anchor="ctr"/>
           <a:lstStyle/>
           <a:p>
-            <a:pPr algn="ctr" indent="0" marL="0">
+            <a:pPr marL="0" indent="0" algn="ctr">
               <a:buNone/>
             </a:pPr>
             <a:r>
@@ -20819,7 +21403,7 @@
           <a:bodyPr wrap="square" lIns="0" tIns="0" rIns="0" bIns="0" rtlCol="0" anchor="ctr"/>
           <a:lstStyle/>
           <a:p>
-            <a:pPr algn="ctr" indent="0" marL="0">
+            <a:pPr marL="0" indent="0" algn="ctr">
               <a:buNone/>
             </a:pPr>
             <a:r>
@@ -20857,7 +21441,7 @@
           <a:bodyPr wrap="square" lIns="0" tIns="0" rIns="0" bIns="0" rtlCol="0" anchor="ctr"/>
           <a:lstStyle/>
           <a:p>
-            <a:pPr algn="ctr" indent="0" marL="0">
+            <a:pPr marL="0" indent="0" algn="ctr">
               <a:buNone/>
             </a:pPr>
             <a:r>
@@ -20895,7 +21479,7 @@
           <a:bodyPr wrap="square" lIns="0" tIns="0" rIns="0" bIns="0" rtlCol="0" anchor="ctr"/>
           <a:lstStyle/>
           <a:p>
-            <a:pPr algn="ctr" indent="0" marL="0">
+            <a:pPr marL="0" indent="0" algn="ctr">
               <a:buNone/>
             </a:pPr>
             <a:r>
@@ -20933,7 +21517,7 @@
           <a:bodyPr wrap="square" lIns="0" tIns="0" rIns="0" bIns="0" rtlCol="0" anchor="ctr"/>
           <a:lstStyle/>
           <a:p>
-            <a:pPr algn="ctr" indent="0" marL="0">
+            <a:pPr marL="0" indent="0" algn="ctr">
               <a:buNone/>
             </a:pPr>
             <a:r>
@@ -20971,7 +21555,7 @@
           <a:bodyPr wrap="square" lIns="0" tIns="0" rIns="0" bIns="0" rtlCol="0" anchor="ctr"/>
           <a:lstStyle/>
           <a:p>
-            <a:pPr algn="ctr" indent="0" marL="0">
+            <a:pPr marL="0" indent="0" algn="ctr">
               <a:buNone/>
             </a:pPr>
             <a:r>
@@ -21007,6 +21591,13 @@
           </a:solidFill>
           <a:ln/>
         </p:spPr>
+        <p:txBody>
+          <a:bodyPr/>
+          <a:lstStyle/>
+          <a:p>
+            <a:endParaRPr lang="en-IN"/>
+          </a:p>
+        </p:txBody>
       </p:sp>
       <p:sp>
         <p:nvSpPr>
@@ -21029,7 +21620,7 @@
           <a:bodyPr wrap="square" lIns="0" tIns="0" rIns="0" bIns="0" rtlCol="0" anchor="ctr"/>
           <a:lstStyle/>
           <a:p>
-            <a:pPr indent="0" marL="0">
+            <a:pPr marL="0" indent="0">
               <a:buNone/>
             </a:pPr>
             <a:r>
@@ -21043,9 +21634,6 @@
               </a:rPr>
               <a:t>0 → 1</a:t>
             </a:r>
-            <a:pPr indent="0" marL="0">
-              <a:buNone/>
-            </a:pPr>
             <a:r>
               <a:rPr lang="en-US" sz="1300" dirty="0">
                 <a:solidFill>
@@ -21054,9 +21642,6 @@
               </a:rPr>
               <a:t>   </a:t>
             </a:r>
-            <a:pPr indent="0" marL="0">
-              <a:buNone/>
-            </a:pPr>
             <a:r>
               <a:rPr lang="en-US" sz="1300" b="1" dirty="0">
                 <a:solidFill>
@@ -21068,9 +21653,6 @@
               </a:rPr>
               <a:t>registerBattery</a:t>
             </a:r>
-            <a:pPr indent="0" marL="0">
-              <a:buNone/>
-            </a:pPr>
             <a:r>
               <a:rPr lang="en-US" sz="1300" dirty="0">
                 <a:solidFill>
@@ -21079,9 +21661,6 @@
               </a:rPr>
               <a:t>  (Supplier)</a:t>
             </a:r>
-            <a:pPr indent="0" marL="0">
-              <a:buNone/>
-            </a:pPr>
             <a:r>
               <a:rPr lang="en-US" sz="1300" dirty="0">
                 <a:solidFill>
@@ -21115,6 +21694,13 @@
           </a:solidFill>
           <a:ln/>
         </p:spPr>
+        <p:txBody>
+          <a:bodyPr/>
+          <a:lstStyle/>
+          <a:p>
+            <a:endParaRPr lang="en-IN"/>
+          </a:p>
+        </p:txBody>
       </p:sp>
       <p:sp>
         <p:nvSpPr>
@@ -21137,7 +21723,7 @@
           <a:bodyPr wrap="square" lIns="0" tIns="0" rIns="0" bIns="0" rtlCol="0" anchor="ctr"/>
           <a:lstStyle/>
           <a:p>
-            <a:pPr indent="0" marL="0">
+            <a:pPr marL="0" indent="0">
               <a:buNone/>
             </a:pPr>
             <a:r>
@@ -21151,9 +21737,6 @@
               </a:rPr>
               <a:t>1 → 2</a:t>
             </a:r>
-            <a:pPr indent="0" marL="0">
-              <a:buNone/>
-            </a:pPr>
             <a:r>
               <a:rPr lang="en-US" sz="1300" dirty="0">
                 <a:solidFill>
@@ -21162,9 +21745,6 @@
               </a:rPr>
               <a:t>   </a:t>
             </a:r>
-            <a:pPr indent="0" marL="0">
-              <a:buNone/>
-            </a:pPr>
             <a:r>
               <a:rPr lang="en-US" sz="1300" b="1" dirty="0">
                 <a:solidFill>
@@ -21176,9 +21756,6 @@
               </a:rPr>
               <a:t>recordRefining</a:t>
             </a:r>
-            <a:pPr indent="0" marL="0">
-              <a:buNone/>
-            </a:pPr>
             <a:r>
               <a:rPr lang="en-US" sz="1300" dirty="0">
                 <a:solidFill>
@@ -21187,9 +21764,6 @@
               </a:rPr>
               <a:t>  (Supplier)</a:t>
             </a:r>
-            <a:pPr indent="0" marL="0">
-              <a:buNone/>
-            </a:pPr>
             <a:r>
               <a:rPr lang="en-US" sz="1300" dirty="0">
                 <a:solidFill>
@@ -21223,6 +21797,13 @@
           </a:solidFill>
           <a:ln/>
         </p:spPr>
+        <p:txBody>
+          <a:bodyPr/>
+          <a:lstStyle/>
+          <a:p>
+            <a:endParaRPr lang="en-IN"/>
+          </a:p>
+        </p:txBody>
       </p:sp>
       <p:sp>
         <p:nvSpPr>
@@ -21245,7 +21826,7 @@
           <a:bodyPr wrap="square" lIns="0" tIns="0" rIns="0" bIns="0" rtlCol="0" anchor="ctr"/>
           <a:lstStyle/>
           <a:p>
-            <a:pPr indent="0" marL="0">
+            <a:pPr marL="0" indent="0">
               <a:buNone/>
             </a:pPr>
             <a:r>
@@ -21259,9 +21840,6 @@
               </a:rPr>
               <a:t>2 → 3</a:t>
             </a:r>
-            <a:pPr indent="0" marL="0">
-              <a:buNone/>
-            </a:pPr>
             <a:r>
               <a:rPr lang="en-US" sz="1300" dirty="0">
                 <a:solidFill>
@@ -21270,9 +21848,6 @@
               </a:rPr>
               <a:t>   </a:t>
             </a:r>
-            <a:pPr indent="0" marL="0">
-              <a:buNone/>
-            </a:pPr>
             <a:r>
               <a:rPr lang="en-US" sz="1300" b="1" dirty="0">
                 <a:solidFill>
@@ -21284,9 +21859,6 @@
               </a:rPr>
               <a:t>recordManufacturing</a:t>
             </a:r>
-            <a:pPr indent="0" marL="0">
-              <a:buNone/>
-            </a:pPr>
             <a:r>
               <a:rPr lang="en-US" sz="1300" dirty="0">
                 <a:solidFill>
@@ -21295,9 +21867,6 @@
               </a:rPr>
               <a:t>  (Manufacturer)</a:t>
             </a:r>
-            <a:pPr indent="0" marL="0">
-              <a:buNone/>
-            </a:pPr>
             <a:r>
               <a:rPr lang="en-US" sz="1300" dirty="0">
                 <a:solidFill>
@@ -21331,6 +21900,13 @@
           </a:solidFill>
           <a:ln/>
         </p:spPr>
+        <p:txBody>
+          <a:bodyPr/>
+          <a:lstStyle/>
+          <a:p>
+            <a:endParaRPr lang="en-IN"/>
+          </a:p>
+        </p:txBody>
       </p:sp>
       <p:sp>
         <p:nvSpPr>
@@ -21353,7 +21929,7 @@
           <a:bodyPr wrap="square" lIns="0" tIns="0" rIns="0" bIns="0" rtlCol="0" anchor="ctr"/>
           <a:lstStyle/>
           <a:p>
-            <a:pPr indent="0" marL="0">
+            <a:pPr marL="0" indent="0">
               <a:buNone/>
             </a:pPr>
             <a:r>
@@ -21367,9 +21943,6 @@
               </a:rPr>
               <a:t>3 → 4</a:t>
             </a:r>
-            <a:pPr indent="0" marL="0">
-              <a:buNone/>
-            </a:pPr>
             <a:r>
               <a:rPr lang="en-US" sz="1300" dirty="0">
                 <a:solidFill>
@@ -21378,9 +21951,6 @@
               </a:rPr>
               <a:t>   </a:t>
             </a:r>
-            <a:pPr indent="0" marL="0">
-              <a:buNone/>
-            </a:pPr>
             <a:r>
               <a:rPr lang="en-US" sz="1300" b="1" dirty="0">
                 <a:solidFill>
@@ -21392,9 +21962,6 @@
               </a:rPr>
               <a:t>recordDistribution</a:t>
             </a:r>
-            <a:pPr indent="0" marL="0">
-              <a:buNone/>
-            </a:pPr>
             <a:r>
               <a:rPr lang="en-US" sz="1300" dirty="0">
                 <a:solidFill>
@@ -21403,9 +21970,6 @@
               </a:rPr>
               <a:t>  (Manufacturer)</a:t>
             </a:r>
-            <a:pPr indent="0" marL="0">
-              <a:buNone/>
-            </a:pPr>
             <a:r>
               <a:rPr lang="en-US" sz="1300" dirty="0">
                 <a:solidFill>
@@ -21439,6 +22003,13 @@
           </a:solidFill>
           <a:ln/>
         </p:spPr>
+        <p:txBody>
+          <a:bodyPr/>
+          <a:lstStyle/>
+          <a:p>
+            <a:endParaRPr lang="en-IN"/>
+          </a:p>
+        </p:txBody>
       </p:sp>
       <p:sp>
         <p:nvSpPr>
@@ -21461,7 +22032,7 @@
           <a:bodyPr wrap="square" lIns="0" tIns="0" rIns="0" bIns="0" rtlCol="0" anchor="ctr"/>
           <a:lstStyle/>
           <a:p>
-            <a:pPr indent="0" marL="0">
+            <a:pPr marL="0" indent="0">
               <a:buNone/>
             </a:pPr>
             <a:r>
@@ -21475,9 +22046,6 @@
               </a:rPr>
               <a:t>4 → 5</a:t>
             </a:r>
-            <a:pPr indent="0" marL="0">
-              <a:buNone/>
-            </a:pPr>
             <a:r>
               <a:rPr lang="en-US" sz="1300" dirty="0">
                 <a:solidFill>
@@ -21486,9 +22054,6 @@
               </a:rPr>
               <a:t>   </a:t>
             </a:r>
-            <a:pPr indent="0" marL="0">
-              <a:buNone/>
-            </a:pPr>
             <a:r>
               <a:rPr lang="en-US" sz="1300" b="1" dirty="0">
                 <a:solidFill>
@@ -21500,9 +22065,6 @@
               </a:rPr>
               <a:t>recordEndOfLife</a:t>
             </a:r>
-            <a:pPr indent="0" marL="0">
-              <a:buNone/>
-            </a:pPr>
             <a:r>
               <a:rPr lang="en-US" sz="1300" dirty="0">
                 <a:solidFill>
@@ -21511,9 +22073,6 @@
               </a:rPr>
               <a:t>  (Supplier)</a:t>
             </a:r>
-            <a:pPr indent="0" marL="0">
-              <a:buNone/>
-            </a:pPr>
             <a:r>
               <a:rPr lang="en-US" sz="1300" dirty="0">
                 <a:solidFill>
@@ -21547,6 +22106,13 @@
           </a:solidFill>
           <a:ln/>
         </p:spPr>
+        <p:txBody>
+          <a:bodyPr/>
+          <a:lstStyle/>
+          <a:p>
+            <a:endParaRPr lang="en-IN"/>
+          </a:p>
+        </p:txBody>
       </p:sp>
       <p:sp>
         <p:nvSpPr>
@@ -21569,7 +22135,7 @@
           <a:bodyPr wrap="square" lIns="0" tIns="0" rIns="0" bIns="0" rtlCol="0" anchor="ctr"/>
           <a:lstStyle/>
           <a:p>
-            <a:pPr indent="0" marL="0">
+            <a:pPr marL="0" indent="0">
               <a:buNone/>
             </a:pPr>
             <a:r>
@@ -21583,9 +22149,6 @@
               </a:rPr>
               <a:t>5 → 6</a:t>
             </a:r>
-            <a:pPr indent="0" marL="0">
-              <a:buNone/>
-            </a:pPr>
             <a:r>
               <a:rPr lang="en-US" sz="1300" dirty="0">
                 <a:solidFill>
@@ -21594,9 +22157,6 @@
               </a:rPr>
               <a:t>   </a:t>
             </a:r>
-            <a:pPr indent="0" marL="0">
-              <a:buNone/>
-            </a:pPr>
             <a:r>
               <a:rPr lang="en-US" sz="1300" b="1" dirty="0">
                 <a:solidFill>
@@ -21608,9 +22168,6 @@
               </a:rPr>
               <a:t>recordRecycling</a:t>
             </a:r>
-            <a:pPr indent="0" marL="0">
-              <a:buNone/>
-            </a:pPr>
             <a:r>
               <a:rPr lang="en-US" sz="1300" dirty="0">
                 <a:solidFill>
@@ -21619,9 +22176,6 @@
               </a:rPr>
               <a:t>  (Supplier)</a:t>
             </a:r>
-            <a:pPr indent="0" marL="0">
-              <a:buNone/>
-            </a:pPr>
             <a:r>
               <a:rPr lang="en-US" sz="1300" dirty="0">
                 <a:solidFill>
@@ -21660,6 +22214,13 @@
             <a:prstDash val="solid"/>
           </a:ln>
         </p:spPr>
+        <p:txBody>
+          <a:bodyPr/>
+          <a:lstStyle/>
+          <a:p>
+            <a:endParaRPr lang="en-IN"/>
+          </a:p>
+        </p:txBody>
       </p:sp>
       <p:sp>
         <p:nvSpPr>
@@ -21682,7 +22243,7 @@
           <a:bodyPr wrap="square" lIns="0" tIns="0" rIns="0" bIns="0" rtlCol="0" anchor="t"/>
           <a:lstStyle/>
           <a:p>
-            <a:pPr algn="l" indent="0" marL="0">
+            <a:pPr marL="0" indent="0" algn="l">
               <a:buNone/>
             </a:pPr>
             <a:r>
@@ -21720,7 +22281,7 @@
           <a:bodyPr wrap="square" lIns="0" tIns="0" rIns="0" bIns="0" rtlCol="0" anchor="ctr"/>
           <a:lstStyle/>
           <a:p>
-            <a:pPr algn="ctr" indent="0" marL="0">
+            <a:pPr marL="0" indent="0" algn="ctr">
               <a:buNone/>
             </a:pPr>
             <a:r>
@@ -21756,7 +22317,7 @@
           <a:bodyPr wrap="square" lIns="0" tIns="0" rIns="0" bIns="0" rtlCol="0" anchor="ctr"/>
           <a:lstStyle/>
           <a:p>
-            <a:pPr indent="0" marL="0">
+            <a:pPr marL="0" indent="0">
               <a:buNone/>
             </a:pPr>
             <a:r>
@@ -21770,7 +22331,7 @@
             <a:endParaRPr lang="en-US" sz="1300" dirty="0"/>
           </a:p>
           <a:p>
-            <a:pPr indent="0" marL="0">
+            <a:pPr marL="0" indent="0">
               <a:buNone/>
             </a:pPr>
             <a:r>
@@ -21808,7 +22369,7 @@
           <a:bodyPr wrap="square" lIns="0" tIns="0" rIns="0" bIns="0" rtlCol="0" anchor="ctr"/>
           <a:lstStyle/>
           <a:p>
-            <a:pPr algn="ctr" indent="0" marL="0">
+            <a:pPr marL="0" indent="0" algn="ctr">
               <a:buNone/>
             </a:pPr>
             <a:r>
@@ -21844,7 +22405,7 @@
           <a:bodyPr wrap="square" lIns="0" tIns="0" rIns="0" bIns="0" rtlCol="0" anchor="ctr"/>
           <a:lstStyle/>
           <a:p>
-            <a:pPr indent="0" marL="0">
+            <a:pPr marL="0" indent="0">
               <a:buNone/>
             </a:pPr>
             <a:r>
@@ -21858,7 +22419,7 @@
             <a:endParaRPr lang="en-US" sz="1300" dirty="0"/>
           </a:p>
           <a:p>
-            <a:pPr indent="0" marL="0">
+            <a:pPr marL="0" indent="0">
               <a:buNone/>
             </a:pPr>
             <a:r>
@@ -21896,7 +22457,7 @@
           <a:bodyPr wrap="square" lIns="0" tIns="0" rIns="0" bIns="0" rtlCol="0" anchor="ctr"/>
           <a:lstStyle/>
           <a:p>
-            <a:pPr algn="ctr" indent="0" marL="0">
+            <a:pPr marL="0" indent="0" algn="ctr">
               <a:buNone/>
             </a:pPr>
             <a:r>
@@ -21932,7 +22493,7 @@
           <a:bodyPr wrap="square" lIns="0" tIns="0" rIns="0" bIns="0" rtlCol="0" anchor="ctr"/>
           <a:lstStyle/>
           <a:p>
-            <a:pPr indent="0" marL="0">
+            <a:pPr marL="0" indent="0">
               <a:buNone/>
             </a:pPr>
             <a:r>
@@ -21946,7 +22507,7 @@
             <a:endParaRPr lang="en-US" sz="1300" dirty="0"/>
           </a:p>
           <a:p>
-            <a:pPr indent="0" marL="0">
+            <a:pPr marL="0" indent="0">
               <a:buNone/>
             </a:pPr>
             <a:r>
@@ -21984,7 +22545,7 @@
           <a:bodyPr wrap="square" lIns="0" tIns="0" rIns="0" bIns="0" rtlCol="0" anchor="ctr"/>
           <a:lstStyle/>
           <a:p>
-            <a:pPr algn="ctr" indent="0" marL="0">
+            <a:pPr marL="0" indent="0" algn="ctr">
               <a:buNone/>
             </a:pPr>
             <a:r>
@@ -22020,7 +22581,7 @@
           <a:bodyPr wrap="square" lIns="0" tIns="0" rIns="0" bIns="0" rtlCol="0" anchor="ctr"/>
           <a:lstStyle/>
           <a:p>
-            <a:pPr indent="0" marL="0">
+            <a:pPr marL="0" indent="0">
               <a:buNone/>
             </a:pPr>
             <a:r>
@@ -22034,7 +22595,7 @@
             <a:endParaRPr lang="en-US" sz="1300" dirty="0"/>
           </a:p>
           <a:p>
-            <a:pPr indent="0" marL="0">
+            <a:pPr marL="0" indent="0">
               <a:buNone/>
             </a:pPr>
             <a:r>
@@ -22072,7 +22633,7 @@
           <a:bodyPr wrap="square" lIns="0" tIns="0" rIns="0" bIns="0" rtlCol="0" anchor="ctr"/>
           <a:lstStyle/>
           <a:p>
-            <a:pPr algn="ctr" indent="0" marL="0">
+            <a:pPr marL="0" indent="0" algn="ctr">
               <a:buNone/>
             </a:pPr>
             <a:r>
@@ -22108,7 +22669,7 @@
           <a:bodyPr wrap="square" lIns="0" tIns="0" rIns="0" bIns="0" rtlCol="0" anchor="ctr"/>
           <a:lstStyle/>
           <a:p>
-            <a:pPr indent="0" marL="0">
+            <a:pPr marL="0" indent="0">
               <a:buNone/>
             </a:pPr>
             <a:r>
@@ -22122,7 +22683,7 @@
             <a:endParaRPr lang="en-US" sz="1300" dirty="0"/>
           </a:p>
           <a:p>
-            <a:pPr indent="0" marL="0">
+            <a:pPr marL="0" indent="0">
               <a:buNone/>
             </a:pPr>
             <a:r>
@@ -22158,7 +22719,7 @@
           <a:bodyPr wrap="square" lIns="0" tIns="0" rIns="0" bIns="0" rtlCol="0" anchor="t"/>
           <a:lstStyle/>
           <a:p>
-            <a:pPr algn="l" indent="0" marL="0">
+            <a:pPr marL="0" indent="0" algn="l">
               <a:buNone/>
             </a:pPr>
             <a:r>
@@ -22194,7 +22755,7 @@
           <a:bodyPr wrap="square" lIns="0" tIns="0" rIns="0" bIns="0" rtlCol="0" anchor="t"/>
           <a:lstStyle/>
           <a:p>
-            <a:pPr algn="l" indent="0" marL="0">
+            <a:pPr marL="0" indent="0" algn="l">
               <a:buNone/>
             </a:pPr>
             <a:r>
@@ -22214,7 +22775,7 @@
       </p:sp>
       <p:sp>
         <p:nvSpPr>
-          <p:cNvPr id="25" name="Slide Number Placeholder 0"/>
+          <p:cNvPr id="35" name="Slide Number Placeholder 0"/>
           <p:cNvSpPr>
             <a:spLocks noGrp="1"/>
           </p:cNvSpPr>
@@ -22232,7 +22793,7 @@
           </a:prstGeom>
           <a:extLst>
             <a:ext uri="{C572A759-6A51-4108-AA02-DFA0A04FC94B}">
-              <ma14:wrappingTextBoxFlag xmlns:ma14="http://schemas.microsoft.com/office/mac/drawingml/2011/main" val="0"/>
+              <ma14:wrappingTextBoxFlag xmlns:ma14="http://schemas.microsoft.com/office/mac/drawingml/2011/main" xmlns="" val="0"/>
             </a:ext>
           </a:extLst>
         </p:spPr>
@@ -22250,7 +22811,7 @@
           <a:p>
             <a:pPr algn="r"/>
             <a:fld id="{F7021451-1387-4CA6-816F-3879F97B5CBC}" type="slidenum">
-              <a:rPr b="0" lang="en-US"/>
+              <a:rPr lang="en-US" b="0"/>
               <a:t>9</a:t>
             </a:fld>
             <a:endParaRPr lang="en-US"/>
@@ -22558,4 +23119,319 @@
     </a:ext>
   </a:extLst>
 </a:theme>
+</file>
+
+<file path=ppt/theme/theme2.xml><?xml version="1.0" encoding="utf-8"?>
+<a:theme xmlns:a="http://schemas.openxmlformats.org/drawingml/2006/main" name="Office Theme">
+  <a:themeElements>
+    <a:clrScheme name="Office">
+      <a:dk1>
+        <a:sysClr val="windowText" lastClr="000000"/>
+      </a:dk1>
+      <a:lt1>
+        <a:sysClr val="window" lastClr="FFFFFF"/>
+      </a:lt1>
+      <a:dk2>
+        <a:srgbClr val="0E2841"/>
+      </a:dk2>
+      <a:lt2>
+        <a:srgbClr val="E8E8E8"/>
+      </a:lt2>
+      <a:accent1>
+        <a:srgbClr val="156082"/>
+      </a:accent1>
+      <a:accent2>
+        <a:srgbClr val="E97132"/>
+      </a:accent2>
+      <a:accent3>
+        <a:srgbClr val="196B24"/>
+      </a:accent3>
+      <a:accent4>
+        <a:srgbClr val="0F9ED5"/>
+      </a:accent4>
+      <a:accent5>
+        <a:srgbClr val="A02B93"/>
+      </a:accent5>
+      <a:accent6>
+        <a:srgbClr val="4EA72E"/>
+      </a:accent6>
+      <a:hlink>
+        <a:srgbClr val="467886"/>
+      </a:hlink>
+      <a:folHlink>
+        <a:srgbClr val="96607D"/>
+      </a:folHlink>
+    </a:clrScheme>
+    <a:fontScheme name="Office">
+      <a:majorFont>
+        <a:latin typeface="Aptos Display" panose="02110004020202020204"/>
+        <a:ea typeface=""/>
+        <a:cs typeface=""/>
+        <a:font script="Jpan" typeface="游ゴシック Light"/>
+        <a:font script="Hang" typeface="맑은 고딕"/>
+        <a:font script="Hans" typeface="等线 Light"/>
+        <a:font script="Hant" typeface="新細明體"/>
+        <a:font script="Arab" typeface="Times New Roman"/>
+        <a:font script="Hebr" typeface="Times New Roman"/>
+        <a:font script="Thai" typeface="Angsana New"/>
+        <a:font script="Ethi" typeface="Nyala"/>
+        <a:font script="Beng" typeface="Vrinda"/>
+        <a:font script="Gujr" typeface="Shruti"/>
+        <a:font script="Khmr" typeface="MoolBoran"/>
+        <a:font script="Knda" typeface="Tunga"/>
+        <a:font script="Guru" typeface="Raavi"/>
+        <a:font script="Cans" typeface="Euphemia"/>
+        <a:font script="Cher" typeface="Plantagenet Cherokee"/>
+        <a:font script="Yiii" typeface="Microsoft Yi Baiti"/>
+        <a:font script="Tibt" typeface="Microsoft Himalaya"/>
+        <a:font script="Thaa" typeface="MV Boli"/>
+        <a:font script="Deva" typeface="Mangal"/>
+        <a:font script="Telu" typeface="Gautami"/>
+        <a:font script="Taml" typeface="Latha"/>
+        <a:font script="Syrc" typeface="Estrangelo Edessa"/>
+        <a:font script="Orya" typeface="Kalinga"/>
+        <a:font script="Mlym" typeface="Kartika"/>
+        <a:font script="Laoo" typeface="DokChampa"/>
+        <a:font script="Sinh" typeface="Iskoola Pota"/>
+        <a:font script="Mong" typeface="Mongolian Baiti"/>
+        <a:font script="Viet" typeface="Times New Roman"/>
+        <a:font script="Uigh" typeface="Microsoft Uighur"/>
+        <a:font script="Geor" typeface="Sylfaen"/>
+        <a:font script="Armn" typeface="Arial"/>
+        <a:font script="Bugi" typeface="Leelawadee UI"/>
+        <a:font script="Bopo" typeface="Microsoft JhengHei"/>
+        <a:font script="Java" typeface="Javanese Text"/>
+        <a:font script="Lisu" typeface="Segoe UI"/>
+        <a:font script="Mymr" typeface="Myanmar Text"/>
+        <a:font script="Nkoo" typeface="Ebrima"/>
+        <a:font script="Olck" typeface="Nirmala UI"/>
+        <a:font script="Osma" typeface="Ebrima"/>
+        <a:font script="Phag" typeface="Phagspa"/>
+        <a:font script="Syrn" typeface="Estrangelo Edessa"/>
+        <a:font script="Syrj" typeface="Estrangelo Edessa"/>
+        <a:font script="Syre" typeface="Estrangelo Edessa"/>
+        <a:font script="Sora" typeface="Nirmala UI"/>
+        <a:font script="Tale" typeface="Microsoft Tai Le"/>
+        <a:font script="Talu" typeface="Microsoft New Tai Lue"/>
+        <a:font script="Tfng" typeface="Ebrima"/>
+      </a:majorFont>
+      <a:minorFont>
+        <a:latin typeface="Aptos" panose="02110004020202020204"/>
+        <a:ea typeface=""/>
+        <a:cs typeface=""/>
+        <a:font script="Jpan" typeface="游ゴシック"/>
+        <a:font script="Hang" typeface="맑은 고딕"/>
+        <a:font script="Hans" typeface="等线"/>
+        <a:font script="Hant" typeface="新細明體"/>
+        <a:font script="Arab" typeface="Arial"/>
+        <a:font script="Hebr" typeface="Arial"/>
+        <a:font script="Thai" typeface="Cordia New"/>
+        <a:font script="Ethi" typeface="Nyala"/>
+        <a:font script="Beng" typeface="Vrinda"/>
+        <a:font script="Gujr" typeface="Shruti"/>
+        <a:font script="Khmr" typeface="DaunPenh"/>
+        <a:font script="Knda" typeface="Tunga"/>
+        <a:font script="Guru" typeface="Raavi"/>
+        <a:font script="Cans" typeface="Euphemia"/>
+        <a:font script="Cher" typeface="Plantagenet Cherokee"/>
+        <a:font script="Yiii" typeface="Microsoft Yi Baiti"/>
+        <a:font script="Tibt" typeface="Microsoft Himalaya"/>
+        <a:font script="Thaa" typeface="MV Boli"/>
+        <a:font script="Deva" typeface="Mangal"/>
+        <a:font script="Telu" typeface="Gautami"/>
+        <a:font script="Taml" typeface="Latha"/>
+        <a:font script="Syrc" typeface="Estrangelo Edessa"/>
+        <a:font script="Orya" typeface="Kalinga"/>
+        <a:font script="Mlym" typeface="Kartika"/>
+        <a:font script="Laoo" typeface="DokChampa"/>
+        <a:font script="Sinh" typeface="Iskoola Pota"/>
+        <a:font script="Mong" typeface="Mongolian Baiti"/>
+        <a:font script="Viet" typeface="Arial"/>
+        <a:font script="Uigh" typeface="Microsoft Uighur"/>
+        <a:font script="Geor" typeface="Sylfaen"/>
+        <a:font script="Armn" typeface="Arial"/>
+        <a:font script="Bugi" typeface="Leelawadee UI"/>
+        <a:font script="Bopo" typeface="Microsoft JhengHei"/>
+        <a:font script="Java" typeface="Javanese Text"/>
+        <a:font script="Lisu" typeface="Segoe UI"/>
+        <a:font script="Mymr" typeface="Myanmar Text"/>
+        <a:font script="Nkoo" typeface="Ebrima"/>
+        <a:font script="Olck" typeface="Nirmala UI"/>
+        <a:font script="Osma" typeface="Ebrima"/>
+        <a:font script="Phag" typeface="Phagspa"/>
+        <a:font script="Syrn" typeface="Estrangelo Edessa"/>
+        <a:font script="Syrj" typeface="Estrangelo Edessa"/>
+        <a:font script="Syre" typeface="Estrangelo Edessa"/>
+        <a:font script="Sora" typeface="Nirmala UI"/>
+        <a:font script="Tale" typeface="Microsoft Tai Le"/>
+        <a:font script="Talu" typeface="Microsoft New Tai Lue"/>
+        <a:font script="Tfng" typeface="Ebrima"/>
+      </a:minorFont>
+    </a:fontScheme>
+    <a:fmtScheme name="Office">
+      <a:fillStyleLst>
+        <a:solidFill>
+          <a:schemeClr val="phClr"/>
+        </a:solidFill>
+        <a:gradFill rotWithShape="1">
+          <a:gsLst>
+            <a:gs pos="0">
+              <a:schemeClr val="phClr">
+                <a:lumMod val="110000"/>
+                <a:satMod val="105000"/>
+                <a:tint val="67000"/>
+              </a:schemeClr>
+            </a:gs>
+            <a:gs pos="50000">
+              <a:schemeClr val="phClr">
+                <a:lumMod val="105000"/>
+                <a:satMod val="103000"/>
+                <a:tint val="73000"/>
+              </a:schemeClr>
+            </a:gs>
+            <a:gs pos="100000">
+              <a:schemeClr val="phClr">
+                <a:lumMod val="105000"/>
+                <a:satMod val="109000"/>
+                <a:tint val="81000"/>
+              </a:schemeClr>
+            </a:gs>
+          </a:gsLst>
+          <a:lin ang="5400000" scaled="0"/>
+        </a:gradFill>
+        <a:gradFill rotWithShape="1">
+          <a:gsLst>
+            <a:gs pos="0">
+              <a:schemeClr val="phClr">
+                <a:satMod val="103000"/>
+                <a:lumMod val="102000"/>
+                <a:tint val="94000"/>
+              </a:schemeClr>
+            </a:gs>
+            <a:gs pos="50000">
+              <a:schemeClr val="phClr">
+                <a:satMod val="110000"/>
+                <a:lumMod val="100000"/>
+                <a:shade val="100000"/>
+              </a:schemeClr>
+            </a:gs>
+            <a:gs pos="100000">
+              <a:schemeClr val="phClr">
+                <a:lumMod val="99000"/>
+                <a:satMod val="120000"/>
+                <a:shade val="78000"/>
+              </a:schemeClr>
+            </a:gs>
+          </a:gsLst>
+          <a:lin ang="5400000" scaled="0"/>
+        </a:gradFill>
+      </a:fillStyleLst>
+      <a:lnStyleLst>
+        <a:ln w="12700" cap="flat" cmpd="sng" algn="ctr">
+          <a:solidFill>
+            <a:schemeClr val="phClr"/>
+          </a:solidFill>
+          <a:prstDash val="solid"/>
+          <a:miter lim="800000"/>
+        </a:ln>
+        <a:ln w="19050" cap="flat" cmpd="sng" algn="ctr">
+          <a:solidFill>
+            <a:schemeClr val="phClr"/>
+          </a:solidFill>
+          <a:prstDash val="solid"/>
+          <a:miter lim="800000"/>
+        </a:ln>
+        <a:ln w="25400" cap="flat" cmpd="sng" algn="ctr">
+          <a:solidFill>
+            <a:schemeClr val="phClr"/>
+          </a:solidFill>
+          <a:prstDash val="solid"/>
+          <a:miter lim="800000"/>
+        </a:ln>
+      </a:lnStyleLst>
+      <a:effectStyleLst>
+        <a:effectStyle>
+          <a:effectLst/>
+        </a:effectStyle>
+        <a:effectStyle>
+          <a:effectLst/>
+        </a:effectStyle>
+        <a:effectStyle>
+          <a:effectLst>
+            <a:outerShdw blurRad="57150" dist="19050" dir="5400000" algn="ctr" rotWithShape="0">
+              <a:srgbClr val="000000">
+                <a:alpha val="63000"/>
+              </a:srgbClr>
+            </a:outerShdw>
+          </a:effectLst>
+        </a:effectStyle>
+      </a:effectStyleLst>
+      <a:bgFillStyleLst>
+        <a:solidFill>
+          <a:schemeClr val="phClr"/>
+        </a:solidFill>
+        <a:solidFill>
+          <a:schemeClr val="phClr">
+            <a:tint val="95000"/>
+            <a:satMod val="170000"/>
+          </a:schemeClr>
+        </a:solidFill>
+        <a:gradFill rotWithShape="1">
+          <a:gsLst>
+            <a:gs pos="0">
+              <a:schemeClr val="phClr">
+                <a:tint val="93000"/>
+                <a:satMod val="150000"/>
+                <a:shade val="98000"/>
+                <a:lumMod val="102000"/>
+              </a:schemeClr>
+            </a:gs>
+            <a:gs pos="50000">
+              <a:schemeClr val="phClr">
+                <a:tint val="98000"/>
+                <a:satMod val="130000"/>
+                <a:shade val="90000"/>
+                <a:lumMod val="103000"/>
+              </a:schemeClr>
+            </a:gs>
+            <a:gs pos="100000">
+              <a:schemeClr val="phClr">
+                <a:shade val="63000"/>
+                <a:satMod val="120000"/>
+              </a:schemeClr>
+            </a:gs>
+          </a:gsLst>
+          <a:lin ang="5400000" scaled="0"/>
+        </a:gradFill>
+      </a:bgFillStyleLst>
+    </a:fmtScheme>
+  </a:themeElements>
+  <a:objectDefaults>
+    <a:lnDef>
+      <a:spPr/>
+      <a:bodyPr/>
+      <a:lstStyle/>
+      <a:style>
+        <a:lnRef idx="2">
+          <a:schemeClr val="accent1"/>
+        </a:lnRef>
+        <a:fillRef idx="0">
+          <a:schemeClr val="accent1"/>
+        </a:fillRef>
+        <a:effectRef idx="1">
+          <a:schemeClr val="accent1"/>
+        </a:effectRef>
+        <a:fontRef idx="minor">
+          <a:schemeClr val="tx1"/>
+        </a:fontRef>
+      </a:style>
+    </a:lnDef>
+  </a:objectDefaults>
+  <a:extraClrSchemeLst/>
+  <a:extLst>
+    <a:ext uri="{05A4C25C-085E-4340-85A3-A5531E510DB2}">
+      <thm15:themeFamily xmlns:thm15="http://schemas.microsoft.com/office/thememl/2012/main" name="Office Theme" id="{2E142A2C-CD16-42D6-873A-C26D2A0506FA}" vid="{1BDDFF52-6CD6-40A5-AB3C-68EB2F1E4D0A}"/>
+    </a:ext>
+  </a:extLst>
+</a:theme>
 </file>